--- a/AI_트렌드_2025-2026.pptx
+++ b/AI_트렌드_2025-2026.pptx
@@ -35,6 +35,7 @@
     <p:sldId id="283" r:id="rId34"/>
     <p:sldId id="284" r:id="rId35"/>
     <p:sldId id="285" r:id="rId36"/>
+    <p:sldId id="286" r:id="rId37"/>
   </p:sldIdLst>
   <p:sldSz cx="12191695" cy="6858000" type="screen4x3"/>
   <p:notesSz cx="6858000" cy="9144000"/>
@@ -5305,7 +5306,7 @@
               </a:defRPr>
             </a:pPr>
             <a:r>
-              <a:t>"바이브 코딩은 passé" — Karpathy</a:t>
+              <a:t>"바이브 코딩은 이제 지나간 것" — Karpathy</a:t>
             </a:r>
             <a:br/>
             <a:r>
@@ -12507,8 +12508,8 @@
         </p:nvSpPr>
         <p:spPr>
           <a:xfrm>
-            <a:off x="457200" y="1645920"/>
-            <a:ext cx="10972800" cy="822960"/>
+            <a:off x="457200" y="1463040"/>
+            <a:ext cx="10972800" cy="685800"/>
           </a:xfrm>
           <a:prstGeom prst="roundRect">
             <a:avLst/>
@@ -12551,8 +12552,8 @@
         </p:nvSpPr>
         <p:spPr>
           <a:xfrm>
-            <a:off x="457200" y="1645920"/>
-            <a:ext cx="91440" cy="822960"/>
+            <a:off x="457200" y="1463040"/>
+            <a:ext cx="91440" cy="685800"/>
           </a:xfrm>
           <a:prstGeom prst="rect">
             <a:avLst/>
@@ -12588,14 +12589,74 @@
       </p:sp>
       <p:sp>
         <p:nvSpPr>
-          <p:cNvPr id="6" name="TextBox 5"/>
-          <p:cNvSpPr txBox="1"/>
-          <p:nvPr/>
-        </p:nvSpPr>
-        <p:spPr>
-          <a:xfrm>
-            <a:off x="822960" y="1783080"/>
-            <a:ext cx="2286000" cy="457200"/>
+          <p:cNvPr id="6" name="Oval 5"/>
+          <p:cNvSpPr/>
+          <p:nvPr/>
+        </p:nvSpPr>
+        <p:spPr>
+          <a:xfrm>
+            <a:off x="685800" y="1554480"/>
+            <a:ext cx="502920" cy="502920"/>
+          </a:xfrm>
+          <a:prstGeom prst="ellipse">
+            <a:avLst/>
+          </a:prstGeom>
+          <a:solidFill>
+            <a:srgbClr val="7C3AED"/>
+          </a:solidFill>
+          <a:ln>
+            <a:noFill/>
+          </a:ln>
+          <a:effectLst/>
+        </p:spPr>
+        <p:style>
+          <a:lnRef idx="1">
+            <a:schemeClr val="accent1"/>
+          </a:lnRef>
+          <a:fillRef idx="3">
+            <a:schemeClr val="accent1"/>
+          </a:fillRef>
+          <a:effectRef idx="2">
+            <a:schemeClr val="accent1"/>
+          </a:effectRef>
+          <a:fontRef idx="minor">
+            <a:schemeClr val="lt1"/>
+          </a:fontRef>
+        </p:style>
+        <p:txBody>
+          <a:bodyPr rtlCol="0" anchor="ctr" wrap="none"/>
+          <a:lstStyle/>
+          <a:p>
+            <a:pPr algn="ctr">
+              <a:spcBef>
+                <a:spcPts val="0"/>
+              </a:spcBef>
+              <a:spcAft>
+                <a:spcPts val="0"/>
+              </a:spcAft>
+              <a:defRPr sz="1000" b="1">
+                <a:solidFill>
+                  <a:srgbClr val="FFFFFF"/>
+                </a:solidFill>
+                <a:latin typeface="Apple SD Gothic Neo"/>
+              </a:defRPr>
+            </a:pPr>
+            <a:r>
+              <a:t>LG</a:t>
+            </a:r>
+          </a:p>
+        </p:txBody>
+      </p:sp>
+      <p:sp>
+        <p:nvSpPr>
+          <p:cNvPr id="7" name="TextBox 6"/>
+          <p:cNvSpPr txBox="1"/>
+          <p:nvPr/>
+        </p:nvSpPr>
+        <p:spPr>
+          <a:xfrm>
+            <a:off x="1371600" y="1554480"/>
+            <a:ext cx="1828800" cy="457200"/>
           </a:xfrm>
           <a:prstGeom prst="rect">
             <a:avLst/>
@@ -12609,7 +12670,7 @@
           <a:lstStyle/>
           <a:p>
             <a:pPr algn="l">
-              <a:defRPr sz="1800" b="1">
+              <a:defRPr sz="1700" b="1">
                 <a:solidFill>
                   <a:srgbClr val="7C3AED"/>
                 </a:solidFill>
@@ -12624,13 +12685,13 @@
       </p:sp>
       <p:sp>
         <p:nvSpPr>
-          <p:cNvPr id="7" name="TextBox 6"/>
-          <p:cNvSpPr txBox="1"/>
-          <p:nvPr/>
-        </p:nvSpPr>
-        <p:spPr>
-          <a:xfrm>
-            <a:off x="3200400" y="1783080"/>
+          <p:cNvPr id="8" name="TextBox 7"/>
+          <p:cNvSpPr txBox="1"/>
+          <p:nvPr/>
+        </p:nvSpPr>
+        <p:spPr>
+          <a:xfrm>
+            <a:off x="3200400" y="1554480"/>
             <a:ext cx="3200400" cy="457200"/>
           </a:xfrm>
           <a:prstGeom prst="rect">
@@ -12653,25 +12714,21 @@
               </a:defRPr>
             </a:pPr>
             <a:r>
-              <a:t>코드(Python)</a:t>
-            </a:r>
-            <a:br/>
-            <a:r>
-              <a:t>그래프 상태 머신</a:t>
-            </a:r>
-          </a:p>
-        </p:txBody>
-      </p:sp>
-      <p:sp>
-        <p:nvSpPr>
-          <p:cNvPr id="8" name="TextBox 7"/>
-          <p:cNvSpPr txBox="1"/>
-          <p:nvPr/>
-        </p:nvSpPr>
-        <p:spPr>
-          <a:xfrm>
-            <a:off x="6583680" y="1783080"/>
-            <a:ext cx="2560320" cy="457200"/>
+              <a:t>코드(Python), 그래프 상태 머신</a:t>
+            </a:r>
+          </a:p>
+        </p:txBody>
+      </p:sp>
+      <p:sp>
+        <p:nvSpPr>
+          <p:cNvPr id="9" name="TextBox 8"/>
+          <p:cNvSpPr txBox="1"/>
+          <p:nvPr/>
+        </p:nvSpPr>
+        <p:spPr>
+          <a:xfrm>
+            <a:off x="6583680" y="1554480"/>
+            <a:ext cx="2286000" cy="457200"/>
           </a:xfrm>
           <a:prstGeom prst="rect">
             <a:avLst/>
@@ -12700,14 +12757,14 @@
       </p:sp>
       <p:sp>
         <p:nvSpPr>
-          <p:cNvPr id="9" name="TextBox 8"/>
-          <p:cNvSpPr txBox="1"/>
-          <p:nvPr/>
-        </p:nvSpPr>
-        <p:spPr>
-          <a:xfrm>
-            <a:off x="9326880" y="1783080"/>
-            <a:ext cx="2103120" cy="457200"/>
+          <p:cNvPr id="10" name="TextBox 9"/>
+          <p:cNvSpPr txBox="1"/>
+          <p:nvPr/>
+        </p:nvSpPr>
+        <p:spPr>
+          <a:xfrm>
+            <a:off x="8961120" y="1554480"/>
+            <a:ext cx="2468880" cy="457200"/>
           </a:xfrm>
           <a:prstGeom prst="rect">
             <a:avLst/>
@@ -12736,14 +12793,14 @@
       </p:sp>
       <p:sp>
         <p:nvSpPr>
-          <p:cNvPr id="10" name="Rounded Rectangle 9"/>
+          <p:cNvPr id="11" name="Rounded Rectangle 10"/>
           <p:cNvSpPr/>
           <p:nvPr/>
         </p:nvSpPr>
         <p:spPr>
           <a:xfrm>
-            <a:off x="457200" y="2606040"/>
-            <a:ext cx="10972800" cy="822960"/>
+            <a:off x="457200" y="2240280"/>
+            <a:ext cx="10972800" cy="685800"/>
           </a:xfrm>
           <a:prstGeom prst="roundRect">
             <a:avLst/>
@@ -12780,14 +12837,14 @@
       </p:sp>
       <p:sp>
         <p:nvSpPr>
-          <p:cNvPr id="11" name="Rectangle 10"/>
+          <p:cNvPr id="12" name="Rectangle 11"/>
           <p:cNvSpPr/>
           <p:nvPr/>
         </p:nvSpPr>
         <p:spPr>
           <a:xfrm>
-            <a:off x="457200" y="2606040"/>
-            <a:ext cx="91440" cy="822960"/>
+            <a:off x="457200" y="2240280"/>
+            <a:ext cx="91440" cy="685800"/>
           </a:xfrm>
           <a:prstGeom prst="rect">
             <a:avLst/>
@@ -12823,14 +12880,74 @@
       </p:sp>
       <p:sp>
         <p:nvSpPr>
-          <p:cNvPr id="12" name="TextBox 11"/>
-          <p:cNvSpPr txBox="1"/>
-          <p:nvPr/>
-        </p:nvSpPr>
-        <p:spPr>
-          <a:xfrm>
-            <a:off x="822960" y="2743200"/>
-            <a:ext cx="2286000" cy="457200"/>
+          <p:cNvPr id="13" name="Oval 12"/>
+          <p:cNvSpPr/>
+          <p:nvPr/>
+        </p:nvSpPr>
+        <p:spPr>
+          <a:xfrm>
+            <a:off x="685800" y="2331720"/>
+            <a:ext cx="502920" cy="502920"/>
+          </a:xfrm>
+          <a:prstGeom prst="ellipse">
+            <a:avLst/>
+          </a:prstGeom>
+          <a:solidFill>
+            <a:srgbClr val="10B981"/>
+          </a:solidFill>
+          <a:ln>
+            <a:noFill/>
+          </a:ln>
+          <a:effectLst/>
+        </p:spPr>
+        <p:style>
+          <a:lnRef idx="1">
+            <a:schemeClr val="accent1"/>
+          </a:lnRef>
+          <a:fillRef idx="3">
+            <a:schemeClr val="accent1"/>
+          </a:fillRef>
+          <a:effectRef idx="2">
+            <a:schemeClr val="accent1"/>
+          </a:effectRef>
+          <a:fontRef idx="minor">
+            <a:schemeClr val="lt1"/>
+          </a:fontRef>
+        </p:style>
+        <p:txBody>
+          <a:bodyPr rtlCol="0" anchor="ctr" wrap="none"/>
+          <a:lstStyle/>
+          <a:p>
+            <a:pPr algn="ctr">
+              <a:spcBef>
+                <a:spcPts val="0"/>
+              </a:spcBef>
+              <a:spcAft>
+                <a:spcPts val="0"/>
+              </a:spcAft>
+              <a:defRPr sz="1000" b="1">
+                <a:solidFill>
+                  <a:srgbClr val="FFFFFF"/>
+                </a:solidFill>
+                <a:latin typeface="Apple SD Gothic Neo"/>
+              </a:defRPr>
+            </a:pPr>
+            <a:r>
+              <a:t>CR</a:t>
+            </a:r>
+          </a:p>
+        </p:txBody>
+      </p:sp>
+      <p:sp>
+        <p:nvSpPr>
+          <p:cNvPr id="14" name="TextBox 13"/>
+          <p:cNvSpPr txBox="1"/>
+          <p:nvPr/>
+        </p:nvSpPr>
+        <p:spPr>
+          <a:xfrm>
+            <a:off x="1371600" y="2331720"/>
+            <a:ext cx="1828800" cy="457200"/>
           </a:xfrm>
           <a:prstGeom prst="rect">
             <a:avLst/>
@@ -12844,7 +12961,7 @@
           <a:lstStyle/>
           <a:p>
             <a:pPr algn="l">
-              <a:defRPr sz="1800" b="1">
+              <a:defRPr sz="1700" b="1">
                 <a:solidFill>
                   <a:srgbClr val="10B981"/>
                 </a:solidFill>
@@ -12859,13 +12976,13 @@
       </p:sp>
       <p:sp>
         <p:nvSpPr>
-          <p:cNvPr id="13" name="TextBox 12"/>
-          <p:cNvSpPr txBox="1"/>
-          <p:nvPr/>
-        </p:nvSpPr>
-        <p:spPr>
-          <a:xfrm>
-            <a:off x="3200400" y="2743200"/>
+          <p:cNvPr id="15" name="TextBox 14"/>
+          <p:cNvSpPr txBox="1"/>
+          <p:nvPr/>
+        </p:nvSpPr>
+        <p:spPr>
+          <a:xfrm>
+            <a:off x="3200400" y="2331720"/>
             <a:ext cx="3200400" cy="457200"/>
           </a:xfrm>
           <a:prstGeom prst="rect">
@@ -12888,25 +13005,21 @@
               </a:defRPr>
             </a:pPr>
             <a:r>
-              <a:t>코드(Python)</a:t>
-            </a:r>
-            <a:br/>
-            <a:r>
-              <a:t>역할 기반 팀</a:t>
-            </a:r>
-          </a:p>
-        </p:txBody>
-      </p:sp>
-      <p:sp>
-        <p:nvSpPr>
-          <p:cNvPr id="14" name="TextBox 13"/>
-          <p:cNvSpPr txBox="1"/>
-          <p:nvPr/>
-        </p:nvSpPr>
-        <p:spPr>
-          <a:xfrm>
-            <a:off x="6583680" y="2743200"/>
-            <a:ext cx="2560320" cy="457200"/>
+              <a:t>코드(Python), 역할 기반 팀</a:t>
+            </a:r>
+          </a:p>
+        </p:txBody>
+      </p:sp>
+      <p:sp>
+        <p:nvSpPr>
+          <p:cNvPr id="16" name="TextBox 15"/>
+          <p:cNvSpPr txBox="1"/>
+          <p:nvPr/>
+        </p:nvSpPr>
+        <p:spPr>
+          <a:xfrm>
+            <a:off x="6583680" y="2331720"/>
+            <a:ext cx="2286000" cy="457200"/>
           </a:xfrm>
           <a:prstGeom prst="rect">
             <a:avLst/>
@@ -12935,14 +13048,14 @@
       </p:sp>
       <p:sp>
         <p:nvSpPr>
-          <p:cNvPr id="15" name="TextBox 14"/>
-          <p:cNvSpPr txBox="1"/>
-          <p:nvPr/>
-        </p:nvSpPr>
-        <p:spPr>
-          <a:xfrm>
-            <a:off x="9326880" y="2743200"/>
-            <a:ext cx="2103120" cy="457200"/>
+          <p:cNvPr id="17" name="TextBox 16"/>
+          <p:cNvSpPr txBox="1"/>
+          <p:nvPr/>
+        </p:nvSpPr>
+        <p:spPr>
+          <a:xfrm>
+            <a:off x="8961120" y="2331720"/>
+            <a:ext cx="2468880" cy="457200"/>
           </a:xfrm>
           <a:prstGeom prst="rect">
             <a:avLst/>
@@ -12971,14 +13084,14 @@
       </p:sp>
       <p:sp>
         <p:nvSpPr>
-          <p:cNvPr id="16" name="Rounded Rectangle 15"/>
+          <p:cNvPr id="18" name="Rounded Rectangle 17"/>
           <p:cNvSpPr/>
           <p:nvPr/>
         </p:nvSpPr>
         <p:spPr>
           <a:xfrm>
-            <a:off x="457200" y="3566160"/>
-            <a:ext cx="10972800" cy="822960"/>
+            <a:off x="457200" y="3017520"/>
+            <a:ext cx="10972800" cy="685800"/>
           </a:xfrm>
           <a:prstGeom prst="roundRect">
             <a:avLst/>
@@ -13015,14 +13128,14 @@
       </p:sp>
       <p:sp>
         <p:nvSpPr>
-          <p:cNvPr id="17" name="Rectangle 16"/>
+          <p:cNvPr id="19" name="Rectangle 18"/>
           <p:cNvSpPr/>
           <p:nvPr/>
         </p:nvSpPr>
         <p:spPr>
           <a:xfrm>
-            <a:off x="457200" y="3566160"/>
-            <a:ext cx="91440" cy="822960"/>
+            <a:off x="457200" y="3017520"/>
+            <a:ext cx="91440" cy="685800"/>
           </a:xfrm>
           <a:prstGeom prst="rect">
             <a:avLst/>
@@ -13058,14 +13171,74 @@
       </p:sp>
       <p:sp>
         <p:nvSpPr>
-          <p:cNvPr id="18" name="TextBox 17"/>
-          <p:cNvSpPr txBox="1"/>
-          <p:nvPr/>
-        </p:nvSpPr>
-        <p:spPr>
-          <a:xfrm>
-            <a:off x="822960" y="3703320"/>
-            <a:ext cx="2286000" cy="457200"/>
+          <p:cNvPr id="20" name="Oval 19"/>
+          <p:cNvSpPr/>
+          <p:nvPr/>
+        </p:nvSpPr>
+        <p:spPr>
+          <a:xfrm>
+            <a:off x="685800" y="3108960"/>
+            <a:ext cx="502920" cy="502920"/>
+          </a:xfrm>
+          <a:prstGeom prst="ellipse">
+            <a:avLst/>
+          </a:prstGeom>
+          <a:solidFill>
+            <a:srgbClr val="00D2FF"/>
+          </a:solidFill>
+          <a:ln>
+            <a:noFill/>
+          </a:ln>
+          <a:effectLst/>
+        </p:spPr>
+        <p:style>
+          <a:lnRef idx="1">
+            <a:schemeClr val="accent1"/>
+          </a:lnRef>
+          <a:fillRef idx="3">
+            <a:schemeClr val="accent1"/>
+          </a:fillRef>
+          <a:effectRef idx="2">
+            <a:schemeClr val="accent1"/>
+          </a:effectRef>
+          <a:fontRef idx="minor">
+            <a:schemeClr val="lt1"/>
+          </a:fontRef>
+        </p:style>
+        <p:txBody>
+          <a:bodyPr rtlCol="0" anchor="ctr" wrap="none"/>
+          <a:lstStyle/>
+          <a:p>
+            <a:pPr algn="ctr">
+              <a:spcBef>
+                <a:spcPts val="0"/>
+              </a:spcBef>
+              <a:spcAft>
+                <a:spcPts val="0"/>
+              </a:spcAft>
+              <a:defRPr sz="1000" b="1">
+                <a:solidFill>
+                  <a:srgbClr val="FFFFFF"/>
+                </a:solidFill>
+                <a:latin typeface="Apple SD Gothic Neo"/>
+              </a:defRPr>
+            </a:pPr>
+            <a:r>
+              <a:t>OA</a:t>
+            </a:r>
+          </a:p>
+        </p:txBody>
+      </p:sp>
+      <p:sp>
+        <p:nvSpPr>
+          <p:cNvPr id="21" name="TextBox 20"/>
+          <p:cNvSpPr txBox="1"/>
+          <p:nvPr/>
+        </p:nvSpPr>
+        <p:spPr>
+          <a:xfrm>
+            <a:off x="1371600" y="3108960"/>
+            <a:ext cx="1828800" cy="457200"/>
           </a:xfrm>
           <a:prstGeom prst="rect">
             <a:avLst/>
@@ -13079,7 +13252,7 @@
           <a:lstStyle/>
           <a:p>
             <a:pPr algn="l">
-              <a:defRPr sz="1800" b="1">
+              <a:defRPr sz="1700" b="1">
                 <a:solidFill>
                   <a:srgbClr val="00D2FF"/>
                 </a:solidFill>
@@ -13087,20 +13260,20 @@
               </a:defRPr>
             </a:pPr>
             <a:r>
-              <a:t>OpenAI Agents SDK</a:t>
-            </a:r>
-          </a:p>
-        </p:txBody>
-      </p:sp>
-      <p:sp>
-        <p:nvSpPr>
-          <p:cNvPr id="19" name="TextBox 18"/>
-          <p:cNvSpPr txBox="1"/>
-          <p:nvPr/>
-        </p:nvSpPr>
-        <p:spPr>
-          <a:xfrm>
-            <a:off x="3200400" y="3703320"/>
+              <a:t>OpenAI SDK</a:t>
+            </a:r>
+          </a:p>
+        </p:txBody>
+      </p:sp>
+      <p:sp>
+        <p:nvSpPr>
+          <p:cNvPr id="22" name="TextBox 21"/>
+          <p:cNvSpPr txBox="1"/>
+          <p:nvPr/>
+        </p:nvSpPr>
+        <p:spPr>
+          <a:xfrm>
+            <a:off x="3200400" y="3108960"/>
             <a:ext cx="3200400" cy="457200"/>
           </a:xfrm>
           <a:prstGeom prst="rect">
@@ -13123,25 +13296,21 @@
               </a:defRPr>
             </a:pPr>
             <a:r>
-              <a:t>코드(Python)</a:t>
-            </a:r>
-            <a:br/>
-            <a:r>
-              <a:t>최소주의</a:t>
-            </a:r>
-          </a:p>
-        </p:txBody>
-      </p:sp>
-      <p:sp>
-        <p:nvSpPr>
-          <p:cNvPr id="20" name="TextBox 19"/>
-          <p:cNvSpPr txBox="1"/>
-          <p:nvPr/>
-        </p:nvSpPr>
-        <p:spPr>
-          <a:xfrm>
-            <a:off x="6583680" y="3703320"/>
-            <a:ext cx="2560320" cy="457200"/>
+              <a:t>코드(Python), 최소주의</a:t>
+            </a:r>
+          </a:p>
+        </p:txBody>
+      </p:sp>
+      <p:sp>
+        <p:nvSpPr>
+          <p:cNvPr id="23" name="TextBox 22"/>
+          <p:cNvSpPr txBox="1"/>
+          <p:nvPr/>
+        </p:nvSpPr>
+        <p:spPr>
+          <a:xfrm>
+            <a:off x="6583680" y="3108960"/>
+            <a:ext cx="2286000" cy="457200"/>
           </a:xfrm>
           <a:prstGeom prst="rect">
             <a:avLst/>
@@ -13170,14 +13339,14 @@
       </p:sp>
       <p:sp>
         <p:nvSpPr>
-          <p:cNvPr id="21" name="TextBox 20"/>
-          <p:cNvSpPr txBox="1"/>
-          <p:nvPr/>
-        </p:nvSpPr>
-        <p:spPr>
-          <a:xfrm>
-            <a:off x="9326880" y="3703320"/>
-            <a:ext cx="2103120" cy="457200"/>
+          <p:cNvPr id="24" name="TextBox 23"/>
+          <p:cNvSpPr txBox="1"/>
+          <p:nvPr/>
+        </p:nvSpPr>
+        <p:spPr>
+          <a:xfrm>
+            <a:off x="8961120" y="3108960"/>
+            <a:ext cx="2468880" cy="457200"/>
           </a:xfrm>
           <a:prstGeom prst="rect">
             <a:avLst/>
@@ -13206,14 +13375,14 @@
       </p:sp>
       <p:sp>
         <p:nvSpPr>
-          <p:cNvPr id="22" name="Rounded Rectangle 21"/>
+          <p:cNvPr id="25" name="Rounded Rectangle 24"/>
           <p:cNvSpPr/>
           <p:nvPr/>
         </p:nvSpPr>
         <p:spPr>
           <a:xfrm>
-            <a:off x="457200" y="4526280"/>
-            <a:ext cx="10972800" cy="822960"/>
+            <a:off x="457200" y="3794760"/>
+            <a:ext cx="10972800" cy="685800"/>
           </a:xfrm>
           <a:prstGeom prst="roundRect">
             <a:avLst/>
@@ -13250,14 +13419,14 @@
       </p:sp>
       <p:sp>
         <p:nvSpPr>
-          <p:cNvPr id="23" name="Rectangle 22"/>
+          <p:cNvPr id="26" name="Rectangle 25"/>
           <p:cNvSpPr/>
           <p:nvPr/>
         </p:nvSpPr>
         <p:spPr>
           <a:xfrm>
-            <a:off x="457200" y="4526280"/>
-            <a:ext cx="91440" cy="822960"/>
+            <a:off x="457200" y="3794760"/>
+            <a:ext cx="91440" cy="685800"/>
           </a:xfrm>
           <a:prstGeom prst="rect">
             <a:avLst/>
@@ -13293,14 +13462,74 @@
       </p:sp>
       <p:sp>
         <p:nvSpPr>
-          <p:cNvPr id="24" name="TextBox 23"/>
-          <p:cNvSpPr txBox="1"/>
-          <p:nvPr/>
-        </p:nvSpPr>
-        <p:spPr>
-          <a:xfrm>
-            <a:off x="822960" y="4663440"/>
-            <a:ext cx="2286000" cy="457200"/>
+          <p:cNvPr id="27" name="Oval 26"/>
+          <p:cNvSpPr/>
+          <p:nvPr/>
+        </p:nvSpPr>
+        <p:spPr>
+          <a:xfrm>
+            <a:off x="685800" y="3886200"/>
+            <a:ext cx="502920" cy="502920"/>
+          </a:xfrm>
+          <a:prstGeom prst="ellipse">
+            <a:avLst/>
+          </a:prstGeom>
+          <a:solidFill>
+            <a:srgbClr val="FFD600"/>
+          </a:solidFill>
+          <a:ln>
+            <a:noFill/>
+          </a:ln>
+          <a:effectLst/>
+        </p:spPr>
+        <p:style>
+          <a:lnRef idx="1">
+            <a:schemeClr val="accent1"/>
+          </a:lnRef>
+          <a:fillRef idx="3">
+            <a:schemeClr val="accent1"/>
+          </a:fillRef>
+          <a:effectRef idx="2">
+            <a:schemeClr val="accent1"/>
+          </a:effectRef>
+          <a:fontRef idx="minor">
+            <a:schemeClr val="lt1"/>
+          </a:fontRef>
+        </p:style>
+        <p:txBody>
+          <a:bodyPr rtlCol="0" anchor="ctr" wrap="none"/>
+          <a:lstStyle/>
+          <a:p>
+            <a:pPr algn="ctr">
+              <a:spcBef>
+                <a:spcPts val="0"/>
+              </a:spcBef>
+              <a:spcAft>
+                <a:spcPts val="0"/>
+              </a:spcAft>
+              <a:defRPr sz="1000" b="1">
+                <a:solidFill>
+                  <a:srgbClr val="FFFFFF"/>
+                </a:solidFill>
+                <a:latin typeface="Apple SD Gothic Neo"/>
+              </a:defRPr>
+            </a:pPr>
+            <a:r>
+              <a:t>CL</a:t>
+            </a:r>
+          </a:p>
+        </p:txBody>
+      </p:sp>
+      <p:sp>
+        <p:nvSpPr>
+          <p:cNvPr id="28" name="TextBox 27"/>
+          <p:cNvSpPr txBox="1"/>
+          <p:nvPr/>
+        </p:nvSpPr>
+        <p:spPr>
+          <a:xfrm>
+            <a:off x="1371600" y="3886200"/>
+            <a:ext cx="1828800" cy="457200"/>
           </a:xfrm>
           <a:prstGeom prst="rect">
             <a:avLst/>
@@ -13314,7 +13543,7 @@
           <a:lstStyle/>
           <a:p>
             <a:pPr algn="l">
-              <a:defRPr sz="1800" b="1">
+              <a:defRPr sz="1700" b="1">
                 <a:solidFill>
                   <a:srgbClr val="FFD600"/>
                 </a:solidFill>
@@ -13322,20 +13551,20 @@
               </a:defRPr>
             </a:pPr>
             <a:r>
-              <a:t>Claude Agent SDK</a:t>
-            </a:r>
-          </a:p>
-        </p:txBody>
-      </p:sp>
-      <p:sp>
-        <p:nvSpPr>
-          <p:cNvPr id="25" name="TextBox 24"/>
-          <p:cNvSpPr txBox="1"/>
-          <p:nvPr/>
-        </p:nvSpPr>
-        <p:spPr>
-          <a:xfrm>
-            <a:off x="3200400" y="4663440"/>
+              <a:t>Claude SDK</a:t>
+            </a:r>
+          </a:p>
+        </p:txBody>
+      </p:sp>
+      <p:sp>
+        <p:nvSpPr>
+          <p:cNvPr id="29" name="TextBox 28"/>
+          <p:cNvSpPr txBox="1"/>
+          <p:nvPr/>
+        </p:nvSpPr>
+        <p:spPr>
+          <a:xfrm>
+            <a:off x="3200400" y="3886200"/>
             <a:ext cx="3200400" cy="457200"/>
           </a:xfrm>
           <a:prstGeom prst="rect">
@@ -13365,14 +13594,14 @@
       </p:sp>
       <p:sp>
         <p:nvSpPr>
-          <p:cNvPr id="26" name="TextBox 25"/>
-          <p:cNvSpPr txBox="1"/>
-          <p:nvPr/>
-        </p:nvSpPr>
-        <p:spPr>
-          <a:xfrm>
-            <a:off x="6583680" y="4663440"/>
-            <a:ext cx="2560320" cy="457200"/>
+          <p:cNvPr id="30" name="TextBox 29"/>
+          <p:cNvSpPr txBox="1"/>
+          <p:nvPr/>
+        </p:nvSpPr>
+        <p:spPr>
+          <a:xfrm>
+            <a:off x="6583680" y="3886200"/>
+            <a:ext cx="2286000" cy="457200"/>
           </a:xfrm>
           <a:prstGeom prst="rect">
             <a:avLst/>
@@ -13401,14 +13630,14 @@
       </p:sp>
       <p:sp>
         <p:nvSpPr>
-          <p:cNvPr id="27" name="TextBox 26"/>
-          <p:cNvSpPr txBox="1"/>
-          <p:nvPr/>
-        </p:nvSpPr>
-        <p:spPr>
-          <a:xfrm>
-            <a:off x="9326880" y="4663440"/>
-            <a:ext cx="2103120" cy="457200"/>
+          <p:cNvPr id="31" name="TextBox 30"/>
+          <p:cNvSpPr txBox="1"/>
+          <p:nvPr/>
+        </p:nvSpPr>
+        <p:spPr>
+          <a:xfrm>
+            <a:off x="8961120" y="3886200"/>
+            <a:ext cx="2468880" cy="457200"/>
           </a:xfrm>
           <a:prstGeom prst="rect">
             <a:avLst/>
@@ -13437,14 +13666,14 @@
       </p:sp>
       <p:sp>
         <p:nvSpPr>
-          <p:cNvPr id="28" name="Rounded Rectangle 27"/>
+          <p:cNvPr id="32" name="Rounded Rectangle 31"/>
           <p:cNvSpPr/>
           <p:nvPr/>
         </p:nvSpPr>
         <p:spPr>
           <a:xfrm>
-            <a:off x="457200" y="5486400"/>
-            <a:ext cx="10972800" cy="822960"/>
+            <a:off x="457200" y="4572000"/>
+            <a:ext cx="10972800" cy="685800"/>
           </a:xfrm>
           <a:prstGeom prst="roundRect">
             <a:avLst/>
@@ -13481,14 +13710,14 @@
       </p:sp>
       <p:sp>
         <p:nvSpPr>
-          <p:cNvPr id="29" name="Rectangle 28"/>
+          <p:cNvPr id="33" name="Rectangle 32"/>
           <p:cNvSpPr/>
           <p:nvPr/>
         </p:nvSpPr>
         <p:spPr>
           <a:xfrm>
-            <a:off x="457200" y="5486400"/>
-            <a:ext cx="91440" cy="822960"/>
+            <a:off x="457200" y="4572000"/>
+            <a:ext cx="91440" cy="685800"/>
           </a:xfrm>
           <a:prstGeom prst="rect">
             <a:avLst/>
@@ -13524,14 +13753,74 @@
       </p:sp>
       <p:sp>
         <p:nvSpPr>
-          <p:cNvPr id="30" name="TextBox 29"/>
-          <p:cNvSpPr txBox="1"/>
-          <p:nvPr/>
-        </p:nvSpPr>
-        <p:spPr>
-          <a:xfrm>
-            <a:off x="822960" y="5623560"/>
-            <a:ext cx="2286000" cy="457200"/>
+          <p:cNvPr id="34" name="Oval 33"/>
+          <p:cNvSpPr/>
+          <p:nvPr/>
+        </p:nvSpPr>
+        <p:spPr>
+          <a:xfrm>
+            <a:off x="685800" y="4663440"/>
+            <a:ext cx="502920" cy="502920"/>
+          </a:xfrm>
+          <a:prstGeom prst="ellipse">
+            <a:avLst/>
+          </a:prstGeom>
+          <a:solidFill>
+            <a:srgbClr val="EA4B71"/>
+          </a:solidFill>
+          <a:ln>
+            <a:noFill/>
+          </a:ln>
+          <a:effectLst/>
+        </p:spPr>
+        <p:style>
+          <a:lnRef idx="1">
+            <a:schemeClr val="accent1"/>
+          </a:lnRef>
+          <a:fillRef idx="3">
+            <a:schemeClr val="accent1"/>
+          </a:fillRef>
+          <a:effectRef idx="2">
+            <a:schemeClr val="accent1"/>
+          </a:effectRef>
+          <a:fontRef idx="minor">
+            <a:schemeClr val="lt1"/>
+          </a:fontRef>
+        </p:style>
+        <p:txBody>
+          <a:bodyPr rtlCol="0" anchor="ctr" wrap="none"/>
+          <a:lstStyle/>
+          <a:p>
+            <a:pPr algn="ctr">
+              <a:spcBef>
+                <a:spcPts val="0"/>
+              </a:spcBef>
+              <a:spcAft>
+                <a:spcPts val="0"/>
+              </a:spcAft>
+              <a:defRPr sz="1000" b="1">
+                <a:solidFill>
+                  <a:srgbClr val="FFFFFF"/>
+                </a:solidFill>
+                <a:latin typeface="Apple SD Gothic Neo"/>
+              </a:defRPr>
+            </a:pPr>
+            <a:r>
+              <a:t>n8n</a:t>
+            </a:r>
+          </a:p>
+        </p:txBody>
+      </p:sp>
+      <p:sp>
+        <p:nvSpPr>
+          <p:cNvPr id="35" name="TextBox 34"/>
+          <p:cNvSpPr txBox="1"/>
+          <p:nvPr/>
+        </p:nvSpPr>
+        <p:spPr>
+          <a:xfrm>
+            <a:off x="1371600" y="4663440"/>
+            <a:ext cx="1828800" cy="457200"/>
           </a:xfrm>
           <a:prstGeom prst="rect">
             <a:avLst/>
@@ -13545,7 +13834,7 @@
           <a:lstStyle/>
           <a:p>
             <a:pPr algn="l">
-              <a:defRPr sz="1800" b="1">
+              <a:defRPr sz="1700" b="1">
                 <a:solidFill>
                   <a:srgbClr val="EA4B71"/>
                 </a:solidFill>
@@ -13560,13 +13849,13 @@
       </p:sp>
       <p:sp>
         <p:nvSpPr>
-          <p:cNvPr id="31" name="TextBox 30"/>
-          <p:cNvSpPr txBox="1"/>
-          <p:nvPr/>
-        </p:nvSpPr>
-        <p:spPr>
-          <a:xfrm>
-            <a:off x="3200400" y="5623560"/>
+          <p:cNvPr id="36" name="TextBox 35"/>
+          <p:cNvSpPr txBox="1"/>
+          <p:nvPr/>
+        </p:nvSpPr>
+        <p:spPr>
+          <a:xfrm>
+            <a:off x="3200400" y="4663440"/>
             <a:ext cx="3200400" cy="457200"/>
           </a:xfrm>
           <a:prstGeom prst="rect">
@@ -13591,23 +13880,19 @@
             <a:r>
               <a:t>시각적 노코드/로우코드</a:t>
             </a:r>
-            <a:br/>
-            <a:r>
-              <a:t>드래그 앤 드롭</a:t>
-            </a:r>
-          </a:p>
-        </p:txBody>
-      </p:sp>
-      <p:sp>
-        <p:nvSpPr>
-          <p:cNvPr id="32" name="TextBox 31"/>
-          <p:cNvSpPr txBox="1"/>
-          <p:nvPr/>
-        </p:nvSpPr>
-        <p:spPr>
-          <a:xfrm>
-            <a:off x="6583680" y="5623560"/>
-            <a:ext cx="2560320" cy="457200"/>
+          </a:p>
+        </p:txBody>
+      </p:sp>
+      <p:sp>
+        <p:nvSpPr>
+          <p:cNvPr id="37" name="TextBox 36"/>
+          <p:cNvSpPr txBox="1"/>
+          <p:nvPr/>
+        </p:nvSpPr>
+        <p:spPr>
+          <a:xfrm>
+            <a:off x="6583680" y="4663440"/>
+            <a:ext cx="2286000" cy="457200"/>
           </a:xfrm>
           <a:prstGeom prst="rect">
             <a:avLst/>
@@ -13636,14 +13921,14 @@
       </p:sp>
       <p:sp>
         <p:nvSpPr>
-          <p:cNvPr id="33" name="TextBox 32"/>
-          <p:cNvSpPr txBox="1"/>
-          <p:nvPr/>
-        </p:nvSpPr>
-        <p:spPr>
-          <a:xfrm>
-            <a:off x="9326880" y="5623560"/>
-            <a:ext cx="2103120" cy="457200"/>
+          <p:cNvPr id="38" name="TextBox 37"/>
+          <p:cNvSpPr txBox="1"/>
+          <p:nvPr/>
+        </p:nvSpPr>
+        <p:spPr>
+          <a:xfrm>
+            <a:off x="8961120" y="4663440"/>
+            <a:ext cx="2468880" cy="457200"/>
           </a:xfrm>
           <a:prstGeom prst="rect">
             <a:avLst/>
@@ -13672,27 +13957,71 @@
       </p:sp>
       <p:sp>
         <p:nvSpPr>
-          <p:cNvPr id="34" name="TextBox 33"/>
-          <p:cNvSpPr txBox="1"/>
-          <p:nvPr/>
-        </p:nvSpPr>
-        <p:spPr>
-          <a:xfrm>
-            <a:off x="457200" y="6400800"/>
-            <a:ext cx="10972800" cy="365760"/>
-          </a:xfrm>
-          <a:prstGeom prst="rect">
-            <a:avLst/>
-          </a:prstGeom>
-          <a:noFill/>
-        </p:spPr>
-        <p:txBody>
-          <a:bodyPr wrap="square">
-            <a:spAutoFit/>
-          </a:bodyPr>
-          <a:lstStyle/>
-          <a:p>
-            <a:pPr algn="ctr">
+          <p:cNvPr id="39" name="Rounded Rectangle 38"/>
+          <p:cNvSpPr/>
+          <p:nvPr/>
+        </p:nvSpPr>
+        <p:spPr>
+          <a:xfrm>
+            <a:off x="457200" y="5394960"/>
+            <a:ext cx="10972800" cy="1371600"/>
+          </a:xfrm>
+          <a:prstGeom prst="roundRect">
+            <a:avLst/>
+          </a:prstGeom>
+          <a:solidFill>
+            <a:srgbClr val="16213E"/>
+          </a:solidFill>
+          <a:ln>
+            <a:noFill/>
+          </a:ln>
+          <a:effectLst/>
+        </p:spPr>
+        <p:style>
+          <a:lnRef idx="1">
+            <a:schemeClr val="accent1"/>
+          </a:lnRef>
+          <a:fillRef idx="3">
+            <a:schemeClr val="accent1"/>
+          </a:fillRef>
+          <a:effectRef idx="2">
+            <a:schemeClr val="accent1"/>
+          </a:effectRef>
+          <a:fontRef idx="minor">
+            <a:schemeClr val="lt1"/>
+          </a:fontRef>
+        </p:style>
+        <p:txBody>
+          <a:bodyPr rtlCol="0" anchor="ctr"/>
+          <a:lstStyle/>
+          <a:p>
+            <a:pPr algn="ctr"/>
+          </a:p>
+        </p:txBody>
+      </p:sp>
+      <p:sp>
+        <p:nvSpPr>
+          <p:cNvPr id="40" name="TextBox 39"/>
+          <p:cNvSpPr txBox="1"/>
+          <p:nvPr/>
+        </p:nvSpPr>
+        <p:spPr>
+          <a:xfrm>
+            <a:off x="731520" y="5440680"/>
+            <a:ext cx="10058400" cy="365760"/>
+          </a:xfrm>
+          <a:prstGeom prst="rect">
+            <a:avLst/>
+          </a:prstGeom>
+          <a:noFill/>
+        </p:spPr>
+        <p:txBody>
+          <a:bodyPr wrap="square">
+            <a:spAutoFit/>
+          </a:bodyPr>
+          <a:lstStyle/>
+          <a:p>
+            <a:pPr algn="l">
               <a:defRPr sz="1600" b="1">
                 <a:solidFill>
                   <a:srgbClr val="EA4B71"/>
@@ -13701,7 +14030,46 @@
               </a:defRPr>
             </a:pPr>
             <a:r>
-              <a:t>n8n = 코드 프레임워크의 유연성과 노코드의 접근성을 동시에 제공</a:t>
+              <a:t>우리 팀(수입차 업계 IT)에서 n8n이 적합한 이유</a:t>
+            </a:r>
+          </a:p>
+        </p:txBody>
+      </p:sp>
+      <p:sp>
+        <p:nvSpPr>
+          <p:cNvPr id="41" name="TextBox 40"/>
+          <p:cNvSpPr txBox="1"/>
+          <p:nvPr/>
+        </p:nvSpPr>
+        <p:spPr>
+          <a:xfrm>
+            <a:off x="731520" y="5806440"/>
+            <a:ext cx="10515600" cy="640080"/>
+          </a:xfrm>
+          <a:prstGeom prst="rect">
+            <a:avLst/>
+          </a:prstGeom>
+          <a:noFill/>
+        </p:spPr>
+        <p:txBody>
+          <a:bodyPr wrap="square">
+            <a:spAutoFit/>
+          </a:bodyPr>
+          <a:lstStyle/>
+          <a:p>
+            <a:pPr>
+              <a:spcAft>
+                <a:spcPts val="800"/>
+              </a:spcAft>
+              <a:defRPr sz="1300">
+                <a:solidFill>
+                  <a:srgbClr val="FFFFFF"/>
+                </a:solidFill>
+                <a:latin typeface="Apple SD Gothic Neo"/>
+              </a:defRPr>
+            </a:pPr>
+            <a:r>
+              <a:t>Self-hosted로 고객/딜러 데이터 보호  |  비개발자도 워크플로우 수정 가능  |  500+ 앱 연동 (Slack, 이메일, CRM)  |  Self-hosted 무료 vs SaaS 월 수백달러</a:t>
             </a:r>
           </a:p>
         </p:txBody>
@@ -13872,14 +14240,202 @@
       </p:sp>
       <p:sp>
         <p:nvSpPr>
-          <p:cNvPr id="3" name="TextBox 2"/>
-          <p:cNvSpPr txBox="1"/>
-          <p:nvPr/>
-        </p:nvSpPr>
-        <p:spPr>
-          <a:xfrm>
-            <a:off x="457200" y="1417320"/>
-            <a:ext cx="1828800" cy="457200"/>
+          <p:cNvPr id="3" name="Rounded Rectangle 2"/>
+          <p:cNvSpPr/>
+          <p:nvPr/>
+        </p:nvSpPr>
+        <p:spPr>
+          <a:xfrm>
+            <a:off x="457200" y="1097280"/>
+            <a:ext cx="4114800" cy="2743200"/>
+          </a:xfrm>
+          <a:prstGeom prst="roundRect">
+            <a:avLst/>
+          </a:prstGeom>
+          <a:solidFill>
+            <a:srgbClr val="16213E"/>
+          </a:solidFill>
+          <a:ln>
+            <a:noFill/>
+          </a:ln>
+          <a:effectLst/>
+        </p:spPr>
+        <p:style>
+          <a:lnRef idx="1">
+            <a:schemeClr val="accent1"/>
+          </a:lnRef>
+          <a:fillRef idx="3">
+            <a:schemeClr val="accent1"/>
+          </a:fillRef>
+          <a:effectRef idx="2">
+            <a:schemeClr val="accent1"/>
+          </a:effectRef>
+          <a:fontRef idx="minor">
+            <a:schemeClr val="lt1"/>
+          </a:fontRef>
+        </p:style>
+        <p:txBody>
+          <a:bodyPr rtlCol="0" anchor="ctr"/>
+          <a:lstStyle/>
+          <a:p>
+            <a:pPr algn="ctr"/>
+          </a:p>
+        </p:txBody>
+      </p:sp>
+      <p:sp>
+        <p:nvSpPr>
+          <p:cNvPr id="4" name="TextBox 3"/>
+          <p:cNvSpPr txBox="1"/>
+          <p:nvPr/>
+        </p:nvSpPr>
+        <p:spPr>
+          <a:xfrm>
+            <a:off x="457200" y="1280160"/>
+            <a:ext cx="4114800" cy="1097280"/>
+          </a:xfrm>
+          <a:prstGeom prst="rect">
+            <a:avLst/>
+          </a:prstGeom>
+          <a:noFill/>
+        </p:spPr>
+        <p:txBody>
+          <a:bodyPr wrap="square">
+            <a:spAutoFit/>
+          </a:bodyPr>
+          <a:lstStyle/>
+          <a:p>
+            <a:pPr algn="ctr">
+              <a:defRPr sz="7200" b="1">
+                <a:solidFill>
+                  <a:srgbClr val="FF6B35"/>
+                </a:solidFill>
+                <a:latin typeface="Apple SD Gothic Neo"/>
+              </a:defRPr>
+            </a:pPr>
+            <a:r>
+              <a:t>11%</a:t>
+            </a:r>
+          </a:p>
+        </p:txBody>
+      </p:sp>
+      <p:sp>
+        <p:nvSpPr>
+          <p:cNvPr id="5" name="TextBox 4"/>
+          <p:cNvSpPr txBox="1"/>
+          <p:nvPr/>
+        </p:nvSpPr>
+        <p:spPr>
+          <a:xfrm>
+            <a:off x="457200" y="2377440"/>
+            <a:ext cx="4114800" cy="457200"/>
+          </a:xfrm>
+          <a:prstGeom prst="rect">
+            <a:avLst/>
+          </a:prstGeom>
+          <a:noFill/>
+        </p:spPr>
+        <p:txBody>
+          <a:bodyPr wrap="square">
+            <a:spAutoFit/>
+          </a:bodyPr>
+          <a:lstStyle/>
+          <a:p>
+            <a:pPr algn="ctr">
+              <a:defRPr sz="2000" b="0">
+                <a:solidFill>
+                  <a:srgbClr val="FFFFFF"/>
+                </a:solidFill>
+                <a:latin typeface="Apple SD Gothic Neo"/>
+              </a:defRPr>
+            </a:pPr>
+            <a:r>
+              <a:t>만이 실제 운영에 도달</a:t>
+            </a:r>
+          </a:p>
+        </p:txBody>
+      </p:sp>
+      <p:sp>
+        <p:nvSpPr>
+          <p:cNvPr id="6" name="TextBox 5"/>
+          <p:cNvSpPr txBox="1"/>
+          <p:nvPr/>
+        </p:nvSpPr>
+        <p:spPr>
+          <a:xfrm>
+            <a:off x="457200" y="2926080"/>
+            <a:ext cx="4114800" cy="457200"/>
+          </a:xfrm>
+          <a:prstGeom prst="rect">
+            <a:avLst/>
+          </a:prstGeom>
+          <a:noFill/>
+        </p:spPr>
+        <p:txBody>
+          <a:bodyPr wrap="square">
+            <a:spAutoFit/>
+          </a:bodyPr>
+          <a:lstStyle/>
+          <a:p>
+            <a:pPr algn="ctr">
+              <a:defRPr sz="1400" b="0">
+                <a:solidFill>
+                  <a:srgbClr val="A0A0B0"/>
+                </a:solidFill>
+                <a:latin typeface="Apple SD Gothic Neo"/>
+              </a:defRPr>
+            </a:pPr>
+            <a:r>
+              <a:t>(Deloitte 2026 조사)</a:t>
+            </a:r>
+          </a:p>
+        </p:txBody>
+      </p:sp>
+      <p:sp>
+        <p:nvSpPr>
+          <p:cNvPr id="7" name="TextBox 6"/>
+          <p:cNvSpPr txBox="1"/>
+          <p:nvPr/>
+        </p:nvSpPr>
+        <p:spPr>
+          <a:xfrm>
+            <a:off x="457200" y="3383280"/>
+            <a:ext cx="4114800" cy="365760"/>
+          </a:xfrm>
+          <a:prstGeom prst="rect">
+            <a:avLst/>
+          </a:prstGeom>
+          <a:noFill/>
+        </p:spPr>
+        <p:txBody>
+          <a:bodyPr wrap="square">
+            <a:spAutoFit/>
+          </a:bodyPr>
+          <a:lstStyle/>
+          <a:p>
+            <a:pPr algn="ctr">
+              <a:defRPr sz="1500" b="1">
+                <a:solidFill>
+                  <a:srgbClr val="FF6B35"/>
+                </a:solidFill>
+                <a:latin typeface="Apple SD Gothic Neo"/>
+              </a:defRPr>
+            </a:pPr>
+            <a:r>
+              <a:t>89%는 왜 실운영에 도달하지 못하는가?</a:t>
+            </a:r>
+          </a:p>
+        </p:txBody>
+      </p:sp>
+      <p:sp>
+        <p:nvSpPr>
+          <p:cNvPr id="8" name="TextBox 7"/>
+          <p:cNvSpPr txBox="1"/>
+          <p:nvPr/>
+        </p:nvSpPr>
+        <p:spPr>
+          <a:xfrm>
+            <a:off x="4846320" y="1234440"/>
+            <a:ext cx="1645920" cy="365760"/>
           </a:xfrm>
           <a:prstGeom prst="rect">
             <a:avLst/>
@@ -13893,7 +14449,7 @@
           <a:lstStyle/>
           <a:p>
             <a:pPr algn="l">
-              <a:defRPr sz="1800" b="0">
+              <a:defRPr sz="1500" b="0">
                 <a:solidFill>
                   <a:srgbClr val="FFFFFF"/>
                 </a:solidFill>
@@ -13908,14 +14464,14 @@
       </p:sp>
       <p:sp>
         <p:nvSpPr>
-          <p:cNvPr id="4" name="Rounded Rectangle 3"/>
+          <p:cNvPr id="9" name="Rounded Rectangle 8"/>
           <p:cNvSpPr/>
           <p:nvPr/>
         </p:nvSpPr>
         <p:spPr>
           <a:xfrm>
-            <a:off x="2560320" y="1371600"/>
-            <a:ext cx="2743200" cy="640080"/>
+            <a:off x="6583680" y="1188720"/>
+            <a:ext cx="2194560" cy="502920"/>
           </a:xfrm>
           <a:prstGeom prst="roundRect">
             <a:avLst/>
@@ -13951,14 +14507,14 @@
       </p:sp>
       <p:sp>
         <p:nvSpPr>
-          <p:cNvPr id="5" name="TextBox 4"/>
-          <p:cNvSpPr txBox="1"/>
-          <p:nvPr/>
-        </p:nvSpPr>
-        <p:spPr>
-          <a:xfrm>
-            <a:off x="5486400" y="1417320"/>
-            <a:ext cx="1371600" cy="457200"/>
+          <p:cNvPr id="10" name="TextBox 9"/>
+          <p:cNvSpPr txBox="1"/>
+          <p:nvPr/>
+        </p:nvSpPr>
+        <p:spPr>
+          <a:xfrm>
+            <a:off x="8915400" y="1234440"/>
+            <a:ext cx="914400" cy="365760"/>
           </a:xfrm>
           <a:prstGeom prst="rect">
             <a:avLst/>
@@ -13972,7 +14528,7 @@
           <a:lstStyle/>
           <a:p>
             <a:pPr algn="l">
-              <a:defRPr sz="2000" b="1">
+              <a:defRPr sz="1600" b="1">
                 <a:solidFill>
                   <a:srgbClr val="A0A0B0"/>
                 </a:solidFill>
@@ -13987,14 +14543,14 @@
       </p:sp>
       <p:sp>
         <p:nvSpPr>
-          <p:cNvPr id="6" name="TextBox 5"/>
-          <p:cNvSpPr txBox="1"/>
-          <p:nvPr/>
-        </p:nvSpPr>
-        <p:spPr>
-          <a:xfrm>
-            <a:off x="457200" y="2423160"/>
-            <a:ext cx="1828800" cy="457200"/>
+          <p:cNvPr id="11" name="TextBox 10"/>
+          <p:cNvSpPr txBox="1"/>
+          <p:nvPr/>
+        </p:nvSpPr>
+        <p:spPr>
+          <a:xfrm>
+            <a:off x="4846320" y="2011680"/>
+            <a:ext cx="1645920" cy="365760"/>
           </a:xfrm>
           <a:prstGeom prst="rect">
             <a:avLst/>
@@ -14008,7 +14564,7 @@
           <a:lstStyle/>
           <a:p>
             <a:pPr algn="l">
-              <a:defRPr sz="1800" b="0">
+              <a:defRPr sz="1500" b="0">
                 <a:solidFill>
                   <a:srgbClr val="FFFFFF"/>
                 </a:solidFill>
@@ -14023,14 +14579,14 @@
       </p:sp>
       <p:sp>
         <p:nvSpPr>
-          <p:cNvPr id="7" name="Rounded Rectangle 6"/>
+          <p:cNvPr id="12" name="Rounded Rectangle 11"/>
           <p:cNvSpPr/>
           <p:nvPr/>
         </p:nvSpPr>
         <p:spPr>
           <a:xfrm>
-            <a:off x="2560320" y="2377440"/>
-            <a:ext cx="3474720" cy="640080"/>
+            <a:off x="6583680" y="1965960"/>
+            <a:ext cx="2743200" cy="502920"/>
           </a:xfrm>
           <a:prstGeom prst="roundRect">
             <a:avLst/>
@@ -14066,14 +14622,14 @@
       </p:sp>
       <p:sp>
         <p:nvSpPr>
-          <p:cNvPr id="8" name="TextBox 7"/>
-          <p:cNvSpPr txBox="1"/>
-          <p:nvPr/>
-        </p:nvSpPr>
-        <p:spPr>
-          <a:xfrm>
-            <a:off x="6217920" y="2423160"/>
-            <a:ext cx="1371600" cy="457200"/>
+          <p:cNvPr id="13" name="TextBox 12"/>
+          <p:cNvSpPr txBox="1"/>
+          <p:nvPr/>
+        </p:nvSpPr>
+        <p:spPr>
+          <a:xfrm>
+            <a:off x="9464040" y="2011680"/>
+            <a:ext cx="914400" cy="365760"/>
           </a:xfrm>
           <a:prstGeom prst="rect">
             <a:avLst/>
@@ -14087,7 +14643,7 @@
           <a:lstStyle/>
           <a:p>
             <a:pPr algn="l">
-              <a:defRPr sz="2000" b="1">
+              <a:defRPr sz="1600" b="1">
                 <a:solidFill>
                   <a:srgbClr val="7C3AED"/>
                 </a:solidFill>
@@ -14102,14 +14658,14 @@
       </p:sp>
       <p:sp>
         <p:nvSpPr>
-          <p:cNvPr id="9" name="TextBox 8"/>
-          <p:cNvSpPr txBox="1"/>
-          <p:nvPr/>
-        </p:nvSpPr>
-        <p:spPr>
-          <a:xfrm>
-            <a:off x="457200" y="3429000"/>
-            <a:ext cx="1828800" cy="457200"/>
+          <p:cNvPr id="14" name="TextBox 13"/>
+          <p:cNvSpPr txBox="1"/>
+          <p:nvPr/>
+        </p:nvSpPr>
+        <p:spPr>
+          <a:xfrm>
+            <a:off x="4846320" y="2788920"/>
+            <a:ext cx="1645920" cy="365760"/>
           </a:xfrm>
           <a:prstGeom prst="rect">
             <a:avLst/>
@@ -14123,7 +14679,7 @@
           <a:lstStyle/>
           <a:p>
             <a:pPr algn="l">
-              <a:defRPr sz="1800" b="0">
+              <a:defRPr sz="1500" b="0">
                 <a:solidFill>
                   <a:srgbClr val="FFFFFF"/>
                 </a:solidFill>
@@ -14138,14 +14694,14 @@
       </p:sp>
       <p:sp>
         <p:nvSpPr>
-          <p:cNvPr id="10" name="Rounded Rectangle 9"/>
+          <p:cNvPr id="15" name="Rounded Rectangle 14"/>
           <p:cNvSpPr/>
           <p:nvPr/>
         </p:nvSpPr>
         <p:spPr>
           <a:xfrm>
-            <a:off x="2560320" y="3383280"/>
-            <a:ext cx="1280160" cy="640080"/>
+            <a:off x="6583680" y="2743200"/>
+            <a:ext cx="1005840" cy="502920"/>
           </a:xfrm>
           <a:prstGeom prst="roundRect">
             <a:avLst/>
@@ -14181,14 +14737,14 @@
       </p:sp>
       <p:sp>
         <p:nvSpPr>
-          <p:cNvPr id="11" name="TextBox 10"/>
-          <p:cNvSpPr txBox="1"/>
-          <p:nvPr/>
-        </p:nvSpPr>
-        <p:spPr>
-          <a:xfrm>
-            <a:off x="4023360" y="3429000"/>
-            <a:ext cx="1371600" cy="457200"/>
+          <p:cNvPr id="16" name="TextBox 15"/>
+          <p:cNvSpPr txBox="1"/>
+          <p:nvPr/>
+        </p:nvSpPr>
+        <p:spPr>
+          <a:xfrm>
+            <a:off x="7726680" y="2788920"/>
+            <a:ext cx="914400" cy="365760"/>
           </a:xfrm>
           <a:prstGeom prst="rect">
             <a:avLst/>
@@ -14202,7 +14758,7 @@
           <a:lstStyle/>
           <a:p>
             <a:pPr algn="l">
-              <a:defRPr sz="2000" b="1">
+              <a:defRPr sz="1600" b="1">
                 <a:solidFill>
                   <a:srgbClr val="00D2FF"/>
                 </a:solidFill>
@@ -14217,14 +14773,14 @@
       </p:sp>
       <p:sp>
         <p:nvSpPr>
-          <p:cNvPr id="12" name="TextBox 11"/>
-          <p:cNvSpPr txBox="1"/>
-          <p:nvPr/>
-        </p:nvSpPr>
-        <p:spPr>
-          <a:xfrm>
-            <a:off x="457200" y="4434840"/>
-            <a:ext cx="1828800" cy="457200"/>
+          <p:cNvPr id="17" name="TextBox 16"/>
+          <p:cNvSpPr txBox="1"/>
+          <p:nvPr/>
+        </p:nvSpPr>
+        <p:spPr>
+          <a:xfrm>
+            <a:off x="4846320" y="3566159"/>
+            <a:ext cx="1645920" cy="365760"/>
           </a:xfrm>
           <a:prstGeom prst="rect">
             <a:avLst/>
@@ -14238,7 +14794,7 @@
           <a:lstStyle/>
           <a:p>
             <a:pPr algn="l">
-              <a:defRPr sz="1800" b="0">
+              <a:defRPr sz="1500" b="0">
                 <a:solidFill>
                   <a:srgbClr val="FFFFFF"/>
                 </a:solidFill>
@@ -14253,20 +14809,20 @@
       </p:sp>
       <p:sp>
         <p:nvSpPr>
-          <p:cNvPr id="13" name="Rounded Rectangle 12"/>
+          <p:cNvPr id="18" name="Rounded Rectangle 17"/>
           <p:cNvSpPr/>
           <p:nvPr/>
         </p:nvSpPr>
         <p:spPr>
           <a:xfrm>
-            <a:off x="2560320" y="4389120"/>
-            <a:ext cx="1005840" cy="640080"/>
+            <a:off x="6583680" y="3520439"/>
+            <a:ext cx="822960" cy="502920"/>
           </a:xfrm>
           <a:prstGeom prst="roundRect">
             <a:avLst/>
           </a:prstGeom>
           <a:solidFill>
-            <a:srgbClr val="10B981"/>
+            <a:srgbClr val="FF6B35"/>
           </a:solidFill>
           <a:ln>
             <a:noFill/>
@@ -14296,14 +14852,14 @@
       </p:sp>
       <p:sp>
         <p:nvSpPr>
-          <p:cNvPr id="14" name="TextBox 13"/>
-          <p:cNvSpPr txBox="1"/>
-          <p:nvPr/>
-        </p:nvSpPr>
-        <p:spPr>
-          <a:xfrm>
-            <a:off x="3749040" y="4434840"/>
-            <a:ext cx="1371600" cy="457200"/>
+          <p:cNvPr id="19" name="TextBox 18"/>
+          <p:cNvSpPr txBox="1"/>
+          <p:nvPr/>
+        </p:nvSpPr>
+        <p:spPr>
+          <a:xfrm>
+            <a:off x="7543800" y="3566159"/>
+            <a:ext cx="914400" cy="365760"/>
           </a:xfrm>
           <a:prstGeom prst="rect">
             <a:avLst/>
@@ -14317,7 +14873,427 @@
           <a:lstStyle/>
           <a:p>
             <a:pPr algn="l">
-              <a:defRPr sz="2000" b="1">
+              <a:defRPr sz="1600" b="1">
+                <a:solidFill>
+                  <a:srgbClr val="FF6B35"/>
+                </a:solidFill>
+                <a:latin typeface="Apple SD Gothic Neo"/>
+              </a:defRPr>
+            </a:pPr>
+            <a:r>
+              <a:t>11%</a:t>
+            </a:r>
+          </a:p>
+        </p:txBody>
+      </p:sp>
+      <p:sp>
+        <p:nvSpPr>
+          <p:cNvPr id="20" name="TextBox 19"/>
+          <p:cNvSpPr txBox="1"/>
+          <p:nvPr/>
+        </p:nvSpPr>
+        <p:spPr>
+          <a:xfrm>
+            <a:off x="457200" y="4114800"/>
+            <a:ext cx="10972800" cy="365760"/>
+          </a:xfrm>
+          <a:prstGeom prst="rect">
+            <a:avLst/>
+          </a:prstGeom>
+          <a:noFill/>
+        </p:spPr>
+        <p:txBody>
+          <a:bodyPr wrap="square">
+            <a:spAutoFit/>
+          </a:bodyPr>
+          <a:lstStyle/>
+          <a:p>
+            <a:pPr algn="l">
+              <a:defRPr sz="1800" b="1">
+                <a:solidFill>
+                  <a:srgbClr val="FFFFFF"/>
+                </a:solidFill>
+                <a:latin typeface="Apple SD Gothic Neo"/>
+              </a:defRPr>
+            </a:pPr>
+            <a:r>
+              <a:t>실운영 도달을 위한 5가지 조건</a:t>
+            </a:r>
+          </a:p>
+        </p:txBody>
+      </p:sp>
+      <p:sp>
+        <p:nvSpPr>
+          <p:cNvPr id="21" name="Rounded Rectangle 20"/>
+          <p:cNvSpPr/>
+          <p:nvPr/>
+        </p:nvSpPr>
+        <p:spPr>
+          <a:xfrm>
+            <a:off x="457200" y="4663440"/>
+            <a:ext cx="2103120" cy="1005840"/>
+          </a:xfrm>
+          <a:prstGeom prst="roundRect">
+            <a:avLst/>
+          </a:prstGeom>
+          <a:solidFill>
+            <a:srgbClr val="16213E"/>
+          </a:solidFill>
+          <a:ln>
+            <a:noFill/>
+          </a:ln>
+          <a:effectLst/>
+        </p:spPr>
+        <p:style>
+          <a:lnRef idx="1">
+            <a:schemeClr val="accent1"/>
+          </a:lnRef>
+          <a:fillRef idx="3">
+            <a:schemeClr val="accent1"/>
+          </a:fillRef>
+          <a:effectRef idx="2">
+            <a:schemeClr val="accent1"/>
+          </a:effectRef>
+          <a:fontRef idx="minor">
+            <a:schemeClr val="lt1"/>
+          </a:fontRef>
+        </p:style>
+        <p:txBody>
+          <a:bodyPr rtlCol="0" anchor="ctr"/>
+          <a:lstStyle/>
+          <a:p>
+            <a:pPr algn="ctr"/>
+          </a:p>
+        </p:txBody>
+      </p:sp>
+      <p:sp>
+        <p:nvSpPr>
+          <p:cNvPr id="22" name="TextBox 21"/>
+          <p:cNvSpPr txBox="1"/>
+          <p:nvPr/>
+        </p:nvSpPr>
+        <p:spPr>
+          <a:xfrm>
+            <a:off x="457200" y="4709160"/>
+            <a:ext cx="2103120" cy="365760"/>
+          </a:xfrm>
+          <a:prstGeom prst="rect">
+            <a:avLst/>
+          </a:prstGeom>
+          <a:noFill/>
+        </p:spPr>
+        <p:txBody>
+          <a:bodyPr wrap="square">
+            <a:spAutoFit/>
+          </a:bodyPr>
+          <a:lstStyle/>
+          <a:p>
+            <a:pPr algn="ctr">
+              <a:defRPr sz="2200" b="1">
+                <a:solidFill>
+                  <a:srgbClr val="00D2FF"/>
+                </a:solidFill>
+                <a:latin typeface="Apple SD Gothic Neo"/>
+              </a:defRPr>
+            </a:pPr>
+            <a:r>
+              <a:t>1</a:t>
+            </a:r>
+          </a:p>
+        </p:txBody>
+      </p:sp>
+      <p:sp>
+        <p:nvSpPr>
+          <p:cNvPr id="23" name="TextBox 22"/>
+          <p:cNvSpPr txBox="1"/>
+          <p:nvPr/>
+        </p:nvSpPr>
+        <p:spPr>
+          <a:xfrm>
+            <a:off x="548640" y="5074920"/>
+            <a:ext cx="1920240" cy="502920"/>
+          </a:xfrm>
+          <a:prstGeom prst="rect">
+            <a:avLst/>
+          </a:prstGeom>
+          <a:noFill/>
+        </p:spPr>
+        <p:txBody>
+          <a:bodyPr wrap="square">
+            <a:spAutoFit/>
+          </a:bodyPr>
+          <a:lstStyle/>
+          <a:p>
+            <a:pPr algn="ctr">
+              <a:defRPr sz="1200" b="0">
+                <a:solidFill>
+                  <a:srgbClr val="FFFFFF"/>
+                </a:solidFill>
+                <a:latin typeface="Apple SD Gothic Neo"/>
+              </a:defRPr>
+            </a:pPr>
+            <a:r>
+              <a:t>데이터 파이프라인 정비</a:t>
+            </a:r>
+          </a:p>
+        </p:txBody>
+      </p:sp>
+      <p:sp>
+        <p:nvSpPr>
+          <p:cNvPr id="24" name="TextBox 23"/>
+          <p:cNvSpPr txBox="1"/>
+          <p:nvPr/>
+        </p:nvSpPr>
+        <p:spPr>
+          <a:xfrm>
+            <a:off x="457200" y="5486400"/>
+            <a:ext cx="2103120" cy="274320"/>
+          </a:xfrm>
+          <a:prstGeom prst="rect">
+            <a:avLst/>
+          </a:prstGeom>
+          <a:noFill/>
+        </p:spPr>
+        <p:txBody>
+          <a:bodyPr wrap="square">
+            <a:spAutoFit/>
+          </a:bodyPr>
+          <a:lstStyle/>
+          <a:p>
+            <a:pPr algn="ctr">
+              <a:defRPr sz="1000" b="1">
+                <a:solidFill>
+                  <a:srgbClr val="EA4B71"/>
+                </a:solidFill>
+                <a:latin typeface="Apple SD Gothic Neo"/>
+              </a:defRPr>
+            </a:pPr>
+            <a:r>
+              <a:t>n8n 지원</a:t>
+            </a:r>
+          </a:p>
+        </p:txBody>
+      </p:sp>
+      <p:sp>
+        <p:nvSpPr>
+          <p:cNvPr id="25" name="Rounded Rectangle 24"/>
+          <p:cNvSpPr/>
+          <p:nvPr/>
+        </p:nvSpPr>
+        <p:spPr>
+          <a:xfrm>
+            <a:off x="2743200" y="4663440"/>
+            <a:ext cx="2103120" cy="1005840"/>
+          </a:xfrm>
+          <a:prstGeom prst="roundRect">
+            <a:avLst/>
+          </a:prstGeom>
+          <a:solidFill>
+            <a:srgbClr val="16213E"/>
+          </a:solidFill>
+          <a:ln>
+            <a:noFill/>
+          </a:ln>
+          <a:effectLst/>
+        </p:spPr>
+        <p:style>
+          <a:lnRef idx="1">
+            <a:schemeClr val="accent1"/>
+          </a:lnRef>
+          <a:fillRef idx="3">
+            <a:schemeClr val="accent1"/>
+          </a:fillRef>
+          <a:effectRef idx="2">
+            <a:schemeClr val="accent1"/>
+          </a:effectRef>
+          <a:fontRef idx="minor">
+            <a:schemeClr val="lt1"/>
+          </a:fontRef>
+        </p:style>
+        <p:txBody>
+          <a:bodyPr rtlCol="0" anchor="ctr"/>
+          <a:lstStyle/>
+          <a:p>
+            <a:pPr algn="ctr"/>
+          </a:p>
+        </p:txBody>
+      </p:sp>
+      <p:sp>
+        <p:nvSpPr>
+          <p:cNvPr id="26" name="TextBox 25"/>
+          <p:cNvSpPr txBox="1"/>
+          <p:nvPr/>
+        </p:nvSpPr>
+        <p:spPr>
+          <a:xfrm>
+            <a:off x="2743200" y="4709160"/>
+            <a:ext cx="2103120" cy="365760"/>
+          </a:xfrm>
+          <a:prstGeom prst="rect">
+            <a:avLst/>
+          </a:prstGeom>
+          <a:noFill/>
+        </p:spPr>
+        <p:txBody>
+          <a:bodyPr wrap="square">
+            <a:spAutoFit/>
+          </a:bodyPr>
+          <a:lstStyle/>
+          <a:p>
+            <a:pPr algn="ctr">
+              <a:defRPr sz="2200" b="1">
+                <a:solidFill>
+                  <a:srgbClr val="7C3AED"/>
+                </a:solidFill>
+                <a:latin typeface="Apple SD Gothic Neo"/>
+              </a:defRPr>
+            </a:pPr>
+            <a:r>
+              <a:t>2</a:t>
+            </a:r>
+          </a:p>
+        </p:txBody>
+      </p:sp>
+      <p:sp>
+        <p:nvSpPr>
+          <p:cNvPr id="27" name="TextBox 26"/>
+          <p:cNvSpPr txBox="1"/>
+          <p:nvPr/>
+        </p:nvSpPr>
+        <p:spPr>
+          <a:xfrm>
+            <a:off x="2834640" y="5074920"/>
+            <a:ext cx="1920240" cy="502920"/>
+          </a:xfrm>
+          <a:prstGeom prst="rect">
+            <a:avLst/>
+          </a:prstGeom>
+          <a:noFill/>
+        </p:spPr>
+        <p:txBody>
+          <a:bodyPr wrap="square">
+            <a:spAutoFit/>
+          </a:bodyPr>
+          <a:lstStyle/>
+          <a:p>
+            <a:pPr algn="ctr">
+              <a:defRPr sz="1200" b="0">
+                <a:solidFill>
+                  <a:srgbClr val="FFFFFF"/>
+                </a:solidFill>
+                <a:latin typeface="Apple SD Gothic Neo"/>
+              </a:defRPr>
+            </a:pPr>
+            <a:r>
+              <a:t>거버넌스/보안 프레임워크</a:t>
+            </a:r>
+          </a:p>
+        </p:txBody>
+      </p:sp>
+      <p:sp>
+        <p:nvSpPr>
+          <p:cNvPr id="28" name="TextBox 27"/>
+          <p:cNvSpPr txBox="1"/>
+          <p:nvPr/>
+        </p:nvSpPr>
+        <p:spPr>
+          <a:xfrm>
+            <a:off x="2743200" y="5486400"/>
+            <a:ext cx="2103120" cy="274320"/>
+          </a:xfrm>
+          <a:prstGeom prst="rect">
+            <a:avLst/>
+          </a:prstGeom>
+          <a:noFill/>
+        </p:spPr>
+        <p:txBody>
+          <a:bodyPr wrap="square">
+            <a:spAutoFit/>
+          </a:bodyPr>
+          <a:lstStyle/>
+          <a:p>
+            <a:pPr algn="ctr">
+              <a:defRPr sz="1000" b="1">
+                <a:solidFill>
+                  <a:srgbClr val="EA4B71"/>
+                </a:solidFill>
+                <a:latin typeface="Apple SD Gothic Neo"/>
+              </a:defRPr>
+            </a:pPr>
+            <a:r>
+              <a:t>n8n 지원</a:t>
+            </a:r>
+          </a:p>
+        </p:txBody>
+      </p:sp>
+      <p:sp>
+        <p:nvSpPr>
+          <p:cNvPr id="29" name="Rounded Rectangle 28"/>
+          <p:cNvSpPr/>
+          <p:nvPr/>
+        </p:nvSpPr>
+        <p:spPr>
+          <a:xfrm>
+            <a:off x="5029200" y="4663440"/>
+            <a:ext cx="2103120" cy="1005840"/>
+          </a:xfrm>
+          <a:prstGeom prst="roundRect">
+            <a:avLst/>
+          </a:prstGeom>
+          <a:solidFill>
+            <a:srgbClr val="16213E"/>
+          </a:solidFill>
+          <a:ln>
+            <a:noFill/>
+          </a:ln>
+          <a:effectLst/>
+        </p:spPr>
+        <p:style>
+          <a:lnRef idx="1">
+            <a:schemeClr val="accent1"/>
+          </a:lnRef>
+          <a:fillRef idx="3">
+            <a:schemeClr val="accent1"/>
+          </a:fillRef>
+          <a:effectRef idx="2">
+            <a:schemeClr val="accent1"/>
+          </a:effectRef>
+          <a:fontRef idx="minor">
+            <a:schemeClr val="lt1"/>
+          </a:fontRef>
+        </p:style>
+        <p:txBody>
+          <a:bodyPr rtlCol="0" anchor="ctr"/>
+          <a:lstStyle/>
+          <a:p>
+            <a:pPr algn="ctr"/>
+          </a:p>
+        </p:txBody>
+      </p:sp>
+      <p:sp>
+        <p:nvSpPr>
+          <p:cNvPr id="30" name="TextBox 29"/>
+          <p:cNvSpPr txBox="1"/>
+          <p:nvPr/>
+        </p:nvSpPr>
+        <p:spPr>
+          <a:xfrm>
+            <a:off x="5029200" y="4709160"/>
+            <a:ext cx="2103120" cy="365760"/>
+          </a:xfrm>
+          <a:prstGeom prst="rect">
+            <a:avLst/>
+          </a:prstGeom>
+          <a:noFill/>
+        </p:spPr>
+        <p:txBody>
+          <a:bodyPr wrap="square">
+            <a:spAutoFit/>
+          </a:bodyPr>
+          <a:lstStyle/>
+          <a:p>
+            <a:pPr algn="ctr">
+              <a:defRPr sz="2200" b="1">
                 <a:solidFill>
                   <a:srgbClr val="10B981"/>
                 </a:solidFill>
@@ -14325,51 +15301,347 @@
               </a:defRPr>
             </a:pPr>
             <a:r>
-              <a:t>11%</a:t>
-            </a:r>
-          </a:p>
-        </p:txBody>
-      </p:sp>
-      <p:sp>
-        <p:nvSpPr>
-          <p:cNvPr id="15" name="TextBox 14"/>
-          <p:cNvSpPr txBox="1"/>
-          <p:nvPr/>
-        </p:nvSpPr>
-        <p:spPr>
-          <a:xfrm>
-            <a:off x="457200" y="5029200"/>
-            <a:ext cx="10972800" cy="914400"/>
-          </a:xfrm>
-          <a:prstGeom prst="rect">
-            <a:avLst/>
-          </a:prstGeom>
-          <a:noFill/>
-        </p:spPr>
-        <p:txBody>
-          <a:bodyPr wrap="square">
-            <a:spAutoFit/>
-          </a:bodyPr>
-          <a:lstStyle/>
-          <a:p>
-            <a:pPr algn="l">
-              <a:defRPr sz="1600" b="0">
-                <a:solidFill>
-                  <a:srgbClr val="A0A0B0"/>
-                </a:solidFill>
-                <a:latin typeface="Apple SD Gothic Neo"/>
-              </a:defRPr>
-            </a:pPr>
-            <a:r>
-              <a:t>Gartner: 2026년 말까지 엔터프라이즈 앱 40%에 AI 에이전트 내장</a:t>
-            </a:r>
-            <a:br/>
-            <a:r>
-              <a:t>하지만 40%+ 프로젝트가 레거시 호환 문제로 실패 예측</a:t>
-            </a:r>
-            <a:br/>
-            <a:r>
-              <a:t>핵심 병목: AI 자체가 아니라 데이터 엔지니어링, 거버넌스, 레거시 통합</a:t>
+              <a:t>3</a:t>
+            </a:r>
+          </a:p>
+        </p:txBody>
+      </p:sp>
+      <p:sp>
+        <p:nvSpPr>
+          <p:cNvPr id="31" name="TextBox 30"/>
+          <p:cNvSpPr txBox="1"/>
+          <p:nvPr/>
+        </p:nvSpPr>
+        <p:spPr>
+          <a:xfrm>
+            <a:off x="5120640" y="5074920"/>
+            <a:ext cx="1920240" cy="502920"/>
+          </a:xfrm>
+          <a:prstGeom prst="rect">
+            <a:avLst/>
+          </a:prstGeom>
+          <a:noFill/>
+        </p:spPr>
+        <p:txBody>
+          <a:bodyPr wrap="square">
+            <a:spAutoFit/>
+          </a:bodyPr>
+          <a:lstStyle/>
+          <a:p>
+            <a:pPr algn="ctr">
+              <a:defRPr sz="1200" b="0">
+                <a:solidFill>
+                  <a:srgbClr val="FFFFFF"/>
+                </a:solidFill>
+                <a:latin typeface="Apple SD Gothic Neo"/>
+              </a:defRPr>
+            </a:pPr>
+            <a:r>
+              <a:t>레거시 시스템 API 연동</a:t>
+            </a:r>
+          </a:p>
+        </p:txBody>
+      </p:sp>
+      <p:sp>
+        <p:nvSpPr>
+          <p:cNvPr id="32" name="TextBox 31"/>
+          <p:cNvSpPr txBox="1"/>
+          <p:nvPr/>
+        </p:nvSpPr>
+        <p:spPr>
+          <a:xfrm>
+            <a:off x="5029200" y="5486400"/>
+            <a:ext cx="2103120" cy="274320"/>
+          </a:xfrm>
+          <a:prstGeom prst="rect">
+            <a:avLst/>
+          </a:prstGeom>
+          <a:noFill/>
+        </p:spPr>
+        <p:txBody>
+          <a:bodyPr wrap="square">
+            <a:spAutoFit/>
+          </a:bodyPr>
+          <a:lstStyle/>
+          <a:p>
+            <a:pPr algn="ctr">
+              <a:defRPr sz="1000" b="1">
+                <a:solidFill>
+                  <a:srgbClr val="EA4B71"/>
+                </a:solidFill>
+                <a:latin typeface="Apple SD Gothic Neo"/>
+              </a:defRPr>
+            </a:pPr>
+            <a:r>
+              <a:t>n8n 지원</a:t>
+            </a:r>
+          </a:p>
+        </p:txBody>
+      </p:sp>
+      <p:sp>
+        <p:nvSpPr>
+          <p:cNvPr id="33" name="Rounded Rectangle 32"/>
+          <p:cNvSpPr/>
+          <p:nvPr/>
+        </p:nvSpPr>
+        <p:spPr>
+          <a:xfrm>
+            <a:off x="7315200" y="4663440"/>
+            <a:ext cx="2103120" cy="1005840"/>
+          </a:xfrm>
+          <a:prstGeom prst="roundRect">
+            <a:avLst/>
+          </a:prstGeom>
+          <a:solidFill>
+            <a:srgbClr val="16213E"/>
+          </a:solidFill>
+          <a:ln>
+            <a:noFill/>
+          </a:ln>
+          <a:effectLst/>
+        </p:spPr>
+        <p:style>
+          <a:lnRef idx="1">
+            <a:schemeClr val="accent1"/>
+          </a:lnRef>
+          <a:fillRef idx="3">
+            <a:schemeClr val="accent1"/>
+          </a:fillRef>
+          <a:effectRef idx="2">
+            <a:schemeClr val="accent1"/>
+          </a:effectRef>
+          <a:fontRef idx="minor">
+            <a:schemeClr val="lt1"/>
+          </a:fontRef>
+        </p:style>
+        <p:txBody>
+          <a:bodyPr rtlCol="0" anchor="ctr"/>
+          <a:lstStyle/>
+          <a:p>
+            <a:pPr algn="ctr"/>
+          </a:p>
+        </p:txBody>
+      </p:sp>
+      <p:sp>
+        <p:nvSpPr>
+          <p:cNvPr id="34" name="TextBox 33"/>
+          <p:cNvSpPr txBox="1"/>
+          <p:nvPr/>
+        </p:nvSpPr>
+        <p:spPr>
+          <a:xfrm>
+            <a:off x="7315200" y="4709160"/>
+            <a:ext cx="2103120" cy="365760"/>
+          </a:xfrm>
+          <a:prstGeom prst="rect">
+            <a:avLst/>
+          </a:prstGeom>
+          <a:noFill/>
+        </p:spPr>
+        <p:txBody>
+          <a:bodyPr wrap="square">
+            <a:spAutoFit/>
+          </a:bodyPr>
+          <a:lstStyle/>
+          <a:p>
+            <a:pPr algn="ctr">
+              <a:defRPr sz="2200" b="1">
+                <a:solidFill>
+                  <a:srgbClr val="FFD600"/>
+                </a:solidFill>
+                <a:latin typeface="Apple SD Gothic Neo"/>
+              </a:defRPr>
+            </a:pPr>
+            <a:r>
+              <a:t>4</a:t>
+            </a:r>
+          </a:p>
+        </p:txBody>
+      </p:sp>
+      <p:sp>
+        <p:nvSpPr>
+          <p:cNvPr id="35" name="TextBox 34"/>
+          <p:cNvSpPr txBox="1"/>
+          <p:nvPr/>
+        </p:nvSpPr>
+        <p:spPr>
+          <a:xfrm>
+            <a:off x="7406640" y="5074920"/>
+            <a:ext cx="1920240" cy="502920"/>
+          </a:xfrm>
+          <a:prstGeom prst="rect">
+            <a:avLst/>
+          </a:prstGeom>
+          <a:noFill/>
+        </p:spPr>
+        <p:txBody>
+          <a:bodyPr wrap="square">
+            <a:spAutoFit/>
+          </a:bodyPr>
+          <a:lstStyle/>
+          <a:p>
+            <a:pPr algn="ctr">
+              <a:defRPr sz="1200" b="0">
+                <a:solidFill>
+                  <a:srgbClr val="FFFFFF"/>
+                </a:solidFill>
+                <a:latin typeface="Apple SD Gothic Neo"/>
+              </a:defRPr>
+            </a:pPr>
+            <a:r>
+              <a:t>조직 내 AI 리터러시</a:t>
+            </a:r>
+          </a:p>
+        </p:txBody>
+      </p:sp>
+      <p:sp>
+        <p:nvSpPr>
+          <p:cNvPr id="36" name="Rounded Rectangle 35"/>
+          <p:cNvSpPr/>
+          <p:nvPr/>
+        </p:nvSpPr>
+        <p:spPr>
+          <a:xfrm>
+            <a:off x="9601200" y="4663440"/>
+            <a:ext cx="2103120" cy="1005840"/>
+          </a:xfrm>
+          <a:prstGeom prst="roundRect">
+            <a:avLst/>
+          </a:prstGeom>
+          <a:solidFill>
+            <a:srgbClr val="16213E"/>
+          </a:solidFill>
+          <a:ln>
+            <a:noFill/>
+          </a:ln>
+          <a:effectLst/>
+        </p:spPr>
+        <p:style>
+          <a:lnRef idx="1">
+            <a:schemeClr val="accent1"/>
+          </a:lnRef>
+          <a:fillRef idx="3">
+            <a:schemeClr val="accent1"/>
+          </a:fillRef>
+          <a:effectRef idx="2">
+            <a:schemeClr val="accent1"/>
+          </a:effectRef>
+          <a:fontRef idx="minor">
+            <a:schemeClr val="lt1"/>
+          </a:fontRef>
+        </p:style>
+        <p:txBody>
+          <a:bodyPr rtlCol="0" anchor="ctr"/>
+          <a:lstStyle/>
+          <a:p>
+            <a:pPr algn="ctr"/>
+          </a:p>
+        </p:txBody>
+      </p:sp>
+      <p:sp>
+        <p:nvSpPr>
+          <p:cNvPr id="37" name="TextBox 36"/>
+          <p:cNvSpPr txBox="1"/>
+          <p:nvPr/>
+        </p:nvSpPr>
+        <p:spPr>
+          <a:xfrm>
+            <a:off x="9601200" y="4709160"/>
+            <a:ext cx="2103120" cy="365760"/>
+          </a:xfrm>
+          <a:prstGeom prst="rect">
+            <a:avLst/>
+          </a:prstGeom>
+          <a:noFill/>
+        </p:spPr>
+        <p:txBody>
+          <a:bodyPr wrap="square">
+            <a:spAutoFit/>
+          </a:bodyPr>
+          <a:lstStyle/>
+          <a:p>
+            <a:pPr algn="ctr">
+              <a:defRPr sz="2200" b="1">
+                <a:solidFill>
+                  <a:srgbClr val="FF6B35"/>
+                </a:solidFill>
+                <a:latin typeface="Apple SD Gothic Neo"/>
+              </a:defRPr>
+            </a:pPr>
+            <a:r>
+              <a:t>5</a:t>
+            </a:r>
+          </a:p>
+        </p:txBody>
+      </p:sp>
+      <p:sp>
+        <p:nvSpPr>
+          <p:cNvPr id="38" name="TextBox 37"/>
+          <p:cNvSpPr txBox="1"/>
+          <p:nvPr/>
+        </p:nvSpPr>
+        <p:spPr>
+          <a:xfrm>
+            <a:off x="9692640" y="5074920"/>
+            <a:ext cx="1920240" cy="502920"/>
+          </a:xfrm>
+          <a:prstGeom prst="rect">
+            <a:avLst/>
+          </a:prstGeom>
+          <a:noFill/>
+        </p:spPr>
+        <p:txBody>
+          <a:bodyPr wrap="square">
+            <a:spAutoFit/>
+          </a:bodyPr>
+          <a:lstStyle/>
+          <a:p>
+            <a:pPr algn="ctr">
+              <a:defRPr sz="1200" b="0">
+                <a:solidFill>
+                  <a:srgbClr val="FFFFFF"/>
+                </a:solidFill>
+                <a:latin typeface="Apple SD Gothic Neo"/>
+              </a:defRPr>
+            </a:pPr>
+            <a:r>
+              <a:t>점진적 도입 (파일럿 -&gt; 확대)</a:t>
+            </a:r>
+          </a:p>
+        </p:txBody>
+      </p:sp>
+      <p:sp>
+        <p:nvSpPr>
+          <p:cNvPr id="39" name="TextBox 38"/>
+          <p:cNvSpPr txBox="1"/>
+          <p:nvPr/>
+        </p:nvSpPr>
+        <p:spPr>
+          <a:xfrm>
+            <a:off x="457200" y="5943600"/>
+            <a:ext cx="10972800" cy="457200"/>
+          </a:xfrm>
+          <a:prstGeom prst="rect">
+            <a:avLst/>
+          </a:prstGeom>
+          <a:noFill/>
+        </p:spPr>
+        <p:txBody>
+          <a:bodyPr wrap="square">
+            <a:spAutoFit/>
+          </a:bodyPr>
+          <a:lstStyle/>
+          <a:p>
+            <a:pPr algn="ctr">
+              <a:defRPr sz="1400" b="1">
+                <a:solidFill>
+                  <a:srgbClr val="EA4B71"/>
+                </a:solidFill>
+                <a:latin typeface="Apple SD Gothic Neo"/>
+              </a:defRPr>
+            </a:pPr>
+            <a:r>
+              <a:t>n8n은 데이터 연결, API 연동, 점진적 도입을 직접 지원 -- 실운영 도달의 핵심 조력자</a:t>
             </a:r>
           </a:p>
         </p:txBody>
@@ -14438,7 +15710,67 @@
       </p:sp>
       <p:sp>
         <p:nvSpPr>
-          <p:cNvPr id="3" name="Rounded Rectangle 2"/>
+          <p:cNvPr id="3" name="Oval 2"/>
+          <p:cNvSpPr/>
+          <p:nvPr/>
+        </p:nvSpPr>
+        <p:spPr>
+          <a:xfrm>
+            <a:off x="9875520" y="137160"/>
+            <a:ext cx="822960" cy="822960"/>
+          </a:xfrm>
+          <a:prstGeom prst="ellipse">
+            <a:avLst/>
+          </a:prstGeom>
+          <a:solidFill>
+            <a:srgbClr val="EA4B71"/>
+          </a:solidFill>
+          <a:ln>
+            <a:noFill/>
+          </a:ln>
+          <a:effectLst/>
+        </p:spPr>
+        <p:style>
+          <a:lnRef idx="1">
+            <a:schemeClr val="accent1"/>
+          </a:lnRef>
+          <a:fillRef idx="3">
+            <a:schemeClr val="accent1"/>
+          </a:fillRef>
+          <a:effectRef idx="2">
+            <a:schemeClr val="accent1"/>
+          </a:effectRef>
+          <a:fontRef idx="minor">
+            <a:schemeClr val="lt1"/>
+          </a:fontRef>
+        </p:style>
+        <p:txBody>
+          <a:bodyPr rtlCol="0" anchor="ctr" wrap="none"/>
+          <a:lstStyle/>
+          <a:p>
+            <a:pPr algn="ctr">
+              <a:spcBef>
+                <a:spcPts val="0"/>
+              </a:spcBef>
+              <a:spcAft>
+                <a:spcPts val="0"/>
+              </a:spcAft>
+              <a:defRPr sz="1600" b="1">
+                <a:solidFill>
+                  <a:srgbClr val="FFFFFF"/>
+                </a:solidFill>
+                <a:latin typeface="Apple SD Gothic Neo"/>
+              </a:defRPr>
+            </a:pPr>
+            <a:r>
+              <a:t>n8n</a:t>
+            </a:r>
+          </a:p>
+        </p:txBody>
+      </p:sp>
+      <p:sp>
+        <p:nvSpPr>
+          <p:cNvPr id="4" name="Rounded Rectangle 3"/>
           <p:cNvSpPr/>
           <p:nvPr/>
         </p:nvSpPr>
@@ -14482,7 +15814,7 @@
       </p:sp>
       <p:sp>
         <p:nvSpPr>
-          <p:cNvPr id="4" name="TextBox 3"/>
+          <p:cNvPr id="5" name="TextBox 4"/>
           <p:cNvSpPr txBox="1"/>
           <p:nvPr/>
         </p:nvSpPr>
@@ -14518,7 +15850,7 @@
       </p:sp>
       <p:sp>
         <p:nvSpPr>
-          <p:cNvPr id="5" name="TextBox 4"/>
+          <p:cNvPr id="6" name="TextBox 5"/>
           <p:cNvSpPr txBox="1"/>
           <p:nvPr/>
         </p:nvSpPr>
@@ -14554,7 +15886,7 @@
       </p:sp>
       <p:sp>
         <p:nvSpPr>
-          <p:cNvPr id="6" name="Rounded Rectangle 5"/>
+          <p:cNvPr id="7" name="Rounded Rectangle 6"/>
           <p:cNvSpPr/>
           <p:nvPr/>
         </p:nvSpPr>
@@ -14598,7 +15930,7 @@
       </p:sp>
       <p:sp>
         <p:nvSpPr>
-          <p:cNvPr id="7" name="TextBox 6"/>
+          <p:cNvPr id="8" name="TextBox 7"/>
           <p:cNvSpPr txBox="1"/>
           <p:nvPr/>
         </p:nvSpPr>
@@ -14634,7 +15966,7 @@
       </p:sp>
       <p:sp>
         <p:nvSpPr>
-          <p:cNvPr id="8" name="TextBox 7"/>
+          <p:cNvPr id="9" name="TextBox 8"/>
           <p:cNvSpPr txBox="1"/>
           <p:nvPr/>
         </p:nvSpPr>
@@ -14670,7 +16002,7 @@
       </p:sp>
       <p:sp>
         <p:nvSpPr>
-          <p:cNvPr id="9" name="Rounded Rectangle 8"/>
+          <p:cNvPr id="10" name="Rounded Rectangle 9"/>
           <p:cNvSpPr/>
           <p:nvPr/>
         </p:nvSpPr>
@@ -14714,7 +16046,7 @@
       </p:sp>
       <p:sp>
         <p:nvSpPr>
-          <p:cNvPr id="10" name="TextBox 9"/>
+          <p:cNvPr id="11" name="TextBox 10"/>
           <p:cNvSpPr txBox="1"/>
           <p:nvPr/>
         </p:nvSpPr>
@@ -14750,7 +16082,7 @@
       </p:sp>
       <p:sp>
         <p:nvSpPr>
-          <p:cNvPr id="11" name="TextBox 10"/>
+          <p:cNvPr id="12" name="TextBox 11"/>
           <p:cNvSpPr txBox="1"/>
           <p:nvPr/>
         </p:nvSpPr>
@@ -14786,7 +16118,7 @@
       </p:sp>
       <p:sp>
         <p:nvSpPr>
-          <p:cNvPr id="12" name="Rounded Rectangle 11"/>
+          <p:cNvPr id="13" name="Rounded Rectangle 12"/>
           <p:cNvSpPr/>
           <p:nvPr/>
         </p:nvSpPr>
@@ -14830,7 +16162,7 @@
       </p:sp>
       <p:sp>
         <p:nvSpPr>
-          <p:cNvPr id="13" name="TextBox 12"/>
+          <p:cNvPr id="14" name="TextBox 13"/>
           <p:cNvSpPr txBox="1"/>
           <p:nvPr/>
         </p:nvSpPr>
@@ -14866,7 +16198,7 @@
       </p:sp>
       <p:sp>
         <p:nvSpPr>
-          <p:cNvPr id="14" name="TextBox 13"/>
+          <p:cNvPr id="15" name="TextBox 14"/>
           <p:cNvSpPr txBox="1"/>
           <p:nvPr/>
         </p:nvSpPr>
@@ -14902,7 +16234,7 @@
       </p:sp>
       <p:sp>
         <p:nvSpPr>
-          <p:cNvPr id="15" name="Rounded Rectangle 14"/>
+          <p:cNvPr id="16" name="Rounded Rectangle 15"/>
           <p:cNvSpPr/>
           <p:nvPr/>
         </p:nvSpPr>
@@ -14946,7 +16278,7 @@
       </p:sp>
       <p:sp>
         <p:nvSpPr>
-          <p:cNvPr id="16" name="TextBox 15"/>
+          <p:cNvPr id="17" name="TextBox 16"/>
           <p:cNvSpPr txBox="1"/>
           <p:nvPr/>
         </p:nvSpPr>
@@ -14982,7 +16314,7 @@
       </p:sp>
       <p:sp>
         <p:nvSpPr>
-          <p:cNvPr id="17" name="TextBox 16"/>
+          <p:cNvPr id="18" name="TextBox 17"/>
           <p:cNvSpPr txBox="1"/>
           <p:nvPr/>
         </p:nvSpPr>
@@ -15018,7 +16350,7 @@
       </p:sp>
       <p:sp>
         <p:nvSpPr>
-          <p:cNvPr id="18" name="Rounded Rectangle 17"/>
+          <p:cNvPr id="19" name="Rounded Rectangle 18"/>
           <p:cNvSpPr/>
           <p:nvPr/>
         </p:nvSpPr>
@@ -15062,7 +16394,7 @@
       </p:sp>
       <p:sp>
         <p:nvSpPr>
-          <p:cNvPr id="19" name="TextBox 18"/>
+          <p:cNvPr id="20" name="TextBox 19"/>
           <p:cNvSpPr txBox="1"/>
           <p:nvPr/>
         </p:nvSpPr>
@@ -15098,7 +16430,7 @@
       </p:sp>
       <p:sp>
         <p:nvSpPr>
-          <p:cNvPr id="20" name="TextBox 19"/>
+          <p:cNvPr id="21" name="TextBox 20"/>
           <p:cNvSpPr txBox="1"/>
           <p:nvPr/>
         </p:nvSpPr>
@@ -15134,7 +16466,7 @@
       </p:sp>
       <p:sp>
         <p:nvSpPr>
-          <p:cNvPr id="21" name="Rounded Rectangle 20"/>
+          <p:cNvPr id="22" name="Rounded Rectangle 21"/>
           <p:cNvSpPr/>
           <p:nvPr/>
         </p:nvSpPr>
@@ -15178,7 +16510,7 @@
       </p:sp>
       <p:sp>
         <p:nvSpPr>
-          <p:cNvPr id="22" name="TextBox 21"/>
+          <p:cNvPr id="23" name="TextBox 22"/>
           <p:cNvSpPr txBox="1"/>
           <p:nvPr/>
         </p:nvSpPr>
@@ -15214,7 +16546,7 @@
       </p:sp>
       <p:sp>
         <p:nvSpPr>
-          <p:cNvPr id="23" name="TextBox 22"/>
+          <p:cNvPr id="24" name="TextBox 23"/>
           <p:cNvSpPr txBox="1"/>
           <p:nvPr/>
         </p:nvSpPr>
@@ -15250,7 +16582,7 @@
       </p:sp>
       <p:sp>
         <p:nvSpPr>
-          <p:cNvPr id="24" name="Rounded Rectangle 23"/>
+          <p:cNvPr id="25" name="Rounded Rectangle 24"/>
           <p:cNvSpPr/>
           <p:nvPr/>
         </p:nvSpPr>
@@ -15294,7 +16626,7 @@
       </p:sp>
       <p:sp>
         <p:nvSpPr>
-          <p:cNvPr id="25" name="TextBox 24"/>
+          <p:cNvPr id="26" name="TextBox 25"/>
           <p:cNvSpPr txBox="1"/>
           <p:nvPr/>
         </p:nvSpPr>
@@ -15330,7 +16662,7 @@
       </p:sp>
       <p:sp>
         <p:nvSpPr>
-          <p:cNvPr id="26" name="TextBox 25"/>
+          <p:cNvPr id="27" name="TextBox 26"/>
           <p:cNvSpPr txBox="1"/>
           <p:nvPr/>
         </p:nvSpPr>
@@ -15366,7 +16698,7 @@
       </p:sp>
       <p:sp>
         <p:nvSpPr>
-          <p:cNvPr id="27" name="Rounded Rectangle 26"/>
+          <p:cNvPr id="28" name="Rounded Rectangle 27"/>
           <p:cNvSpPr/>
           <p:nvPr/>
         </p:nvSpPr>
@@ -15410,7 +16742,7 @@
       </p:sp>
       <p:sp>
         <p:nvSpPr>
-          <p:cNvPr id="28" name="TextBox 27"/>
+          <p:cNvPr id="29" name="TextBox 28"/>
           <p:cNvSpPr txBox="1"/>
           <p:nvPr/>
         </p:nvSpPr>
@@ -15446,7 +16778,7 @@
       </p:sp>
       <p:sp>
         <p:nvSpPr>
-          <p:cNvPr id="29" name="TextBox 28"/>
+          <p:cNvPr id="30" name="TextBox 29"/>
           <p:cNvSpPr txBox="1"/>
           <p:nvPr/>
         </p:nvSpPr>
@@ -15482,7 +16814,7 @@
       </p:sp>
       <p:sp>
         <p:nvSpPr>
-          <p:cNvPr id="30" name="Rounded Rectangle 29"/>
+          <p:cNvPr id="31" name="Rounded Rectangle 30"/>
           <p:cNvSpPr/>
           <p:nvPr/>
         </p:nvSpPr>
@@ -15526,7 +16858,7 @@
       </p:sp>
       <p:sp>
         <p:nvSpPr>
-          <p:cNvPr id="31" name="TextBox 30"/>
+          <p:cNvPr id="32" name="TextBox 31"/>
           <p:cNvSpPr txBox="1"/>
           <p:nvPr/>
         </p:nvSpPr>
@@ -15562,7 +16894,7 @@
       </p:sp>
       <p:sp>
         <p:nvSpPr>
-          <p:cNvPr id="32" name="TextBox 31"/>
+          <p:cNvPr id="33" name="TextBox 32"/>
           <p:cNvSpPr txBox="1"/>
           <p:nvPr/>
         </p:nvSpPr>
@@ -20281,21 +21613,405 @@
               </a:defRPr>
             </a:pPr>
             <a:r>
-              <a:t>전체 흐름 요약</a:t>
-            </a:r>
-          </a:p>
-        </p:txBody>
-      </p:sp>
-      <p:sp>
-        <p:nvSpPr>
-          <p:cNvPr id="3" name="Rounded Rectangle 2"/>
+              <a:t>사내 시스템 연동: API가 핵심</a:t>
+            </a:r>
+          </a:p>
+        </p:txBody>
+      </p:sp>
+      <p:sp>
+        <p:nvSpPr>
+          <p:cNvPr id="3" name="TextBox 2"/>
+          <p:cNvSpPr txBox="1"/>
+          <p:nvPr/>
+        </p:nvSpPr>
+        <p:spPr>
+          <a:xfrm>
+            <a:off x="457200" y="1005840"/>
+            <a:ext cx="10972800" cy="457200"/>
+          </a:xfrm>
+          <a:prstGeom prst="rect">
+            <a:avLst/>
+          </a:prstGeom>
+          <a:noFill/>
+        </p:spPr>
+        <p:txBody>
+          <a:bodyPr wrap="square">
+            <a:spAutoFit/>
+          </a:bodyPr>
+          <a:lstStyle/>
+          <a:p>
+            <a:pPr algn="l">
+              <a:defRPr sz="1700" b="0">
+                <a:solidFill>
+                  <a:srgbClr val="A0A0B0"/>
+                </a:solidFill>
+                <a:latin typeface="Apple SD Gothic Neo"/>
+              </a:defRPr>
+            </a:pPr>
+            <a:r>
+              <a:t>에이전틱 AI가 실제로 작동하려면, 사내 시스템이 API로 접근 가능해야 합니다</a:t>
+            </a:r>
+          </a:p>
+        </p:txBody>
+      </p:sp>
+      <p:sp>
+        <p:nvSpPr>
+          <p:cNvPr id="4" name="Rounded Rectangle 3"/>
           <p:cNvSpPr/>
           <p:nvPr/>
         </p:nvSpPr>
         <p:spPr>
           <a:xfrm>
-            <a:off x="1828800" y="1097280"/>
-            <a:ext cx="8229600" cy="731520"/>
+            <a:off x="457200" y="2103120"/>
+            <a:ext cx="1828800" cy="731520"/>
+          </a:xfrm>
+          <a:prstGeom prst="roundRect">
+            <a:avLst/>
+          </a:prstGeom>
+          <a:solidFill>
+            <a:srgbClr val="7C3AED"/>
+          </a:solidFill>
+          <a:ln>
+            <a:noFill/>
+          </a:ln>
+          <a:effectLst/>
+        </p:spPr>
+        <p:style>
+          <a:lnRef idx="1">
+            <a:schemeClr val="accent1"/>
+          </a:lnRef>
+          <a:fillRef idx="3">
+            <a:schemeClr val="accent1"/>
+          </a:fillRef>
+          <a:effectRef idx="2">
+            <a:schemeClr val="accent1"/>
+          </a:effectRef>
+          <a:fontRef idx="minor">
+            <a:schemeClr val="lt1"/>
+          </a:fontRef>
+        </p:style>
+        <p:txBody>
+          <a:bodyPr rtlCol="0" anchor="ctr"/>
+          <a:lstStyle/>
+          <a:p>
+            <a:pPr algn="ctr"/>
+          </a:p>
+        </p:txBody>
+      </p:sp>
+      <p:sp>
+        <p:nvSpPr>
+          <p:cNvPr id="5" name="TextBox 4"/>
+          <p:cNvSpPr txBox="1"/>
+          <p:nvPr/>
+        </p:nvSpPr>
+        <p:spPr>
+          <a:xfrm>
+            <a:off x="457200" y="2194560"/>
+            <a:ext cx="1828800" cy="548640"/>
+          </a:xfrm>
+          <a:prstGeom prst="rect">
+            <a:avLst/>
+          </a:prstGeom>
+          <a:noFill/>
+        </p:spPr>
+        <p:txBody>
+          <a:bodyPr wrap="square">
+            <a:spAutoFit/>
+          </a:bodyPr>
+          <a:lstStyle/>
+          <a:p>
+            <a:pPr algn="ctr">
+              <a:defRPr sz="1500" b="1">
+                <a:solidFill>
+                  <a:srgbClr val="FFFFFF"/>
+                </a:solidFill>
+                <a:latin typeface="Apple SD Gothic Neo"/>
+              </a:defRPr>
+            </a:pPr>
+            <a:r>
+              <a:t>사용자 요청</a:t>
+            </a:r>
+          </a:p>
+        </p:txBody>
+      </p:sp>
+      <p:sp>
+        <p:nvSpPr>
+          <p:cNvPr id="6" name="TextBox 5"/>
+          <p:cNvSpPr txBox="1"/>
+          <p:nvPr/>
+        </p:nvSpPr>
+        <p:spPr>
+          <a:xfrm>
+            <a:off x="2286000" y="2240280"/>
+            <a:ext cx="457200" cy="457200"/>
+          </a:xfrm>
+          <a:prstGeom prst="rect">
+            <a:avLst/>
+          </a:prstGeom>
+          <a:noFill/>
+        </p:spPr>
+        <p:txBody>
+          <a:bodyPr wrap="square">
+            <a:spAutoFit/>
+          </a:bodyPr>
+          <a:lstStyle/>
+          <a:p>
+            <a:pPr algn="ctr">
+              <a:defRPr sz="2000" b="1">
+                <a:solidFill>
+                  <a:srgbClr val="00D2FF"/>
+                </a:solidFill>
+                <a:latin typeface="Apple SD Gothic Neo"/>
+              </a:defRPr>
+            </a:pPr>
+            <a:r>
+              <a:t>-&gt;</a:t>
+            </a:r>
+          </a:p>
+        </p:txBody>
+      </p:sp>
+      <p:sp>
+        <p:nvSpPr>
+          <p:cNvPr id="7" name="Rounded Rectangle 6"/>
+          <p:cNvSpPr/>
+          <p:nvPr/>
+        </p:nvSpPr>
+        <p:spPr>
+          <a:xfrm>
+            <a:off x="2743200" y="2103120"/>
+            <a:ext cx="2011680" cy="731520"/>
+          </a:xfrm>
+          <a:prstGeom prst="roundRect">
+            <a:avLst/>
+          </a:prstGeom>
+          <a:solidFill>
+            <a:srgbClr val="EA4B71"/>
+          </a:solidFill>
+          <a:ln>
+            <a:noFill/>
+          </a:ln>
+          <a:effectLst/>
+        </p:spPr>
+        <p:style>
+          <a:lnRef idx="1">
+            <a:schemeClr val="accent1"/>
+          </a:lnRef>
+          <a:fillRef idx="3">
+            <a:schemeClr val="accent1"/>
+          </a:fillRef>
+          <a:effectRef idx="2">
+            <a:schemeClr val="accent1"/>
+          </a:effectRef>
+          <a:fontRef idx="minor">
+            <a:schemeClr val="lt1"/>
+          </a:fontRef>
+        </p:style>
+        <p:txBody>
+          <a:bodyPr rtlCol="0" anchor="ctr"/>
+          <a:lstStyle/>
+          <a:p>
+            <a:pPr algn="ctr"/>
+          </a:p>
+        </p:txBody>
+      </p:sp>
+      <p:sp>
+        <p:nvSpPr>
+          <p:cNvPr id="8" name="TextBox 7"/>
+          <p:cNvSpPr txBox="1"/>
+          <p:nvPr/>
+        </p:nvSpPr>
+        <p:spPr>
+          <a:xfrm>
+            <a:off x="2743200" y="2194560"/>
+            <a:ext cx="2011680" cy="548640"/>
+          </a:xfrm>
+          <a:prstGeom prst="rect">
+            <a:avLst/>
+          </a:prstGeom>
+          <a:noFill/>
+        </p:spPr>
+        <p:txBody>
+          <a:bodyPr wrap="square">
+            <a:spAutoFit/>
+          </a:bodyPr>
+          <a:lstStyle/>
+          <a:p>
+            <a:pPr algn="ctr">
+              <a:defRPr sz="1500" b="1">
+                <a:solidFill>
+                  <a:srgbClr val="FFFFFF"/>
+                </a:solidFill>
+                <a:latin typeface="Apple SD Gothic Neo"/>
+              </a:defRPr>
+            </a:pPr>
+            <a:r>
+              <a:t>n8n 에이전트</a:t>
+            </a:r>
+          </a:p>
+        </p:txBody>
+      </p:sp>
+      <p:sp>
+        <p:nvSpPr>
+          <p:cNvPr id="9" name="TextBox 8"/>
+          <p:cNvSpPr txBox="1"/>
+          <p:nvPr/>
+        </p:nvSpPr>
+        <p:spPr>
+          <a:xfrm>
+            <a:off x="4754880" y="2240280"/>
+            <a:ext cx="457200" cy="457200"/>
+          </a:xfrm>
+          <a:prstGeom prst="rect">
+            <a:avLst/>
+          </a:prstGeom>
+          <a:noFill/>
+        </p:spPr>
+        <p:txBody>
+          <a:bodyPr wrap="square">
+            <a:spAutoFit/>
+          </a:bodyPr>
+          <a:lstStyle/>
+          <a:p>
+            <a:pPr algn="ctr">
+              <a:defRPr sz="2000" b="1">
+                <a:solidFill>
+                  <a:srgbClr val="00D2FF"/>
+                </a:solidFill>
+                <a:latin typeface="Apple SD Gothic Neo"/>
+              </a:defRPr>
+            </a:pPr>
+            <a:r>
+              <a:t>-&gt;</a:t>
+            </a:r>
+          </a:p>
+        </p:txBody>
+      </p:sp>
+      <p:sp>
+        <p:nvSpPr>
+          <p:cNvPr id="10" name="Rounded Rectangle 9"/>
+          <p:cNvSpPr/>
+          <p:nvPr/>
+        </p:nvSpPr>
+        <p:spPr>
+          <a:xfrm>
+            <a:off x="5212080" y="2103120"/>
+            <a:ext cx="1828800" cy="731520"/>
+          </a:xfrm>
+          <a:prstGeom prst="roundRect">
+            <a:avLst/>
+          </a:prstGeom>
+          <a:solidFill>
+            <a:srgbClr val="00D2FF"/>
+          </a:solidFill>
+          <a:ln>
+            <a:noFill/>
+          </a:ln>
+          <a:effectLst/>
+        </p:spPr>
+        <p:style>
+          <a:lnRef idx="1">
+            <a:schemeClr val="accent1"/>
+          </a:lnRef>
+          <a:fillRef idx="3">
+            <a:schemeClr val="accent1"/>
+          </a:fillRef>
+          <a:effectRef idx="2">
+            <a:schemeClr val="accent1"/>
+          </a:effectRef>
+          <a:fontRef idx="minor">
+            <a:schemeClr val="lt1"/>
+          </a:fontRef>
+        </p:style>
+        <p:txBody>
+          <a:bodyPr rtlCol="0" anchor="ctr"/>
+          <a:lstStyle/>
+          <a:p>
+            <a:pPr algn="ctr"/>
+          </a:p>
+        </p:txBody>
+      </p:sp>
+      <p:sp>
+        <p:nvSpPr>
+          <p:cNvPr id="11" name="TextBox 10"/>
+          <p:cNvSpPr txBox="1"/>
+          <p:nvPr/>
+        </p:nvSpPr>
+        <p:spPr>
+          <a:xfrm>
+            <a:off x="5212080" y="2194560"/>
+            <a:ext cx="1828800" cy="548640"/>
+          </a:xfrm>
+          <a:prstGeom prst="rect">
+            <a:avLst/>
+          </a:prstGeom>
+          <a:noFill/>
+        </p:spPr>
+        <p:txBody>
+          <a:bodyPr wrap="square">
+            <a:spAutoFit/>
+          </a:bodyPr>
+          <a:lstStyle/>
+          <a:p>
+            <a:pPr algn="ctr">
+              <a:defRPr sz="1500" b="1">
+                <a:solidFill>
+                  <a:srgbClr val="FFFFFF"/>
+                </a:solidFill>
+                <a:latin typeface="Apple SD Gothic Neo"/>
+              </a:defRPr>
+            </a:pPr>
+            <a:r>
+              <a:t>API Gateway</a:t>
+            </a:r>
+          </a:p>
+        </p:txBody>
+      </p:sp>
+      <p:sp>
+        <p:nvSpPr>
+          <p:cNvPr id="12" name="TextBox 11"/>
+          <p:cNvSpPr txBox="1"/>
+          <p:nvPr/>
+        </p:nvSpPr>
+        <p:spPr>
+          <a:xfrm>
+            <a:off x="7040880" y="2240280"/>
+            <a:ext cx="457200" cy="457200"/>
+          </a:xfrm>
+          <a:prstGeom prst="rect">
+            <a:avLst/>
+          </a:prstGeom>
+          <a:noFill/>
+        </p:spPr>
+        <p:txBody>
+          <a:bodyPr wrap="square">
+            <a:spAutoFit/>
+          </a:bodyPr>
+          <a:lstStyle/>
+          <a:p>
+            <a:pPr algn="ctr">
+              <a:defRPr sz="2000" b="1">
+                <a:solidFill>
+                  <a:srgbClr val="00D2FF"/>
+                </a:solidFill>
+                <a:latin typeface="Apple SD Gothic Neo"/>
+              </a:defRPr>
+            </a:pPr>
+            <a:r>
+              <a:t>-&gt;</a:t>
+            </a:r>
+          </a:p>
+        </p:txBody>
+      </p:sp>
+      <p:sp>
+        <p:nvSpPr>
+          <p:cNvPr id="13" name="Rounded Rectangle 12"/>
+          <p:cNvSpPr/>
+          <p:nvPr/>
+        </p:nvSpPr>
+        <p:spPr>
+          <a:xfrm>
+            <a:off x="7589520" y="1645920"/>
+            <a:ext cx="3840480" cy="548640"/>
           </a:xfrm>
           <a:prstGeom prst="roundRect">
             <a:avLst/>
@@ -20332,20 +22048,20 @@
       </p:sp>
       <p:sp>
         <p:nvSpPr>
-          <p:cNvPr id="4" name="Rectangle 3"/>
+          <p:cNvPr id="14" name="Rectangle 13"/>
           <p:cNvSpPr/>
           <p:nvPr/>
         </p:nvSpPr>
         <p:spPr>
           <a:xfrm>
-            <a:off x="1828800" y="1097280"/>
-            <a:ext cx="91440" cy="731520"/>
+            <a:off x="7589520" y="1645920"/>
+            <a:ext cx="73152" cy="548640"/>
           </a:xfrm>
           <a:prstGeom prst="rect">
             <a:avLst/>
           </a:prstGeom>
           <a:solidFill>
-            <a:srgbClr val="A0A0B0"/>
+            <a:srgbClr val="10B981"/>
           </a:solidFill>
           <a:ln>
             <a:noFill/>
@@ -20375,14 +22091,14 @@
       </p:sp>
       <p:sp>
         <p:nvSpPr>
-          <p:cNvPr id="5" name="TextBox 4"/>
-          <p:cNvSpPr txBox="1"/>
-          <p:nvPr/>
-        </p:nvSpPr>
-        <p:spPr>
-          <a:xfrm>
-            <a:off x="2194560" y="1188720"/>
-            <a:ext cx="4572000" cy="457200"/>
+          <p:cNvPr id="15" name="TextBox 14"/>
+          <p:cNvSpPr txBox="1"/>
+          <p:nvPr/>
+        </p:nvSpPr>
+        <p:spPr>
+          <a:xfrm>
+            <a:off x="7863840" y="1691640"/>
+            <a:ext cx="3474720" cy="365760"/>
           </a:xfrm>
           <a:prstGeom prst="rect">
             <a:avLst/>
@@ -20396,7 +22112,7 @@
           <a:lstStyle/>
           <a:p>
             <a:pPr algn="l">
-              <a:defRPr sz="1800" b="1">
+              <a:defRPr sz="1400" b="0">
                 <a:solidFill>
                   <a:srgbClr val="FFFFFF"/>
                 </a:solidFill>
@@ -20404,93 +22120,21 @@
               </a:defRPr>
             </a:pPr>
             <a:r>
-              <a:t>모델이 똑똑해졌다</a:t>
-            </a:r>
-          </a:p>
-        </p:txBody>
-      </p:sp>
-      <p:sp>
-        <p:nvSpPr>
-          <p:cNvPr id="6" name="TextBox 5"/>
-          <p:cNvSpPr txBox="1"/>
-          <p:nvPr/>
-        </p:nvSpPr>
-        <p:spPr>
-          <a:xfrm>
-            <a:off x="6858000" y="1188720"/>
-            <a:ext cx="2743200" cy="457200"/>
-          </a:xfrm>
-          <a:prstGeom prst="rect">
-            <a:avLst/>
-          </a:prstGeom>
-          <a:noFill/>
-        </p:spPr>
-        <p:txBody>
-          <a:bodyPr wrap="square">
-            <a:spAutoFit/>
-          </a:bodyPr>
-          <a:lstStyle/>
-          <a:p>
-            <a:pPr algn="l">
-              <a:defRPr sz="1500" b="0">
-                <a:solidFill>
-                  <a:srgbClr val="A0A0B0"/>
-                </a:solidFill>
-                <a:latin typeface="Apple SD Gothic Neo"/>
-              </a:defRPr>
-            </a:pPr>
-            <a:r>
-              <a:t>LLM 경쟁</a:t>
-            </a:r>
-          </a:p>
-        </p:txBody>
-      </p:sp>
-      <p:sp>
-        <p:nvSpPr>
-          <p:cNvPr id="7" name="TextBox 6"/>
-          <p:cNvSpPr txBox="1"/>
-          <p:nvPr/>
-        </p:nvSpPr>
-        <p:spPr>
-          <a:xfrm>
-            <a:off x="5760720" y="1645920"/>
-            <a:ext cx="457200" cy="365760"/>
-          </a:xfrm>
-          <a:prstGeom prst="rect">
-            <a:avLst/>
-          </a:prstGeom>
-          <a:noFill/>
-        </p:spPr>
-        <p:txBody>
-          <a:bodyPr wrap="square">
-            <a:spAutoFit/>
-          </a:bodyPr>
-          <a:lstStyle/>
-          <a:p>
-            <a:pPr algn="ctr">
-              <a:defRPr sz="1600" b="0">
-                <a:solidFill>
-                  <a:srgbClr val="A0A0B0"/>
-                </a:solidFill>
-                <a:latin typeface="Apple SD Gothic Neo"/>
-              </a:defRPr>
-            </a:pPr>
-            <a:r>
-              <a:t>↓</a:t>
-            </a:r>
-          </a:p>
-        </p:txBody>
-      </p:sp>
-      <p:sp>
-        <p:nvSpPr>
-          <p:cNvPr id="8" name="Rounded Rectangle 7"/>
+              <a:t>DMS (딜러 관리)</a:t>
+            </a:r>
+          </a:p>
+        </p:txBody>
+      </p:sp>
+      <p:sp>
+        <p:nvSpPr>
+          <p:cNvPr id="16" name="Rounded Rectangle 15"/>
           <p:cNvSpPr/>
           <p:nvPr/>
         </p:nvSpPr>
         <p:spPr>
           <a:xfrm>
-            <a:off x="1828800" y="1965960"/>
-            <a:ext cx="8229600" cy="731520"/>
+            <a:off x="7589520" y="2286000"/>
+            <a:ext cx="3840480" cy="548640"/>
           </a:xfrm>
           <a:prstGeom prst="roundRect">
             <a:avLst/>
@@ -20527,20 +22171,20 @@
       </p:sp>
       <p:sp>
         <p:nvSpPr>
-          <p:cNvPr id="9" name="Rectangle 8"/>
+          <p:cNvPr id="17" name="Rectangle 16"/>
           <p:cNvSpPr/>
           <p:nvPr/>
         </p:nvSpPr>
         <p:spPr>
           <a:xfrm>
-            <a:off x="1828800" y="1965960"/>
-            <a:ext cx="91440" cy="731520"/>
+            <a:off x="7589520" y="2286000"/>
+            <a:ext cx="73152" cy="548640"/>
           </a:xfrm>
           <a:prstGeom prst="rect">
             <a:avLst/>
           </a:prstGeom>
           <a:solidFill>
-            <a:srgbClr val="00D2FF"/>
+            <a:srgbClr val="7C3AED"/>
           </a:solidFill>
           <a:ln>
             <a:noFill/>
@@ -20570,14 +22214,14 @@
       </p:sp>
       <p:sp>
         <p:nvSpPr>
-          <p:cNvPr id="10" name="TextBox 9"/>
-          <p:cNvSpPr txBox="1"/>
-          <p:nvPr/>
-        </p:nvSpPr>
-        <p:spPr>
-          <a:xfrm>
-            <a:off x="2194560" y="2057400"/>
-            <a:ext cx="4572000" cy="457200"/>
+          <p:cNvPr id="18" name="TextBox 17"/>
+          <p:cNvSpPr txBox="1"/>
+          <p:nvPr/>
+        </p:nvSpPr>
+        <p:spPr>
+          <a:xfrm>
+            <a:off x="7863840" y="2331720"/>
+            <a:ext cx="3474720" cy="365760"/>
           </a:xfrm>
           <a:prstGeom prst="rect">
             <a:avLst/>
@@ -20591,7 +22235,7 @@
           <a:lstStyle/>
           <a:p>
             <a:pPr algn="l">
-              <a:defRPr sz="1800" b="1">
+              <a:defRPr sz="1400" b="0">
                 <a:solidFill>
                   <a:srgbClr val="FFFFFF"/>
                 </a:solidFill>
@@ -20599,93 +22243,21 @@
               </a:defRPr>
             </a:pPr>
             <a:r>
-              <a:t>도구를 쓸 수 있게 됐다</a:t>
-            </a:r>
-          </a:p>
-        </p:txBody>
-      </p:sp>
-      <p:sp>
-        <p:nvSpPr>
-          <p:cNvPr id="11" name="TextBox 10"/>
-          <p:cNvSpPr txBox="1"/>
-          <p:nvPr/>
-        </p:nvSpPr>
-        <p:spPr>
-          <a:xfrm>
-            <a:off x="6858000" y="2057400"/>
-            <a:ext cx="2743200" cy="457200"/>
-          </a:xfrm>
-          <a:prstGeom prst="rect">
-            <a:avLst/>
-          </a:prstGeom>
-          <a:noFill/>
-        </p:spPr>
-        <p:txBody>
-          <a:bodyPr wrap="square">
-            <a:spAutoFit/>
-          </a:bodyPr>
-          <a:lstStyle/>
-          <a:p>
-            <a:pPr algn="l">
-              <a:defRPr sz="1500" b="0">
-                <a:solidFill>
-                  <a:srgbClr val="00D2FF"/>
-                </a:solidFill>
-                <a:latin typeface="Apple SD Gothic Neo"/>
-              </a:defRPr>
-            </a:pPr>
-            <a:r>
-              <a:t>MCP, 네이티브 AI</a:t>
-            </a:r>
-          </a:p>
-        </p:txBody>
-      </p:sp>
-      <p:sp>
-        <p:nvSpPr>
-          <p:cNvPr id="12" name="TextBox 11"/>
-          <p:cNvSpPr txBox="1"/>
-          <p:nvPr/>
-        </p:nvSpPr>
-        <p:spPr>
-          <a:xfrm>
-            <a:off x="5760720" y="2514600"/>
-            <a:ext cx="457200" cy="365760"/>
-          </a:xfrm>
-          <a:prstGeom prst="rect">
-            <a:avLst/>
-          </a:prstGeom>
-          <a:noFill/>
-        </p:spPr>
-        <p:txBody>
-          <a:bodyPr wrap="square">
-            <a:spAutoFit/>
-          </a:bodyPr>
-          <a:lstStyle/>
-          <a:p>
-            <a:pPr algn="ctr">
-              <a:defRPr sz="1600" b="0">
-                <a:solidFill>
-                  <a:srgbClr val="A0A0B0"/>
-                </a:solidFill>
-                <a:latin typeface="Apple SD Gothic Neo"/>
-              </a:defRPr>
-            </a:pPr>
-            <a:r>
-              <a:t>↓</a:t>
-            </a:r>
-          </a:p>
-        </p:txBody>
-      </p:sp>
-      <p:sp>
-        <p:nvSpPr>
-          <p:cNvPr id="13" name="Rounded Rectangle 12"/>
+              <a:t>CRM (고객 관리)</a:t>
+            </a:r>
+          </a:p>
+        </p:txBody>
+      </p:sp>
+      <p:sp>
+        <p:nvSpPr>
+          <p:cNvPr id="19" name="Rounded Rectangle 18"/>
           <p:cNvSpPr/>
           <p:nvPr/>
         </p:nvSpPr>
         <p:spPr>
           <a:xfrm>
-            <a:off x="1828800" y="2834639"/>
-            <a:ext cx="8229600" cy="731520"/>
+            <a:off x="7589520" y="2926080"/>
+            <a:ext cx="3840480" cy="548640"/>
           </a:xfrm>
           <a:prstGeom prst="roundRect">
             <a:avLst/>
@@ -20722,20 +22294,20 @@
       </p:sp>
       <p:sp>
         <p:nvSpPr>
-          <p:cNvPr id="14" name="Rectangle 13"/>
+          <p:cNvPr id="20" name="Rectangle 19"/>
           <p:cNvSpPr/>
           <p:nvPr/>
         </p:nvSpPr>
         <p:spPr>
           <a:xfrm>
-            <a:off x="1828800" y="2834639"/>
-            <a:ext cx="91440" cy="731520"/>
+            <a:off x="7589520" y="2926080"/>
+            <a:ext cx="73152" cy="548640"/>
           </a:xfrm>
           <a:prstGeom prst="rect">
             <a:avLst/>
           </a:prstGeom>
           <a:solidFill>
-            <a:srgbClr val="7C3AED"/>
+            <a:srgbClr val="FF6B35"/>
           </a:solidFill>
           <a:ln>
             <a:noFill/>
@@ -20765,14 +22337,14 @@
       </p:sp>
       <p:sp>
         <p:nvSpPr>
-          <p:cNvPr id="15" name="TextBox 14"/>
-          <p:cNvSpPr txBox="1"/>
-          <p:nvPr/>
-        </p:nvSpPr>
-        <p:spPr>
-          <a:xfrm>
-            <a:off x="2194560" y="2926079"/>
-            <a:ext cx="4572000" cy="457200"/>
+          <p:cNvPr id="21" name="TextBox 20"/>
+          <p:cNvSpPr txBox="1"/>
+          <p:nvPr/>
+        </p:nvSpPr>
+        <p:spPr>
+          <a:xfrm>
+            <a:off x="7863840" y="2971800"/>
+            <a:ext cx="3474720" cy="365760"/>
           </a:xfrm>
           <a:prstGeom prst="rect">
             <a:avLst/>
@@ -20786,7 +22358,7 @@
           <a:lstStyle/>
           <a:p>
             <a:pPr algn="l">
-              <a:defRPr sz="1800" b="1">
+              <a:defRPr sz="1400" b="0">
                 <a:solidFill>
                   <a:srgbClr val="FFFFFF"/>
                 </a:solidFill>
@@ -20794,93 +22366,21 @@
               </a:defRPr>
             </a:pPr>
             <a:r>
-              <a:t>코드도 직접 쓴다</a:t>
-            </a:r>
-          </a:p>
-        </p:txBody>
-      </p:sp>
-      <p:sp>
-        <p:nvSpPr>
-          <p:cNvPr id="16" name="TextBox 15"/>
-          <p:cNvSpPr txBox="1"/>
-          <p:nvPr/>
-        </p:nvSpPr>
-        <p:spPr>
-          <a:xfrm>
-            <a:off x="6858000" y="2926079"/>
-            <a:ext cx="2743200" cy="457200"/>
-          </a:xfrm>
-          <a:prstGeom prst="rect">
-            <a:avLst/>
-          </a:prstGeom>
-          <a:noFill/>
-        </p:spPr>
-        <p:txBody>
-          <a:bodyPr wrap="square">
-            <a:spAutoFit/>
-          </a:bodyPr>
-          <a:lstStyle/>
-          <a:p>
-            <a:pPr algn="l">
-              <a:defRPr sz="1500" b="0">
-                <a:solidFill>
-                  <a:srgbClr val="7C3AED"/>
-                </a:solidFill>
-                <a:latin typeface="Apple SD Gothic Neo"/>
-              </a:defRPr>
-            </a:pPr>
-            <a:r>
-              <a:t>CLI, 바이브 코딩</a:t>
-            </a:r>
-          </a:p>
-        </p:txBody>
-      </p:sp>
-      <p:sp>
-        <p:nvSpPr>
-          <p:cNvPr id="17" name="TextBox 16"/>
-          <p:cNvSpPr txBox="1"/>
-          <p:nvPr/>
-        </p:nvSpPr>
-        <p:spPr>
-          <a:xfrm>
-            <a:off x="5760720" y="3383279"/>
-            <a:ext cx="457200" cy="365760"/>
-          </a:xfrm>
-          <a:prstGeom prst="rect">
-            <a:avLst/>
-          </a:prstGeom>
-          <a:noFill/>
-        </p:spPr>
-        <p:txBody>
-          <a:bodyPr wrap="square">
-            <a:spAutoFit/>
-          </a:bodyPr>
-          <a:lstStyle/>
-          <a:p>
-            <a:pPr algn="ctr">
-              <a:defRPr sz="1600" b="0">
-                <a:solidFill>
-                  <a:srgbClr val="A0A0B0"/>
-                </a:solidFill>
-                <a:latin typeface="Apple SD Gothic Neo"/>
-              </a:defRPr>
-            </a:pPr>
-            <a:r>
-              <a:t>↓</a:t>
-            </a:r>
-          </a:p>
-        </p:txBody>
-      </p:sp>
-      <p:sp>
-        <p:nvSpPr>
-          <p:cNvPr id="18" name="Rounded Rectangle 17"/>
+              <a:t>ERP (재고/회계)</a:t>
+            </a:r>
+          </a:p>
+        </p:txBody>
+      </p:sp>
+      <p:sp>
+        <p:nvSpPr>
+          <p:cNvPr id="22" name="Rounded Rectangle 21"/>
           <p:cNvSpPr/>
           <p:nvPr/>
         </p:nvSpPr>
         <p:spPr>
           <a:xfrm>
-            <a:off x="1828800" y="3703320"/>
-            <a:ext cx="8229600" cy="731520"/>
+            <a:off x="7589520" y="3566159"/>
+            <a:ext cx="3840480" cy="548640"/>
           </a:xfrm>
           <a:prstGeom prst="roundRect">
             <a:avLst/>
@@ -20917,20 +22417,20 @@
       </p:sp>
       <p:sp>
         <p:nvSpPr>
-          <p:cNvPr id="19" name="Rectangle 18"/>
+          <p:cNvPr id="23" name="Rectangle 22"/>
           <p:cNvSpPr/>
           <p:nvPr/>
         </p:nvSpPr>
         <p:spPr>
           <a:xfrm>
-            <a:off x="1828800" y="3703320"/>
-            <a:ext cx="91440" cy="731520"/>
+            <a:off x="7589520" y="3566159"/>
+            <a:ext cx="73152" cy="548640"/>
           </a:xfrm>
           <a:prstGeom prst="rect">
             <a:avLst/>
           </a:prstGeom>
           <a:solidFill>
-            <a:srgbClr val="10B981"/>
+            <a:srgbClr val="FFD600"/>
           </a:solidFill>
           <a:ln>
             <a:noFill/>
@@ -20960,14 +22460,14 @@
       </p:sp>
       <p:sp>
         <p:nvSpPr>
-          <p:cNvPr id="20" name="TextBox 19"/>
-          <p:cNvSpPr txBox="1"/>
-          <p:nvPr/>
-        </p:nvSpPr>
-        <p:spPr>
-          <a:xfrm>
-            <a:off x="2194560" y="3794760"/>
-            <a:ext cx="4572000" cy="457200"/>
+          <p:cNvPr id="24" name="TextBox 23"/>
+          <p:cNvSpPr txBox="1"/>
+          <p:nvPr/>
+        </p:nvSpPr>
+        <p:spPr>
+          <a:xfrm>
+            <a:off x="7863840" y="3611879"/>
+            <a:ext cx="3474720" cy="365760"/>
           </a:xfrm>
           <a:prstGeom prst="rect">
             <a:avLst/>
@@ -20981,7 +22481,7 @@
           <a:lstStyle/>
           <a:p>
             <a:pPr algn="l">
-              <a:defRPr sz="1800" b="1">
+              <a:defRPr sz="1400" b="0">
                 <a:solidFill>
                   <a:srgbClr val="FFFFFF"/>
                 </a:solidFill>
@@ -20989,93 +22489,21 @@
               </a:defRPr>
             </a:pPr>
             <a:r>
-              <a:t>컨텍스트를 관리한다</a:t>
-            </a:r>
-          </a:p>
-        </p:txBody>
-      </p:sp>
-      <p:sp>
-        <p:nvSpPr>
-          <p:cNvPr id="21" name="TextBox 20"/>
-          <p:cNvSpPr txBox="1"/>
-          <p:nvPr/>
-        </p:nvSpPr>
-        <p:spPr>
-          <a:xfrm>
-            <a:off x="6858000" y="3794760"/>
-            <a:ext cx="2743200" cy="457200"/>
-          </a:xfrm>
-          <a:prstGeom prst="rect">
-            <a:avLst/>
-          </a:prstGeom>
-          <a:noFill/>
-        </p:spPr>
-        <p:txBody>
-          <a:bodyPr wrap="square">
-            <a:spAutoFit/>
-          </a:bodyPr>
-          <a:lstStyle/>
-          <a:p>
-            <a:pPr algn="l">
-              <a:defRPr sz="1500" b="0">
-                <a:solidFill>
-                  <a:srgbClr val="10B981"/>
-                </a:solidFill>
-                <a:latin typeface="Apple SD Gothic Neo"/>
-              </a:defRPr>
-            </a:pPr>
-            <a:r>
-              <a:t>컨텍스트 엔지니어링</a:t>
-            </a:r>
-          </a:p>
-        </p:txBody>
-      </p:sp>
-      <p:sp>
-        <p:nvSpPr>
-          <p:cNvPr id="22" name="TextBox 21"/>
-          <p:cNvSpPr txBox="1"/>
-          <p:nvPr/>
-        </p:nvSpPr>
-        <p:spPr>
-          <a:xfrm>
-            <a:off x="5760720" y="4251960"/>
-            <a:ext cx="457200" cy="365760"/>
-          </a:xfrm>
-          <a:prstGeom prst="rect">
-            <a:avLst/>
-          </a:prstGeom>
-          <a:noFill/>
-        </p:spPr>
-        <p:txBody>
-          <a:bodyPr wrap="square">
-            <a:spAutoFit/>
-          </a:bodyPr>
-          <a:lstStyle/>
-          <a:p>
-            <a:pPr algn="ctr">
-              <a:defRPr sz="1600" b="0">
-                <a:solidFill>
-                  <a:srgbClr val="A0A0B0"/>
-                </a:solidFill>
-                <a:latin typeface="Apple SD Gothic Neo"/>
-              </a:defRPr>
-            </a:pPr>
-            <a:r>
-              <a:t>↓</a:t>
-            </a:r>
-          </a:p>
-        </p:txBody>
-      </p:sp>
-      <p:sp>
-        <p:nvSpPr>
-          <p:cNvPr id="23" name="Rounded Rectangle 22"/>
+              <a:t>서비스 예약 시스템</a:t>
+            </a:r>
+          </a:p>
+        </p:txBody>
+      </p:sp>
+      <p:sp>
+        <p:nvSpPr>
+          <p:cNvPr id="25" name="Rounded Rectangle 24"/>
           <p:cNvSpPr/>
           <p:nvPr/>
         </p:nvSpPr>
         <p:spPr>
           <a:xfrm>
-            <a:off x="1828800" y="4572000"/>
-            <a:ext cx="8229600" cy="731520"/>
+            <a:off x="457200" y="4114800"/>
+            <a:ext cx="5303520" cy="1828800"/>
           </a:xfrm>
           <a:prstGeom prst="roundRect">
             <a:avLst/>
@@ -21112,57 +22540,14 @@
       </p:sp>
       <p:sp>
         <p:nvSpPr>
-          <p:cNvPr id="24" name="Rectangle 23"/>
-          <p:cNvSpPr/>
-          <p:nvPr/>
-        </p:nvSpPr>
-        <p:spPr>
-          <a:xfrm>
-            <a:off x="1828800" y="4572000"/>
-            <a:ext cx="91440" cy="731520"/>
-          </a:xfrm>
-          <a:prstGeom prst="rect">
-            <a:avLst/>
-          </a:prstGeom>
-          <a:solidFill>
-            <a:srgbClr val="FF6B35"/>
-          </a:solidFill>
-          <a:ln>
-            <a:noFill/>
-          </a:ln>
-        </p:spPr>
-        <p:style>
-          <a:lnRef idx="1">
-            <a:schemeClr val="accent1"/>
-          </a:lnRef>
-          <a:fillRef idx="3">
-            <a:schemeClr val="accent1"/>
-          </a:fillRef>
-          <a:effectRef idx="2">
-            <a:schemeClr val="accent1"/>
-          </a:effectRef>
-          <a:fontRef idx="minor">
-            <a:schemeClr val="lt1"/>
-          </a:fontRef>
-        </p:style>
-        <p:txBody>
-          <a:bodyPr rtlCol="0" anchor="ctr"/>
-          <a:lstStyle/>
-          <a:p>
-            <a:pPr algn="ctr"/>
-          </a:p>
-        </p:txBody>
-      </p:sp>
-      <p:sp>
-        <p:nvSpPr>
-          <p:cNvPr id="25" name="TextBox 24"/>
-          <p:cNvSpPr txBox="1"/>
-          <p:nvPr/>
-        </p:nvSpPr>
-        <p:spPr>
-          <a:xfrm>
-            <a:off x="2194560" y="4663440"/>
-            <a:ext cx="4572000" cy="457200"/>
+          <p:cNvPr id="26" name="TextBox 25"/>
+          <p:cNvSpPr txBox="1"/>
+          <p:nvPr/>
+        </p:nvSpPr>
+        <p:spPr>
+          <a:xfrm>
+            <a:off x="731520" y="4206240"/>
+            <a:ext cx="4754880" cy="365760"/>
           </a:xfrm>
           <a:prstGeom prst="rect">
             <a:avLst/>
@@ -21178,49 +22563,13 @@
             <a:pPr algn="l">
               <a:defRPr sz="1800" b="1">
                 <a:solidFill>
-                  <a:srgbClr val="FFFFFF"/>
-                </a:solidFill>
-                <a:latin typeface="Apple SD Gothic Neo"/>
-              </a:defRPr>
-            </a:pPr>
-            <a:r>
-              <a:t>혼자서 일을 한다</a:t>
-            </a:r>
-          </a:p>
-        </p:txBody>
-      </p:sp>
-      <p:sp>
-        <p:nvSpPr>
-          <p:cNvPr id="26" name="TextBox 25"/>
-          <p:cNvSpPr txBox="1"/>
-          <p:nvPr/>
-        </p:nvSpPr>
-        <p:spPr>
-          <a:xfrm>
-            <a:off x="6858000" y="4663440"/>
-            <a:ext cx="2743200" cy="457200"/>
-          </a:xfrm>
-          <a:prstGeom prst="rect">
-            <a:avLst/>
-          </a:prstGeom>
-          <a:noFill/>
-        </p:spPr>
-        <p:txBody>
-          <a:bodyPr wrap="square">
-            <a:spAutoFit/>
-          </a:bodyPr>
-          <a:lstStyle/>
-          <a:p>
-            <a:pPr algn="l">
-              <a:defRPr sz="1500" b="0">
-                <a:solidFill>
                   <a:srgbClr val="FF6B35"/>
                 </a:solidFill>
                 <a:latin typeface="Apple SD Gothic Neo"/>
               </a:defRPr>
             </a:pPr>
             <a:r>
-              <a:t>에이전틱 AI</a:t>
+              <a:t>현재 상태</a:t>
             </a:r>
           </a:p>
         </p:txBody>
@@ -21233,22 +22582,25 @@
         </p:nvSpPr>
         <p:spPr>
           <a:xfrm>
-            <a:off x="5760720" y="5120640"/>
-            <a:ext cx="457200" cy="365760"/>
-          </a:xfrm>
-          <a:prstGeom prst="rect">
-            <a:avLst/>
-          </a:prstGeom>
-          <a:noFill/>
-        </p:spPr>
-        <p:txBody>
-          <a:bodyPr wrap="square">
-            <a:spAutoFit/>
-          </a:bodyPr>
-          <a:lstStyle/>
-          <a:p>
-            <a:pPr algn="ctr">
-              <a:defRPr sz="1600" b="0">
+            <a:off x="731520" y="4663440"/>
+            <a:ext cx="4754880" cy="1097280"/>
+          </a:xfrm>
+          <a:prstGeom prst="rect">
+            <a:avLst/>
+          </a:prstGeom>
+          <a:noFill/>
+        </p:spPr>
+        <p:txBody>
+          <a:bodyPr wrap="square">
+            <a:spAutoFit/>
+          </a:bodyPr>
+          <a:lstStyle/>
+          <a:p>
+            <a:pPr>
+              <a:spcAft>
+                <a:spcPts val="800"/>
+              </a:spcAft>
+              <a:defRPr sz="1400">
                 <a:solidFill>
                   <a:srgbClr val="A0A0B0"/>
                 </a:solidFill>
@@ -21256,7 +22608,39 @@
               </a:defRPr>
             </a:pPr>
             <a:r>
-              <a:t>↓</a:t>
+              <a:t>많은 사내 시스템이 API 미제공 또는 제한적</a:t>
+            </a:r>
+          </a:p>
+          <a:p>
+            <a:pPr>
+              <a:spcAft>
+                <a:spcPts val="800"/>
+              </a:spcAft>
+              <a:defRPr sz="1400">
+                <a:solidFill>
+                  <a:srgbClr val="A0A0B0"/>
+                </a:solidFill>
+                <a:latin typeface="Apple SD Gothic Neo"/>
+              </a:defRPr>
+            </a:pPr>
+            <a:r>
+              <a:t>데이터가 사일로(Silo)에 갇혀 있음</a:t>
+            </a:r>
+          </a:p>
+          <a:p>
+            <a:pPr>
+              <a:spcAft>
+                <a:spcPts val="800"/>
+              </a:spcAft>
+              <a:defRPr sz="1400">
+                <a:solidFill>
+                  <a:srgbClr val="A0A0B0"/>
+                </a:solidFill>
+                <a:latin typeface="Apple SD Gothic Neo"/>
+              </a:defRPr>
+            </a:pPr>
+            <a:r>
+              <a:t>수동 데이터 추출/입력에 의존</a:t>
             </a:r>
           </a:p>
         </p:txBody>
@@ -21269,8 +22653,8 @@
         </p:nvSpPr>
         <p:spPr>
           <a:xfrm>
-            <a:off x="1828800" y="5440680"/>
-            <a:ext cx="8229600" cy="731520"/>
+            <a:off x="6400800" y="4114800"/>
+            <a:ext cx="5303520" cy="1828800"/>
           </a:xfrm>
           <a:prstGeom prst="roundRect">
             <a:avLst/>
@@ -21307,57 +22691,14 @@
       </p:sp>
       <p:sp>
         <p:nvSpPr>
-          <p:cNvPr id="29" name="Rectangle 28"/>
-          <p:cNvSpPr/>
-          <p:nvPr/>
-        </p:nvSpPr>
-        <p:spPr>
-          <a:xfrm>
-            <a:off x="1828800" y="5440680"/>
-            <a:ext cx="91440" cy="731520"/>
-          </a:xfrm>
-          <a:prstGeom prst="rect">
-            <a:avLst/>
-          </a:prstGeom>
-          <a:solidFill>
-            <a:srgbClr val="EA4B71"/>
-          </a:solidFill>
-          <a:ln>
-            <a:noFill/>
-          </a:ln>
-        </p:spPr>
-        <p:style>
-          <a:lnRef idx="1">
-            <a:schemeClr val="accent1"/>
-          </a:lnRef>
-          <a:fillRef idx="3">
-            <a:schemeClr val="accent1"/>
-          </a:fillRef>
-          <a:effectRef idx="2">
-            <a:schemeClr val="accent1"/>
-          </a:effectRef>
-          <a:fontRef idx="minor">
-            <a:schemeClr val="lt1"/>
-          </a:fontRef>
-        </p:style>
-        <p:txBody>
-          <a:bodyPr rtlCol="0" anchor="ctr"/>
-          <a:lstStyle/>
-          <a:p>
-            <a:pPr algn="ctr"/>
-          </a:p>
-        </p:txBody>
-      </p:sp>
-      <p:sp>
-        <p:nvSpPr>
-          <p:cNvPr id="30" name="TextBox 29"/>
-          <p:cNvSpPr txBox="1"/>
-          <p:nvPr/>
-        </p:nvSpPr>
-        <p:spPr>
-          <a:xfrm>
-            <a:off x="2194560" y="5532120"/>
-            <a:ext cx="4572000" cy="457200"/>
+          <p:cNvPr id="29" name="TextBox 28"/>
+          <p:cNvSpPr txBox="1"/>
+          <p:nvPr/>
+        </p:nvSpPr>
+        <p:spPr>
+          <a:xfrm>
+            <a:off x="6675120" y="4206240"/>
+            <a:ext cx="4754880" cy="365760"/>
           </a:xfrm>
           <a:prstGeom prst="rect">
             <a:avLst/>
@@ -21373,13 +22714,84 @@
             <a:pPr algn="l">
               <a:defRPr sz="1800" b="1">
                 <a:solidFill>
+                  <a:srgbClr val="10B981"/>
+                </a:solidFill>
+                <a:latin typeface="Apple SD Gothic Neo"/>
+              </a:defRPr>
+            </a:pPr>
+            <a:r>
+              <a:t>필요 액션</a:t>
+            </a:r>
+          </a:p>
+        </p:txBody>
+      </p:sp>
+      <p:sp>
+        <p:nvSpPr>
+          <p:cNvPr id="30" name="TextBox 29"/>
+          <p:cNvSpPr txBox="1"/>
+          <p:nvPr/>
+        </p:nvSpPr>
+        <p:spPr>
+          <a:xfrm>
+            <a:off x="6675120" y="4663440"/>
+            <a:ext cx="4754880" cy="1097280"/>
+          </a:xfrm>
+          <a:prstGeom prst="rect">
+            <a:avLst/>
+          </a:prstGeom>
+          <a:noFill/>
+        </p:spPr>
+        <p:txBody>
+          <a:bodyPr wrap="square">
+            <a:spAutoFit/>
+          </a:bodyPr>
+          <a:lstStyle/>
+          <a:p>
+            <a:pPr>
+              <a:spcAft>
+                <a:spcPts val="800"/>
+              </a:spcAft>
+              <a:defRPr sz="1400">
+                <a:solidFill>
                   <a:srgbClr val="FFFFFF"/>
                 </a:solidFill>
                 <a:latin typeface="Apple SD Gothic Neo"/>
               </a:defRPr>
             </a:pPr>
             <a:r>
-              <a:t>팀으로 협업한다</a:t>
+              <a:t>주요 시스템 API 개발/개방</a:t>
+            </a:r>
+          </a:p>
+          <a:p>
+            <a:pPr>
+              <a:spcAft>
+                <a:spcPts val="800"/>
+              </a:spcAft>
+              <a:defRPr sz="1400">
+                <a:solidFill>
+                  <a:srgbClr val="FFFFFF"/>
+                </a:solidFill>
+                <a:latin typeface="Apple SD Gothic Neo"/>
+              </a:defRPr>
+            </a:pPr>
+            <a:r>
+              <a:t>API Gateway 표준화</a:t>
+            </a:r>
+          </a:p>
+          <a:p>
+            <a:pPr>
+              <a:spcAft>
+                <a:spcPts val="800"/>
+              </a:spcAft>
+              <a:defRPr sz="1400">
+                <a:solidFill>
+                  <a:srgbClr val="FFFFFF"/>
+                </a:solidFill>
+                <a:latin typeface="Apple SD Gothic Neo"/>
+              </a:defRPr>
+            </a:pPr>
+            <a:r>
+              <a:t>데이터 흐름 설계 (n8n으로 연결)</a:t>
             </a:r>
           </a:p>
         </p:txBody>
@@ -21392,44 +22804,8 @@
         </p:nvSpPr>
         <p:spPr>
           <a:xfrm>
-            <a:off x="6858000" y="5532120"/>
-            <a:ext cx="2743200" cy="457200"/>
-          </a:xfrm>
-          <a:prstGeom prst="rect">
-            <a:avLst/>
-          </a:prstGeom>
-          <a:noFill/>
-        </p:spPr>
-        <p:txBody>
-          <a:bodyPr wrap="square">
-            <a:spAutoFit/>
-          </a:bodyPr>
-          <a:lstStyle/>
-          <a:p>
-            <a:pPr algn="l">
-              <a:defRPr sz="1500" b="0">
-                <a:solidFill>
-                  <a:srgbClr val="EA4B71"/>
-                </a:solidFill>
-                <a:latin typeface="Apple SD Gothic Neo"/>
-              </a:defRPr>
-            </a:pPr>
-            <a:r>
-              <a:t>멀티 에이전트</a:t>
-            </a:r>
-          </a:p>
-        </p:txBody>
-      </p:sp>
-      <p:sp>
-        <p:nvSpPr>
-          <p:cNvPr id="32" name="TextBox 31"/>
-          <p:cNvSpPr txBox="1"/>
-          <p:nvPr/>
-        </p:nvSpPr>
-        <p:spPr>
-          <a:xfrm>
-            <a:off x="457200" y="6400800"/>
-            <a:ext cx="10972800" cy="365760"/>
+            <a:off x="457200" y="6217920"/>
+            <a:ext cx="10972800" cy="457200"/>
           </a:xfrm>
           <a:prstGeom prst="rect">
             <a:avLst/>
@@ -21443,15 +22819,15 @@
           <a:lstStyle/>
           <a:p>
             <a:pPr algn="ctr">
-              <a:defRPr sz="1800" b="1">
-                <a:solidFill>
-                  <a:srgbClr val="EA4B71"/>
-                </a:solidFill>
-                <a:latin typeface="Apple SD Gothic Neo"/>
-              </a:defRPr>
-            </a:pPr>
-            <a:r>
-              <a:t>★ 이 모든 것을 시각적으로 조합하고 실행하는 플랫폼 = n8n</a:t>
+              <a:defRPr sz="2000" b="1">
+                <a:solidFill>
+                  <a:srgbClr val="00D2FF"/>
+                </a:solidFill>
+                <a:latin typeface="Apple SD Gothic Neo"/>
+              </a:defRPr>
+            </a:pPr>
+            <a:r>
+              <a:t>AI 에이전트의 성공 = API 인프라의 성숙도</a:t>
             </a:r>
           </a:p>
         </p:txBody>
@@ -21513,7 +22889,7 @@
               </a:defRPr>
             </a:pPr>
             <a:r>
-              <a:t>다음 스텝 제안</a:t>
+              <a:t>전체 흐름 요약</a:t>
             </a:r>
           </a:p>
         </p:txBody>
@@ -21526,8 +22902,8 @@
         </p:nvSpPr>
         <p:spPr>
           <a:xfrm>
-            <a:off x="457200" y="1371600"/>
-            <a:ext cx="2560320" cy="3657600"/>
+            <a:off x="1828800" y="1097280"/>
+            <a:ext cx="8229600" cy="731520"/>
           </a:xfrm>
           <a:prstGeom prst="roundRect">
             <a:avLst/>
@@ -21570,14 +22946,14 @@
         </p:nvSpPr>
         <p:spPr>
           <a:xfrm>
-            <a:off x="457200" y="1371600"/>
-            <a:ext cx="2560320" cy="73152"/>
+            <a:off x="1828800" y="1097280"/>
+            <a:ext cx="91440" cy="731520"/>
           </a:xfrm>
           <a:prstGeom prst="rect">
             <a:avLst/>
           </a:prstGeom>
           <a:solidFill>
-            <a:srgbClr val="00D2FF"/>
+            <a:srgbClr val="A0A0B0"/>
           </a:solidFill>
           <a:ln>
             <a:noFill/>
@@ -21613,30 +22989,30 @@
         </p:nvSpPr>
         <p:spPr>
           <a:xfrm>
-            <a:off x="457200" y="1645920"/>
-            <a:ext cx="2560320" cy="457200"/>
-          </a:xfrm>
-          <a:prstGeom prst="rect">
-            <a:avLst/>
-          </a:prstGeom>
-          <a:noFill/>
-        </p:spPr>
-        <p:txBody>
-          <a:bodyPr wrap="square">
-            <a:spAutoFit/>
-          </a:bodyPr>
-          <a:lstStyle/>
-          <a:p>
-            <a:pPr algn="ctr">
-              <a:defRPr sz="2400" b="1">
-                <a:solidFill>
-                  <a:srgbClr val="00D2FF"/>
-                </a:solidFill>
-                <a:latin typeface="Apple SD Gothic Neo"/>
-              </a:defRPr>
-            </a:pPr>
-            <a:r>
-              <a:t>1주차</a:t>
+            <a:off x="2194560" y="1188720"/>
+            <a:ext cx="4572000" cy="457200"/>
+          </a:xfrm>
+          <a:prstGeom prst="rect">
+            <a:avLst/>
+          </a:prstGeom>
+          <a:noFill/>
+        </p:spPr>
+        <p:txBody>
+          <a:bodyPr wrap="square">
+            <a:spAutoFit/>
+          </a:bodyPr>
+          <a:lstStyle/>
+          <a:p>
+            <a:pPr algn="l">
+              <a:defRPr sz="1800" b="1">
+                <a:solidFill>
+                  <a:srgbClr val="FFFFFF"/>
+                </a:solidFill>
+                <a:latin typeface="Apple SD Gothic Neo"/>
+              </a:defRPr>
+            </a:pPr>
+            <a:r>
+              <a:t>모델이 똑똑해졌다</a:t>
             </a:r>
           </a:p>
         </p:txBody>
@@ -21649,34 +23025,30 @@
         </p:nvSpPr>
         <p:spPr>
           <a:xfrm>
-            <a:off x="640080" y="2286000"/>
-            <a:ext cx="2194560" cy="1371600"/>
-          </a:xfrm>
-          <a:prstGeom prst="rect">
-            <a:avLst/>
-          </a:prstGeom>
-          <a:noFill/>
-        </p:spPr>
-        <p:txBody>
-          <a:bodyPr wrap="square">
-            <a:spAutoFit/>
-          </a:bodyPr>
-          <a:lstStyle/>
-          <a:p>
-            <a:pPr algn="ctr">
+            <a:off x="6858000" y="1188720"/>
+            <a:ext cx="2743200" cy="457200"/>
+          </a:xfrm>
+          <a:prstGeom prst="rect">
+            <a:avLst/>
+          </a:prstGeom>
+          <a:noFill/>
+        </p:spPr>
+        <p:txBody>
+          <a:bodyPr wrap="square">
+            <a:spAutoFit/>
+          </a:bodyPr>
+          <a:lstStyle/>
+          <a:p>
+            <a:pPr algn="l">
               <a:defRPr sz="1500" b="0">
                 <a:solidFill>
-                  <a:srgbClr val="FFFFFF"/>
-                </a:solidFill>
-                <a:latin typeface="Apple SD Gothic Neo"/>
-              </a:defRPr>
-            </a:pPr>
-            <a:r>
-              <a:t>n8n Self-hosted 설치</a:t>
-            </a:r>
-            <a:br/>
-            <a:r>
-              <a:t>기본 워크플로우 체험</a:t>
+                  <a:srgbClr val="A0A0B0"/>
+                </a:solidFill>
+                <a:latin typeface="Apple SD Gothic Neo"/>
+              </a:defRPr>
+            </a:pPr>
+            <a:r>
+              <a:t>LLM 경쟁</a:t>
             </a:r>
           </a:p>
         </p:txBody>
@@ -21689,8 +23061,8 @@
         </p:nvSpPr>
         <p:spPr>
           <a:xfrm>
-            <a:off x="457200" y="4114800"/>
-            <a:ext cx="2560320" cy="457200"/>
+            <a:off x="5760720" y="1645920"/>
+            <a:ext cx="457200" cy="365760"/>
           </a:xfrm>
           <a:prstGeom prst="rect">
             <a:avLst/>
@@ -21712,7 +23084,7 @@
               </a:defRPr>
             </a:pPr>
             <a:r>
-              <a:t>도구 익히기</a:t>
+              <a:t>↓</a:t>
             </a:r>
           </a:p>
         </p:txBody>
@@ -21725,8 +23097,8 @@
         </p:nvSpPr>
         <p:spPr>
           <a:xfrm>
-            <a:off x="3383280" y="1371600"/>
-            <a:ext cx="2560320" cy="3657600"/>
+            <a:off x="1828800" y="1965960"/>
+            <a:ext cx="8229600" cy="731520"/>
           </a:xfrm>
           <a:prstGeom prst="roundRect">
             <a:avLst/>
@@ -21769,14 +23141,14 @@
         </p:nvSpPr>
         <p:spPr>
           <a:xfrm>
-            <a:off x="3383280" y="1371600"/>
-            <a:ext cx="2560320" cy="73152"/>
+            <a:off x="1828800" y="1965960"/>
+            <a:ext cx="91440" cy="731520"/>
           </a:xfrm>
           <a:prstGeom prst="rect">
             <a:avLst/>
           </a:prstGeom>
           <a:solidFill>
-            <a:srgbClr val="7C3AED"/>
+            <a:srgbClr val="00D2FF"/>
           </a:solidFill>
           <a:ln>
             <a:noFill/>
@@ -21812,30 +23184,30 @@
         </p:nvSpPr>
         <p:spPr>
           <a:xfrm>
-            <a:off x="3383280" y="1645920"/>
-            <a:ext cx="2560320" cy="457200"/>
-          </a:xfrm>
-          <a:prstGeom prst="rect">
-            <a:avLst/>
-          </a:prstGeom>
-          <a:noFill/>
-        </p:spPr>
-        <p:txBody>
-          <a:bodyPr wrap="square">
-            <a:spAutoFit/>
-          </a:bodyPr>
-          <a:lstStyle/>
-          <a:p>
-            <a:pPr algn="ctr">
-              <a:defRPr sz="2400" b="1">
-                <a:solidFill>
-                  <a:srgbClr val="7C3AED"/>
-                </a:solidFill>
-                <a:latin typeface="Apple SD Gothic Neo"/>
-              </a:defRPr>
-            </a:pPr>
-            <a:r>
-              <a:t>2주차</a:t>
+            <a:off x="2194560" y="2057400"/>
+            <a:ext cx="4572000" cy="457200"/>
+          </a:xfrm>
+          <a:prstGeom prst="rect">
+            <a:avLst/>
+          </a:prstGeom>
+          <a:noFill/>
+        </p:spPr>
+        <p:txBody>
+          <a:bodyPr wrap="square">
+            <a:spAutoFit/>
+          </a:bodyPr>
+          <a:lstStyle/>
+          <a:p>
+            <a:pPr algn="l">
+              <a:defRPr sz="1800" b="1">
+                <a:solidFill>
+                  <a:srgbClr val="FFFFFF"/>
+                </a:solidFill>
+                <a:latin typeface="Apple SD Gothic Neo"/>
+              </a:defRPr>
+            </a:pPr>
+            <a:r>
+              <a:t>도구를 쓸 수 있게 됐다</a:t>
             </a:r>
           </a:p>
         </p:txBody>
@@ -21848,34 +23220,30 @@
         </p:nvSpPr>
         <p:spPr>
           <a:xfrm>
-            <a:off x="3566160" y="2286000"/>
-            <a:ext cx="2194560" cy="1371600"/>
-          </a:xfrm>
-          <a:prstGeom prst="rect">
-            <a:avLst/>
-          </a:prstGeom>
-          <a:noFill/>
-        </p:spPr>
-        <p:txBody>
-          <a:bodyPr wrap="square">
-            <a:spAutoFit/>
-          </a:bodyPr>
-          <a:lstStyle/>
-          <a:p>
-            <a:pPr algn="ctr">
+            <a:off x="6858000" y="2057400"/>
+            <a:ext cx="2743200" cy="457200"/>
+          </a:xfrm>
+          <a:prstGeom prst="rect">
+            <a:avLst/>
+          </a:prstGeom>
+          <a:noFill/>
+        </p:spPr>
+        <p:txBody>
+          <a:bodyPr wrap="square">
+            <a:spAutoFit/>
+          </a:bodyPr>
+          <a:lstStyle/>
+          <a:p>
+            <a:pPr algn="l">
               <a:defRPr sz="1500" b="0">
                 <a:solidFill>
-                  <a:srgbClr val="FFFFFF"/>
-                </a:solidFill>
-                <a:latin typeface="Apple SD Gothic Neo"/>
-              </a:defRPr>
-            </a:pPr>
-            <a:r>
-              <a:t>AI Agent 노드로</a:t>
-            </a:r>
-            <a:br/>
-            <a:r>
-              <a:t>간단한 자동화 구축</a:t>
+                  <a:srgbClr val="00D2FF"/>
+                </a:solidFill>
+                <a:latin typeface="Apple SD Gothic Neo"/>
+              </a:defRPr>
+            </a:pPr>
+            <a:r>
+              <a:t>MCP, 네이티브 AI</a:t>
             </a:r>
           </a:p>
         </p:txBody>
@@ -21888,8 +23256,8 @@
         </p:nvSpPr>
         <p:spPr>
           <a:xfrm>
-            <a:off x="3383280" y="4114800"/>
-            <a:ext cx="2560320" cy="457200"/>
+            <a:off x="5760720" y="2514600"/>
+            <a:ext cx="457200" cy="365760"/>
           </a:xfrm>
           <a:prstGeom prst="rect">
             <a:avLst/>
@@ -21911,7 +23279,7 @@
               </a:defRPr>
             </a:pPr>
             <a:r>
-              <a:t>가능성 검증</a:t>
+              <a:t>↓</a:t>
             </a:r>
           </a:p>
         </p:txBody>
@@ -21924,8 +23292,8 @@
         </p:nvSpPr>
         <p:spPr>
           <a:xfrm>
-            <a:off x="6309360" y="1371600"/>
-            <a:ext cx="2560320" cy="3657600"/>
+            <a:off x="1828800" y="2834639"/>
+            <a:ext cx="8229600" cy="731520"/>
           </a:xfrm>
           <a:prstGeom prst="roundRect">
             <a:avLst/>
@@ -21968,14 +23336,14 @@
         </p:nvSpPr>
         <p:spPr>
           <a:xfrm>
-            <a:off x="6309360" y="1371600"/>
-            <a:ext cx="2560320" cy="73152"/>
+            <a:off x="1828800" y="2834639"/>
+            <a:ext cx="91440" cy="731520"/>
           </a:xfrm>
           <a:prstGeom prst="rect">
             <a:avLst/>
           </a:prstGeom>
           <a:solidFill>
-            <a:srgbClr val="10B981"/>
+            <a:srgbClr val="7C3AED"/>
           </a:solidFill>
           <a:ln>
             <a:noFill/>
@@ -22011,30 +23379,30 @@
         </p:nvSpPr>
         <p:spPr>
           <a:xfrm>
-            <a:off x="6309360" y="1645920"/>
-            <a:ext cx="2560320" cy="457200"/>
-          </a:xfrm>
-          <a:prstGeom prst="rect">
-            <a:avLst/>
-          </a:prstGeom>
-          <a:noFill/>
-        </p:spPr>
-        <p:txBody>
-          <a:bodyPr wrap="square">
-            <a:spAutoFit/>
-          </a:bodyPr>
-          <a:lstStyle/>
-          <a:p>
-            <a:pPr algn="ctr">
-              <a:defRPr sz="2400" b="1">
-                <a:solidFill>
-                  <a:srgbClr val="10B981"/>
-                </a:solidFill>
-                <a:latin typeface="Apple SD Gothic Neo"/>
-              </a:defRPr>
-            </a:pPr>
-            <a:r>
-              <a:t>3주차</a:t>
+            <a:off x="2194560" y="2926079"/>
+            <a:ext cx="4572000" cy="457200"/>
+          </a:xfrm>
+          <a:prstGeom prst="rect">
+            <a:avLst/>
+          </a:prstGeom>
+          <a:noFill/>
+        </p:spPr>
+        <p:txBody>
+          <a:bodyPr wrap="square">
+            <a:spAutoFit/>
+          </a:bodyPr>
+          <a:lstStyle/>
+          <a:p>
+            <a:pPr algn="l">
+              <a:defRPr sz="1800" b="1">
+                <a:solidFill>
+                  <a:srgbClr val="FFFFFF"/>
+                </a:solidFill>
+                <a:latin typeface="Apple SD Gothic Neo"/>
+              </a:defRPr>
+            </a:pPr>
+            <a:r>
+              <a:t>코드도 직접 쓴다</a:t>
             </a:r>
           </a:p>
         </p:txBody>
@@ -22047,34 +23415,30 @@
         </p:nvSpPr>
         <p:spPr>
           <a:xfrm>
-            <a:off x="6492240" y="2286000"/>
-            <a:ext cx="2194560" cy="1371600"/>
-          </a:xfrm>
-          <a:prstGeom prst="rect">
-            <a:avLst/>
-          </a:prstGeom>
-          <a:noFill/>
-        </p:spPr>
-        <p:txBody>
-          <a:bodyPr wrap="square">
-            <a:spAutoFit/>
-          </a:bodyPr>
-          <a:lstStyle/>
-          <a:p>
-            <a:pPr algn="ctr">
+            <a:off x="6858000" y="2926079"/>
+            <a:ext cx="2743200" cy="457200"/>
+          </a:xfrm>
+          <a:prstGeom prst="rect">
+            <a:avLst/>
+          </a:prstGeom>
+          <a:noFill/>
+        </p:spPr>
+        <p:txBody>
+          <a:bodyPr wrap="square">
+            <a:spAutoFit/>
+          </a:bodyPr>
+          <a:lstStyle/>
+          <a:p>
+            <a:pPr algn="l">
               <a:defRPr sz="1500" b="0">
                 <a:solidFill>
-                  <a:srgbClr val="FFFFFF"/>
-                </a:solidFill>
-                <a:latin typeface="Apple SD Gothic Neo"/>
-              </a:defRPr>
-            </a:pPr>
-            <a:r>
-              <a:t>실제 업무 하나를</a:t>
-            </a:r>
-            <a:br/>
-            <a:r>
-              <a:t>에이전틱 워크플로우로 전환</a:t>
+                  <a:srgbClr val="7C3AED"/>
+                </a:solidFill>
+                <a:latin typeface="Apple SD Gothic Neo"/>
+              </a:defRPr>
+            </a:pPr>
+            <a:r>
+              <a:t>CLI, 바이브 코딩</a:t>
             </a:r>
           </a:p>
         </p:txBody>
@@ -22087,8 +23451,8 @@
         </p:nvSpPr>
         <p:spPr>
           <a:xfrm>
-            <a:off x="6309360" y="4114800"/>
-            <a:ext cx="2560320" cy="457200"/>
+            <a:off x="5760720" y="3383279"/>
+            <a:ext cx="457200" cy="365760"/>
           </a:xfrm>
           <a:prstGeom prst="rect">
             <a:avLst/>
@@ -22110,7 +23474,7 @@
               </a:defRPr>
             </a:pPr>
             <a:r>
-              <a:t>실무 적용</a:t>
+              <a:t>↓</a:t>
             </a:r>
           </a:p>
         </p:txBody>
@@ -22123,8 +23487,8 @@
         </p:nvSpPr>
         <p:spPr>
           <a:xfrm>
-            <a:off x="9235440" y="1371600"/>
-            <a:ext cx="2560320" cy="3657600"/>
+            <a:off x="1828800" y="3703320"/>
+            <a:ext cx="8229600" cy="731520"/>
           </a:xfrm>
           <a:prstGeom prst="roundRect">
             <a:avLst/>
@@ -22167,8 +23531,398 @@
         </p:nvSpPr>
         <p:spPr>
           <a:xfrm>
-            <a:off x="9235440" y="1371600"/>
-            <a:ext cx="2560320" cy="73152"/>
+            <a:off x="1828800" y="3703320"/>
+            <a:ext cx="91440" cy="731520"/>
+          </a:xfrm>
+          <a:prstGeom prst="rect">
+            <a:avLst/>
+          </a:prstGeom>
+          <a:solidFill>
+            <a:srgbClr val="10B981"/>
+          </a:solidFill>
+          <a:ln>
+            <a:noFill/>
+          </a:ln>
+        </p:spPr>
+        <p:style>
+          <a:lnRef idx="1">
+            <a:schemeClr val="accent1"/>
+          </a:lnRef>
+          <a:fillRef idx="3">
+            <a:schemeClr val="accent1"/>
+          </a:fillRef>
+          <a:effectRef idx="2">
+            <a:schemeClr val="accent1"/>
+          </a:effectRef>
+          <a:fontRef idx="minor">
+            <a:schemeClr val="lt1"/>
+          </a:fontRef>
+        </p:style>
+        <p:txBody>
+          <a:bodyPr rtlCol="0" anchor="ctr"/>
+          <a:lstStyle/>
+          <a:p>
+            <a:pPr algn="ctr"/>
+          </a:p>
+        </p:txBody>
+      </p:sp>
+      <p:sp>
+        <p:nvSpPr>
+          <p:cNvPr id="20" name="TextBox 19"/>
+          <p:cNvSpPr txBox="1"/>
+          <p:nvPr/>
+        </p:nvSpPr>
+        <p:spPr>
+          <a:xfrm>
+            <a:off x="2194560" y="3794760"/>
+            <a:ext cx="4572000" cy="457200"/>
+          </a:xfrm>
+          <a:prstGeom prst="rect">
+            <a:avLst/>
+          </a:prstGeom>
+          <a:noFill/>
+        </p:spPr>
+        <p:txBody>
+          <a:bodyPr wrap="square">
+            <a:spAutoFit/>
+          </a:bodyPr>
+          <a:lstStyle/>
+          <a:p>
+            <a:pPr algn="l">
+              <a:defRPr sz="1800" b="1">
+                <a:solidFill>
+                  <a:srgbClr val="FFFFFF"/>
+                </a:solidFill>
+                <a:latin typeface="Apple SD Gothic Neo"/>
+              </a:defRPr>
+            </a:pPr>
+            <a:r>
+              <a:t>컨텍스트를 관리한다</a:t>
+            </a:r>
+          </a:p>
+        </p:txBody>
+      </p:sp>
+      <p:sp>
+        <p:nvSpPr>
+          <p:cNvPr id="21" name="TextBox 20"/>
+          <p:cNvSpPr txBox="1"/>
+          <p:nvPr/>
+        </p:nvSpPr>
+        <p:spPr>
+          <a:xfrm>
+            <a:off x="6858000" y="3794760"/>
+            <a:ext cx="2743200" cy="457200"/>
+          </a:xfrm>
+          <a:prstGeom prst="rect">
+            <a:avLst/>
+          </a:prstGeom>
+          <a:noFill/>
+        </p:spPr>
+        <p:txBody>
+          <a:bodyPr wrap="square">
+            <a:spAutoFit/>
+          </a:bodyPr>
+          <a:lstStyle/>
+          <a:p>
+            <a:pPr algn="l">
+              <a:defRPr sz="1500" b="0">
+                <a:solidFill>
+                  <a:srgbClr val="10B981"/>
+                </a:solidFill>
+                <a:latin typeface="Apple SD Gothic Neo"/>
+              </a:defRPr>
+            </a:pPr>
+            <a:r>
+              <a:t>컨텍스트 엔지니어링</a:t>
+            </a:r>
+          </a:p>
+        </p:txBody>
+      </p:sp>
+      <p:sp>
+        <p:nvSpPr>
+          <p:cNvPr id="22" name="TextBox 21"/>
+          <p:cNvSpPr txBox="1"/>
+          <p:nvPr/>
+        </p:nvSpPr>
+        <p:spPr>
+          <a:xfrm>
+            <a:off x="5760720" y="4251960"/>
+            <a:ext cx="457200" cy="365760"/>
+          </a:xfrm>
+          <a:prstGeom prst="rect">
+            <a:avLst/>
+          </a:prstGeom>
+          <a:noFill/>
+        </p:spPr>
+        <p:txBody>
+          <a:bodyPr wrap="square">
+            <a:spAutoFit/>
+          </a:bodyPr>
+          <a:lstStyle/>
+          <a:p>
+            <a:pPr algn="ctr">
+              <a:defRPr sz="1600" b="0">
+                <a:solidFill>
+                  <a:srgbClr val="A0A0B0"/>
+                </a:solidFill>
+                <a:latin typeface="Apple SD Gothic Neo"/>
+              </a:defRPr>
+            </a:pPr>
+            <a:r>
+              <a:t>↓</a:t>
+            </a:r>
+          </a:p>
+        </p:txBody>
+      </p:sp>
+      <p:sp>
+        <p:nvSpPr>
+          <p:cNvPr id="23" name="Rounded Rectangle 22"/>
+          <p:cNvSpPr/>
+          <p:nvPr/>
+        </p:nvSpPr>
+        <p:spPr>
+          <a:xfrm>
+            <a:off x="1828800" y="4572000"/>
+            <a:ext cx="8229600" cy="731520"/>
+          </a:xfrm>
+          <a:prstGeom prst="roundRect">
+            <a:avLst/>
+          </a:prstGeom>
+          <a:solidFill>
+            <a:srgbClr val="16213E"/>
+          </a:solidFill>
+          <a:ln>
+            <a:noFill/>
+          </a:ln>
+          <a:effectLst/>
+        </p:spPr>
+        <p:style>
+          <a:lnRef idx="1">
+            <a:schemeClr val="accent1"/>
+          </a:lnRef>
+          <a:fillRef idx="3">
+            <a:schemeClr val="accent1"/>
+          </a:fillRef>
+          <a:effectRef idx="2">
+            <a:schemeClr val="accent1"/>
+          </a:effectRef>
+          <a:fontRef idx="minor">
+            <a:schemeClr val="lt1"/>
+          </a:fontRef>
+        </p:style>
+        <p:txBody>
+          <a:bodyPr rtlCol="0" anchor="ctr"/>
+          <a:lstStyle/>
+          <a:p>
+            <a:pPr algn="ctr"/>
+          </a:p>
+        </p:txBody>
+      </p:sp>
+      <p:sp>
+        <p:nvSpPr>
+          <p:cNvPr id="24" name="Rectangle 23"/>
+          <p:cNvSpPr/>
+          <p:nvPr/>
+        </p:nvSpPr>
+        <p:spPr>
+          <a:xfrm>
+            <a:off x="1828800" y="4572000"/>
+            <a:ext cx="91440" cy="731520"/>
+          </a:xfrm>
+          <a:prstGeom prst="rect">
+            <a:avLst/>
+          </a:prstGeom>
+          <a:solidFill>
+            <a:srgbClr val="FF6B35"/>
+          </a:solidFill>
+          <a:ln>
+            <a:noFill/>
+          </a:ln>
+        </p:spPr>
+        <p:style>
+          <a:lnRef idx="1">
+            <a:schemeClr val="accent1"/>
+          </a:lnRef>
+          <a:fillRef idx="3">
+            <a:schemeClr val="accent1"/>
+          </a:fillRef>
+          <a:effectRef idx="2">
+            <a:schemeClr val="accent1"/>
+          </a:effectRef>
+          <a:fontRef idx="minor">
+            <a:schemeClr val="lt1"/>
+          </a:fontRef>
+        </p:style>
+        <p:txBody>
+          <a:bodyPr rtlCol="0" anchor="ctr"/>
+          <a:lstStyle/>
+          <a:p>
+            <a:pPr algn="ctr"/>
+          </a:p>
+        </p:txBody>
+      </p:sp>
+      <p:sp>
+        <p:nvSpPr>
+          <p:cNvPr id="25" name="TextBox 24"/>
+          <p:cNvSpPr txBox="1"/>
+          <p:nvPr/>
+        </p:nvSpPr>
+        <p:spPr>
+          <a:xfrm>
+            <a:off x="2194560" y="4663440"/>
+            <a:ext cx="4572000" cy="457200"/>
+          </a:xfrm>
+          <a:prstGeom prst="rect">
+            <a:avLst/>
+          </a:prstGeom>
+          <a:noFill/>
+        </p:spPr>
+        <p:txBody>
+          <a:bodyPr wrap="square">
+            <a:spAutoFit/>
+          </a:bodyPr>
+          <a:lstStyle/>
+          <a:p>
+            <a:pPr algn="l">
+              <a:defRPr sz="1800" b="1">
+                <a:solidFill>
+                  <a:srgbClr val="FFFFFF"/>
+                </a:solidFill>
+                <a:latin typeface="Apple SD Gothic Neo"/>
+              </a:defRPr>
+            </a:pPr>
+            <a:r>
+              <a:t>혼자서 일을 한다</a:t>
+            </a:r>
+          </a:p>
+        </p:txBody>
+      </p:sp>
+      <p:sp>
+        <p:nvSpPr>
+          <p:cNvPr id="26" name="TextBox 25"/>
+          <p:cNvSpPr txBox="1"/>
+          <p:nvPr/>
+        </p:nvSpPr>
+        <p:spPr>
+          <a:xfrm>
+            <a:off x="6858000" y="4663440"/>
+            <a:ext cx="2743200" cy="457200"/>
+          </a:xfrm>
+          <a:prstGeom prst="rect">
+            <a:avLst/>
+          </a:prstGeom>
+          <a:noFill/>
+        </p:spPr>
+        <p:txBody>
+          <a:bodyPr wrap="square">
+            <a:spAutoFit/>
+          </a:bodyPr>
+          <a:lstStyle/>
+          <a:p>
+            <a:pPr algn="l">
+              <a:defRPr sz="1500" b="0">
+                <a:solidFill>
+                  <a:srgbClr val="FF6B35"/>
+                </a:solidFill>
+                <a:latin typeface="Apple SD Gothic Neo"/>
+              </a:defRPr>
+            </a:pPr>
+            <a:r>
+              <a:t>에이전틱 AI</a:t>
+            </a:r>
+          </a:p>
+        </p:txBody>
+      </p:sp>
+      <p:sp>
+        <p:nvSpPr>
+          <p:cNvPr id="27" name="TextBox 26"/>
+          <p:cNvSpPr txBox="1"/>
+          <p:nvPr/>
+        </p:nvSpPr>
+        <p:spPr>
+          <a:xfrm>
+            <a:off x="5760720" y="5120640"/>
+            <a:ext cx="457200" cy="365760"/>
+          </a:xfrm>
+          <a:prstGeom prst="rect">
+            <a:avLst/>
+          </a:prstGeom>
+          <a:noFill/>
+        </p:spPr>
+        <p:txBody>
+          <a:bodyPr wrap="square">
+            <a:spAutoFit/>
+          </a:bodyPr>
+          <a:lstStyle/>
+          <a:p>
+            <a:pPr algn="ctr">
+              <a:defRPr sz="1600" b="0">
+                <a:solidFill>
+                  <a:srgbClr val="A0A0B0"/>
+                </a:solidFill>
+                <a:latin typeface="Apple SD Gothic Neo"/>
+              </a:defRPr>
+            </a:pPr>
+            <a:r>
+              <a:t>↓</a:t>
+            </a:r>
+          </a:p>
+        </p:txBody>
+      </p:sp>
+      <p:sp>
+        <p:nvSpPr>
+          <p:cNvPr id="28" name="Rounded Rectangle 27"/>
+          <p:cNvSpPr/>
+          <p:nvPr/>
+        </p:nvSpPr>
+        <p:spPr>
+          <a:xfrm>
+            <a:off x="1828800" y="5440680"/>
+            <a:ext cx="8229600" cy="731520"/>
+          </a:xfrm>
+          <a:prstGeom prst="roundRect">
+            <a:avLst/>
+          </a:prstGeom>
+          <a:solidFill>
+            <a:srgbClr val="16213E"/>
+          </a:solidFill>
+          <a:ln>
+            <a:noFill/>
+          </a:ln>
+          <a:effectLst/>
+        </p:spPr>
+        <p:style>
+          <a:lnRef idx="1">
+            <a:schemeClr val="accent1"/>
+          </a:lnRef>
+          <a:fillRef idx="3">
+            <a:schemeClr val="accent1"/>
+          </a:fillRef>
+          <a:effectRef idx="2">
+            <a:schemeClr val="accent1"/>
+          </a:effectRef>
+          <a:fontRef idx="minor">
+            <a:schemeClr val="lt1"/>
+          </a:fontRef>
+        </p:style>
+        <p:txBody>
+          <a:bodyPr rtlCol="0" anchor="ctr"/>
+          <a:lstStyle/>
+          <a:p>
+            <a:pPr algn="ctr"/>
+          </a:p>
+        </p:txBody>
+      </p:sp>
+      <p:sp>
+        <p:nvSpPr>
+          <p:cNvPr id="29" name="Rectangle 28"/>
+          <p:cNvSpPr/>
+          <p:nvPr/>
+        </p:nvSpPr>
+        <p:spPr>
+          <a:xfrm>
+            <a:off x="1828800" y="5440680"/>
+            <a:ext cx="91440" cy="731520"/>
           </a:xfrm>
           <a:prstGeom prst="rect">
             <a:avLst/>
@@ -22204,14 +23958,86 @@
       </p:sp>
       <p:sp>
         <p:nvSpPr>
-          <p:cNvPr id="20" name="TextBox 19"/>
-          <p:cNvSpPr txBox="1"/>
-          <p:nvPr/>
-        </p:nvSpPr>
-        <p:spPr>
-          <a:xfrm>
-            <a:off x="9235440" y="1645920"/>
-            <a:ext cx="2560320" cy="457200"/>
+          <p:cNvPr id="30" name="TextBox 29"/>
+          <p:cNvSpPr txBox="1"/>
+          <p:nvPr/>
+        </p:nvSpPr>
+        <p:spPr>
+          <a:xfrm>
+            <a:off x="2194560" y="5532120"/>
+            <a:ext cx="4572000" cy="457200"/>
+          </a:xfrm>
+          <a:prstGeom prst="rect">
+            <a:avLst/>
+          </a:prstGeom>
+          <a:noFill/>
+        </p:spPr>
+        <p:txBody>
+          <a:bodyPr wrap="square">
+            <a:spAutoFit/>
+          </a:bodyPr>
+          <a:lstStyle/>
+          <a:p>
+            <a:pPr algn="l">
+              <a:defRPr sz="1800" b="1">
+                <a:solidFill>
+                  <a:srgbClr val="FFFFFF"/>
+                </a:solidFill>
+                <a:latin typeface="Apple SD Gothic Neo"/>
+              </a:defRPr>
+            </a:pPr>
+            <a:r>
+              <a:t>팀으로 협업한다</a:t>
+            </a:r>
+          </a:p>
+        </p:txBody>
+      </p:sp>
+      <p:sp>
+        <p:nvSpPr>
+          <p:cNvPr id="31" name="TextBox 30"/>
+          <p:cNvSpPr txBox="1"/>
+          <p:nvPr/>
+        </p:nvSpPr>
+        <p:spPr>
+          <a:xfrm>
+            <a:off x="6858000" y="5532120"/>
+            <a:ext cx="2743200" cy="457200"/>
+          </a:xfrm>
+          <a:prstGeom prst="rect">
+            <a:avLst/>
+          </a:prstGeom>
+          <a:noFill/>
+        </p:spPr>
+        <p:txBody>
+          <a:bodyPr wrap="square">
+            <a:spAutoFit/>
+          </a:bodyPr>
+          <a:lstStyle/>
+          <a:p>
+            <a:pPr algn="l">
+              <a:defRPr sz="1500" b="0">
+                <a:solidFill>
+                  <a:srgbClr val="EA4B71"/>
+                </a:solidFill>
+                <a:latin typeface="Apple SD Gothic Neo"/>
+              </a:defRPr>
+            </a:pPr>
+            <a:r>
+              <a:t>멀티 에이전트</a:t>
+            </a:r>
+          </a:p>
+        </p:txBody>
+      </p:sp>
+      <p:sp>
+        <p:nvSpPr>
+          <p:cNvPr id="32" name="TextBox 31"/>
+          <p:cNvSpPr txBox="1"/>
+          <p:nvPr/>
+        </p:nvSpPr>
+        <p:spPr>
+          <a:xfrm>
+            <a:off x="457200" y="6400800"/>
+            <a:ext cx="10972800" cy="365760"/>
           </a:xfrm>
           <a:prstGeom prst="rect">
             <a:avLst/>
@@ -22225,7 +24051,7 @@
           <a:lstStyle/>
           <a:p>
             <a:pPr algn="ctr">
-              <a:defRPr sz="2400" b="1">
+              <a:defRPr sz="1800" b="1">
                 <a:solidFill>
                   <a:srgbClr val="EA4B71"/>
                 </a:solidFill>
@@ -22233,83 +24059,7 @@
               </a:defRPr>
             </a:pPr>
             <a:r>
-              <a:t>4주차</a:t>
-            </a:r>
-          </a:p>
-        </p:txBody>
-      </p:sp>
-      <p:sp>
-        <p:nvSpPr>
-          <p:cNvPr id="21" name="TextBox 20"/>
-          <p:cNvSpPr txBox="1"/>
-          <p:nvPr/>
-        </p:nvSpPr>
-        <p:spPr>
-          <a:xfrm>
-            <a:off x="9418320" y="2286000"/>
-            <a:ext cx="2194560" cy="1371600"/>
-          </a:xfrm>
-          <a:prstGeom prst="rect">
-            <a:avLst/>
-          </a:prstGeom>
-          <a:noFill/>
-        </p:spPr>
-        <p:txBody>
-          <a:bodyPr wrap="square">
-            <a:spAutoFit/>
-          </a:bodyPr>
-          <a:lstStyle/>
-          <a:p>
-            <a:pPr algn="ctr">
-              <a:defRPr sz="1500" b="0">
-                <a:solidFill>
-                  <a:srgbClr val="FFFFFF"/>
-                </a:solidFill>
-                <a:latin typeface="Apple SD Gothic Neo"/>
-              </a:defRPr>
-            </a:pPr>
-            <a:r>
-              <a:t>팀 리뷰</a:t>
-            </a:r>
-            <a:br/>
-            <a:r>
-              <a:t>확대 적용 여부 결정</a:t>
-            </a:r>
-          </a:p>
-        </p:txBody>
-      </p:sp>
-      <p:sp>
-        <p:nvSpPr>
-          <p:cNvPr id="22" name="TextBox 21"/>
-          <p:cNvSpPr txBox="1"/>
-          <p:nvPr/>
-        </p:nvSpPr>
-        <p:spPr>
-          <a:xfrm>
-            <a:off x="9235440" y="4114800"/>
-            <a:ext cx="2560320" cy="457200"/>
-          </a:xfrm>
-          <a:prstGeom prst="rect">
-            <a:avLst/>
-          </a:prstGeom>
-          <a:noFill/>
-        </p:spPr>
-        <p:txBody>
-          <a:bodyPr wrap="square">
-            <a:spAutoFit/>
-          </a:bodyPr>
-          <a:lstStyle/>
-          <a:p>
-            <a:pPr algn="ctr">
-              <a:defRPr sz="1600" b="0">
-                <a:solidFill>
-                  <a:srgbClr val="A0A0B0"/>
-                </a:solidFill>
-                <a:latin typeface="Apple SD Gothic Neo"/>
-              </a:defRPr>
-            </a:pPr>
-            <a:r>
-              <a:t>Go / No-Go</a:t>
+              <a:t>★ 이 모든 것을 시각적으로 조합하고 실행하는 플랫폼 = n8n</a:t>
             </a:r>
           </a:p>
         </p:txBody>
@@ -22348,21 +24098,21 @@
         </p:nvSpPr>
         <p:spPr>
           <a:xfrm>
-            <a:off x="914400" y="1371600"/>
-            <a:ext cx="10058400" cy="914400"/>
-          </a:xfrm>
-          <a:prstGeom prst="rect">
-            <a:avLst/>
-          </a:prstGeom>
-          <a:noFill/>
-        </p:spPr>
-        <p:txBody>
-          <a:bodyPr wrap="square">
-            <a:spAutoFit/>
-          </a:bodyPr>
-          <a:lstStyle/>
-          <a:p>
-            <a:pPr algn="ctr">
+            <a:off x="457200" y="274320"/>
+            <a:ext cx="10972800" cy="640080"/>
+          </a:xfrm>
+          <a:prstGeom prst="rect">
+            <a:avLst/>
+          </a:prstGeom>
+          <a:noFill/>
+        </p:spPr>
+        <p:txBody>
+          <a:bodyPr wrap="square">
+            <a:spAutoFit/>
+          </a:bodyPr>
+          <a:lstStyle/>
+          <a:p>
+            <a:pPr algn="l">
               <a:defRPr sz="3200" b="1">
                 <a:solidFill>
                   <a:srgbClr val="FFFFFF"/>
@@ -22371,25 +24121,65 @@
               </a:defRPr>
             </a:pPr>
             <a:r>
-              <a:t>"에이전틱 AI의 성패는</a:t>
-            </a:r>
-            <a:br/>
-            <a:r>
-              <a:t>모델이 아니라 오케스트레이션에 달려 있다"</a:t>
-            </a:r>
-          </a:p>
-        </p:txBody>
-      </p:sp>
-      <p:sp>
-        <p:nvSpPr>
-          <p:cNvPr id="3" name="Rectangle 2"/>
+              <a:t>다음 스텝 제안</a:t>
+            </a:r>
+          </a:p>
+        </p:txBody>
+      </p:sp>
+      <p:sp>
+        <p:nvSpPr>
+          <p:cNvPr id="3" name="Rounded Rectangle 2"/>
           <p:cNvSpPr/>
           <p:nvPr/>
         </p:nvSpPr>
         <p:spPr>
           <a:xfrm>
-            <a:off x="3657600" y="3200400"/>
-            <a:ext cx="4572000" cy="25400"/>
+            <a:off x="457200" y="1371600"/>
+            <a:ext cx="2560320" cy="3657600"/>
+          </a:xfrm>
+          <a:prstGeom prst="roundRect">
+            <a:avLst/>
+          </a:prstGeom>
+          <a:solidFill>
+            <a:srgbClr val="16213E"/>
+          </a:solidFill>
+          <a:ln>
+            <a:noFill/>
+          </a:ln>
+          <a:effectLst/>
+        </p:spPr>
+        <p:style>
+          <a:lnRef idx="1">
+            <a:schemeClr val="accent1"/>
+          </a:lnRef>
+          <a:fillRef idx="3">
+            <a:schemeClr val="accent1"/>
+          </a:fillRef>
+          <a:effectRef idx="2">
+            <a:schemeClr val="accent1"/>
+          </a:effectRef>
+          <a:fontRef idx="minor">
+            <a:schemeClr val="lt1"/>
+          </a:fontRef>
+        </p:style>
+        <p:txBody>
+          <a:bodyPr rtlCol="0" anchor="ctr"/>
+          <a:lstStyle/>
+          <a:p>
+            <a:pPr algn="ctr"/>
+          </a:p>
+        </p:txBody>
+      </p:sp>
+      <p:sp>
+        <p:nvSpPr>
+          <p:cNvPr id="4" name="Rectangle 3"/>
+          <p:cNvSpPr/>
+          <p:nvPr/>
+        </p:nvSpPr>
+        <p:spPr>
+          <a:xfrm>
+            <a:off x="457200" y="1371600"/>
+            <a:ext cx="2560320" cy="73152"/>
           </a:xfrm>
           <a:prstGeom prst="rect">
             <a:avLst/>
@@ -22425,14 +24215,14 @@
       </p:sp>
       <p:sp>
         <p:nvSpPr>
-          <p:cNvPr id="4" name="TextBox 3"/>
-          <p:cNvSpPr txBox="1"/>
-          <p:nvPr/>
-        </p:nvSpPr>
-        <p:spPr>
-          <a:xfrm>
-            <a:off x="914400" y="3657600"/>
-            <a:ext cx="10058400" cy="731520"/>
+          <p:cNvPr id="5" name="TextBox 4"/>
+          <p:cNvSpPr txBox="1"/>
+          <p:nvPr/>
+        </p:nvSpPr>
+        <p:spPr>
+          <a:xfrm>
+            <a:off x="457200" y="1645920"/>
+            <a:ext cx="2560320" cy="457200"/>
           </a:xfrm>
           <a:prstGeom prst="rect">
             <a:avLst/>
@@ -22446,7 +24236,83 @@
           <a:lstStyle/>
           <a:p>
             <a:pPr algn="ctr">
-              <a:defRPr sz="2200" b="0">
+              <a:defRPr sz="2400" b="1">
+                <a:solidFill>
+                  <a:srgbClr val="00D2FF"/>
+                </a:solidFill>
+                <a:latin typeface="Apple SD Gothic Neo"/>
+              </a:defRPr>
+            </a:pPr>
+            <a:r>
+              <a:t>1주차</a:t>
+            </a:r>
+          </a:p>
+        </p:txBody>
+      </p:sp>
+      <p:sp>
+        <p:nvSpPr>
+          <p:cNvPr id="6" name="TextBox 5"/>
+          <p:cNvSpPr txBox="1"/>
+          <p:nvPr/>
+        </p:nvSpPr>
+        <p:spPr>
+          <a:xfrm>
+            <a:off x="640080" y="2286000"/>
+            <a:ext cx="2194560" cy="1371600"/>
+          </a:xfrm>
+          <a:prstGeom prst="rect">
+            <a:avLst/>
+          </a:prstGeom>
+          <a:noFill/>
+        </p:spPr>
+        <p:txBody>
+          <a:bodyPr wrap="square">
+            <a:spAutoFit/>
+          </a:bodyPr>
+          <a:lstStyle/>
+          <a:p>
+            <a:pPr algn="ctr">
+              <a:defRPr sz="1500" b="0">
+                <a:solidFill>
+                  <a:srgbClr val="FFFFFF"/>
+                </a:solidFill>
+                <a:latin typeface="Apple SD Gothic Neo"/>
+              </a:defRPr>
+            </a:pPr>
+            <a:r>
+              <a:t>n8n Self-hosted 설치</a:t>
+            </a:r>
+            <a:br/>
+            <a:r>
+              <a:t>기본 워크플로우 체험</a:t>
+            </a:r>
+          </a:p>
+        </p:txBody>
+      </p:sp>
+      <p:sp>
+        <p:nvSpPr>
+          <p:cNvPr id="7" name="TextBox 6"/>
+          <p:cNvSpPr txBox="1"/>
+          <p:nvPr/>
+        </p:nvSpPr>
+        <p:spPr>
+          <a:xfrm>
+            <a:off x="457200" y="4114800"/>
+            <a:ext cx="2560320" cy="457200"/>
+          </a:xfrm>
+          <a:prstGeom prst="rect">
+            <a:avLst/>
+          </a:prstGeom>
+          <a:noFill/>
+        </p:spPr>
+        <p:txBody>
+          <a:bodyPr wrap="square">
+            <a:spAutoFit/>
+          </a:bodyPr>
+          <a:lstStyle/>
+          <a:p>
+            <a:pPr algn="ctr">
+              <a:defRPr sz="1600" b="0">
                 <a:solidFill>
                   <a:srgbClr val="A0A0B0"/>
                 </a:solidFill>
@@ -22454,25 +24320,184 @@
               </a:defRPr>
             </a:pPr>
             <a:r>
-              <a:t>성공할지 실패할지는 아직 모른다.</a:t>
+              <a:t>도구 익히기</a:t>
+            </a:r>
+          </a:p>
+        </p:txBody>
+      </p:sp>
+      <p:sp>
+        <p:nvSpPr>
+          <p:cNvPr id="8" name="Rounded Rectangle 7"/>
+          <p:cNvSpPr/>
+          <p:nvPr/>
+        </p:nvSpPr>
+        <p:spPr>
+          <a:xfrm>
+            <a:off x="3383280" y="1371600"/>
+            <a:ext cx="2560320" cy="3657600"/>
+          </a:xfrm>
+          <a:prstGeom prst="roundRect">
+            <a:avLst/>
+          </a:prstGeom>
+          <a:solidFill>
+            <a:srgbClr val="16213E"/>
+          </a:solidFill>
+          <a:ln>
+            <a:noFill/>
+          </a:ln>
+          <a:effectLst/>
+        </p:spPr>
+        <p:style>
+          <a:lnRef idx="1">
+            <a:schemeClr val="accent1"/>
+          </a:lnRef>
+          <a:fillRef idx="3">
+            <a:schemeClr val="accent1"/>
+          </a:fillRef>
+          <a:effectRef idx="2">
+            <a:schemeClr val="accent1"/>
+          </a:effectRef>
+          <a:fontRef idx="minor">
+            <a:schemeClr val="lt1"/>
+          </a:fontRef>
+        </p:style>
+        <p:txBody>
+          <a:bodyPr rtlCol="0" anchor="ctr"/>
+          <a:lstStyle/>
+          <a:p>
+            <a:pPr algn="ctr"/>
+          </a:p>
+        </p:txBody>
+      </p:sp>
+      <p:sp>
+        <p:nvSpPr>
+          <p:cNvPr id="9" name="Rectangle 8"/>
+          <p:cNvSpPr/>
+          <p:nvPr/>
+        </p:nvSpPr>
+        <p:spPr>
+          <a:xfrm>
+            <a:off x="3383280" y="1371600"/>
+            <a:ext cx="2560320" cy="73152"/>
+          </a:xfrm>
+          <a:prstGeom prst="rect">
+            <a:avLst/>
+          </a:prstGeom>
+          <a:solidFill>
+            <a:srgbClr val="7C3AED"/>
+          </a:solidFill>
+          <a:ln>
+            <a:noFill/>
+          </a:ln>
+        </p:spPr>
+        <p:style>
+          <a:lnRef idx="1">
+            <a:schemeClr val="accent1"/>
+          </a:lnRef>
+          <a:fillRef idx="3">
+            <a:schemeClr val="accent1"/>
+          </a:fillRef>
+          <a:effectRef idx="2">
+            <a:schemeClr val="accent1"/>
+          </a:effectRef>
+          <a:fontRef idx="minor">
+            <a:schemeClr val="lt1"/>
+          </a:fontRef>
+        </p:style>
+        <p:txBody>
+          <a:bodyPr rtlCol="0" anchor="ctr"/>
+          <a:lstStyle/>
+          <a:p>
+            <a:pPr algn="ctr"/>
+          </a:p>
+        </p:txBody>
+      </p:sp>
+      <p:sp>
+        <p:nvSpPr>
+          <p:cNvPr id="10" name="TextBox 9"/>
+          <p:cNvSpPr txBox="1"/>
+          <p:nvPr/>
+        </p:nvSpPr>
+        <p:spPr>
+          <a:xfrm>
+            <a:off x="3383280" y="1645920"/>
+            <a:ext cx="2560320" cy="457200"/>
+          </a:xfrm>
+          <a:prstGeom prst="rect">
+            <a:avLst/>
+          </a:prstGeom>
+          <a:noFill/>
+        </p:spPr>
+        <p:txBody>
+          <a:bodyPr wrap="square">
+            <a:spAutoFit/>
+          </a:bodyPr>
+          <a:lstStyle/>
+          <a:p>
+            <a:pPr algn="ctr">
+              <a:defRPr sz="2400" b="1">
+                <a:solidFill>
+                  <a:srgbClr val="7C3AED"/>
+                </a:solidFill>
+                <a:latin typeface="Apple SD Gothic Neo"/>
+              </a:defRPr>
+            </a:pPr>
+            <a:r>
+              <a:t>2주차</a:t>
+            </a:r>
+          </a:p>
+        </p:txBody>
+      </p:sp>
+      <p:sp>
+        <p:nvSpPr>
+          <p:cNvPr id="11" name="TextBox 10"/>
+          <p:cNvSpPr txBox="1"/>
+          <p:nvPr/>
+        </p:nvSpPr>
+        <p:spPr>
+          <a:xfrm>
+            <a:off x="3566160" y="2286000"/>
+            <a:ext cx="2194560" cy="1371600"/>
+          </a:xfrm>
+          <a:prstGeom prst="rect">
+            <a:avLst/>
+          </a:prstGeom>
+          <a:noFill/>
+        </p:spPr>
+        <p:txBody>
+          <a:bodyPr wrap="square">
+            <a:spAutoFit/>
+          </a:bodyPr>
+          <a:lstStyle/>
+          <a:p>
+            <a:pPr algn="ctr">
+              <a:defRPr sz="1500" b="0">
+                <a:solidFill>
+                  <a:srgbClr val="FFFFFF"/>
+                </a:solidFill>
+                <a:latin typeface="Apple SD Gothic Neo"/>
+              </a:defRPr>
+            </a:pPr>
+            <a:r>
+              <a:t>AI Agent 노드로</a:t>
             </a:r>
             <a:br/>
             <a:r>
-              <a:t>하지만 해보지 않으면 영원히 모른다.</a:t>
-            </a:r>
-          </a:p>
-        </p:txBody>
-      </p:sp>
-      <p:sp>
-        <p:nvSpPr>
-          <p:cNvPr id="5" name="TextBox 4"/>
-          <p:cNvSpPr txBox="1"/>
-          <p:nvPr/>
-        </p:nvSpPr>
-        <p:spPr>
-          <a:xfrm>
-            <a:off x="914400" y="5029200"/>
-            <a:ext cx="10058400" cy="457200"/>
+              <a:t>간단한 자동화 구축</a:t>
+            </a:r>
+          </a:p>
+        </p:txBody>
+      </p:sp>
+      <p:sp>
+        <p:nvSpPr>
+          <p:cNvPr id="12" name="TextBox 11"/>
+          <p:cNvSpPr txBox="1"/>
+          <p:nvPr/>
+        </p:nvSpPr>
+        <p:spPr>
+          <a:xfrm>
+            <a:off x="3383280" y="4114800"/>
+            <a:ext cx="2560320" cy="457200"/>
           </a:xfrm>
           <a:prstGeom prst="rect">
             <a:avLst/>
@@ -22486,7 +24511,329 @@
           <a:lstStyle/>
           <a:p>
             <a:pPr algn="ctr">
-              <a:defRPr sz="2000" b="1">
+              <a:defRPr sz="1600" b="0">
+                <a:solidFill>
+                  <a:srgbClr val="A0A0B0"/>
+                </a:solidFill>
+                <a:latin typeface="Apple SD Gothic Neo"/>
+              </a:defRPr>
+            </a:pPr>
+            <a:r>
+              <a:t>가능성 검증</a:t>
+            </a:r>
+          </a:p>
+        </p:txBody>
+      </p:sp>
+      <p:sp>
+        <p:nvSpPr>
+          <p:cNvPr id="13" name="Rounded Rectangle 12"/>
+          <p:cNvSpPr/>
+          <p:nvPr/>
+        </p:nvSpPr>
+        <p:spPr>
+          <a:xfrm>
+            <a:off x="6309360" y="1371600"/>
+            <a:ext cx="2560320" cy="3657600"/>
+          </a:xfrm>
+          <a:prstGeom prst="roundRect">
+            <a:avLst/>
+          </a:prstGeom>
+          <a:solidFill>
+            <a:srgbClr val="16213E"/>
+          </a:solidFill>
+          <a:ln>
+            <a:noFill/>
+          </a:ln>
+          <a:effectLst/>
+        </p:spPr>
+        <p:style>
+          <a:lnRef idx="1">
+            <a:schemeClr val="accent1"/>
+          </a:lnRef>
+          <a:fillRef idx="3">
+            <a:schemeClr val="accent1"/>
+          </a:fillRef>
+          <a:effectRef idx="2">
+            <a:schemeClr val="accent1"/>
+          </a:effectRef>
+          <a:fontRef idx="minor">
+            <a:schemeClr val="lt1"/>
+          </a:fontRef>
+        </p:style>
+        <p:txBody>
+          <a:bodyPr rtlCol="0" anchor="ctr"/>
+          <a:lstStyle/>
+          <a:p>
+            <a:pPr algn="ctr"/>
+          </a:p>
+        </p:txBody>
+      </p:sp>
+      <p:sp>
+        <p:nvSpPr>
+          <p:cNvPr id="14" name="Rectangle 13"/>
+          <p:cNvSpPr/>
+          <p:nvPr/>
+        </p:nvSpPr>
+        <p:spPr>
+          <a:xfrm>
+            <a:off x="6309360" y="1371600"/>
+            <a:ext cx="2560320" cy="73152"/>
+          </a:xfrm>
+          <a:prstGeom prst="rect">
+            <a:avLst/>
+          </a:prstGeom>
+          <a:solidFill>
+            <a:srgbClr val="10B981"/>
+          </a:solidFill>
+          <a:ln>
+            <a:noFill/>
+          </a:ln>
+        </p:spPr>
+        <p:style>
+          <a:lnRef idx="1">
+            <a:schemeClr val="accent1"/>
+          </a:lnRef>
+          <a:fillRef idx="3">
+            <a:schemeClr val="accent1"/>
+          </a:fillRef>
+          <a:effectRef idx="2">
+            <a:schemeClr val="accent1"/>
+          </a:effectRef>
+          <a:fontRef idx="minor">
+            <a:schemeClr val="lt1"/>
+          </a:fontRef>
+        </p:style>
+        <p:txBody>
+          <a:bodyPr rtlCol="0" anchor="ctr"/>
+          <a:lstStyle/>
+          <a:p>
+            <a:pPr algn="ctr"/>
+          </a:p>
+        </p:txBody>
+      </p:sp>
+      <p:sp>
+        <p:nvSpPr>
+          <p:cNvPr id="15" name="TextBox 14"/>
+          <p:cNvSpPr txBox="1"/>
+          <p:nvPr/>
+        </p:nvSpPr>
+        <p:spPr>
+          <a:xfrm>
+            <a:off x="6309360" y="1645920"/>
+            <a:ext cx="2560320" cy="457200"/>
+          </a:xfrm>
+          <a:prstGeom prst="rect">
+            <a:avLst/>
+          </a:prstGeom>
+          <a:noFill/>
+        </p:spPr>
+        <p:txBody>
+          <a:bodyPr wrap="square">
+            <a:spAutoFit/>
+          </a:bodyPr>
+          <a:lstStyle/>
+          <a:p>
+            <a:pPr algn="ctr">
+              <a:defRPr sz="2400" b="1">
+                <a:solidFill>
+                  <a:srgbClr val="10B981"/>
+                </a:solidFill>
+                <a:latin typeface="Apple SD Gothic Neo"/>
+              </a:defRPr>
+            </a:pPr>
+            <a:r>
+              <a:t>3주차</a:t>
+            </a:r>
+          </a:p>
+        </p:txBody>
+      </p:sp>
+      <p:sp>
+        <p:nvSpPr>
+          <p:cNvPr id="16" name="TextBox 15"/>
+          <p:cNvSpPr txBox="1"/>
+          <p:nvPr/>
+        </p:nvSpPr>
+        <p:spPr>
+          <a:xfrm>
+            <a:off x="6492240" y="2286000"/>
+            <a:ext cx="2194560" cy="1371600"/>
+          </a:xfrm>
+          <a:prstGeom prst="rect">
+            <a:avLst/>
+          </a:prstGeom>
+          <a:noFill/>
+        </p:spPr>
+        <p:txBody>
+          <a:bodyPr wrap="square">
+            <a:spAutoFit/>
+          </a:bodyPr>
+          <a:lstStyle/>
+          <a:p>
+            <a:pPr algn="ctr">
+              <a:defRPr sz="1500" b="0">
+                <a:solidFill>
+                  <a:srgbClr val="FFFFFF"/>
+                </a:solidFill>
+                <a:latin typeface="Apple SD Gothic Neo"/>
+              </a:defRPr>
+            </a:pPr>
+            <a:r>
+              <a:t>실제 업무 하나를</a:t>
+            </a:r>
+            <a:br/>
+            <a:r>
+              <a:t>에이전틱 워크플로우로 전환</a:t>
+            </a:r>
+          </a:p>
+        </p:txBody>
+      </p:sp>
+      <p:sp>
+        <p:nvSpPr>
+          <p:cNvPr id="17" name="TextBox 16"/>
+          <p:cNvSpPr txBox="1"/>
+          <p:nvPr/>
+        </p:nvSpPr>
+        <p:spPr>
+          <a:xfrm>
+            <a:off x="6309360" y="4114800"/>
+            <a:ext cx="2560320" cy="457200"/>
+          </a:xfrm>
+          <a:prstGeom prst="rect">
+            <a:avLst/>
+          </a:prstGeom>
+          <a:noFill/>
+        </p:spPr>
+        <p:txBody>
+          <a:bodyPr wrap="square">
+            <a:spAutoFit/>
+          </a:bodyPr>
+          <a:lstStyle/>
+          <a:p>
+            <a:pPr algn="ctr">
+              <a:defRPr sz="1600" b="0">
+                <a:solidFill>
+                  <a:srgbClr val="A0A0B0"/>
+                </a:solidFill>
+                <a:latin typeface="Apple SD Gothic Neo"/>
+              </a:defRPr>
+            </a:pPr>
+            <a:r>
+              <a:t>실무 적용</a:t>
+            </a:r>
+          </a:p>
+        </p:txBody>
+      </p:sp>
+      <p:sp>
+        <p:nvSpPr>
+          <p:cNvPr id="18" name="Rounded Rectangle 17"/>
+          <p:cNvSpPr/>
+          <p:nvPr/>
+        </p:nvSpPr>
+        <p:spPr>
+          <a:xfrm>
+            <a:off x="9235440" y="1371600"/>
+            <a:ext cx="2560320" cy="3657600"/>
+          </a:xfrm>
+          <a:prstGeom prst="roundRect">
+            <a:avLst/>
+          </a:prstGeom>
+          <a:solidFill>
+            <a:srgbClr val="16213E"/>
+          </a:solidFill>
+          <a:ln>
+            <a:noFill/>
+          </a:ln>
+          <a:effectLst/>
+        </p:spPr>
+        <p:style>
+          <a:lnRef idx="1">
+            <a:schemeClr val="accent1"/>
+          </a:lnRef>
+          <a:fillRef idx="3">
+            <a:schemeClr val="accent1"/>
+          </a:fillRef>
+          <a:effectRef idx="2">
+            <a:schemeClr val="accent1"/>
+          </a:effectRef>
+          <a:fontRef idx="minor">
+            <a:schemeClr val="lt1"/>
+          </a:fontRef>
+        </p:style>
+        <p:txBody>
+          <a:bodyPr rtlCol="0" anchor="ctr"/>
+          <a:lstStyle/>
+          <a:p>
+            <a:pPr algn="ctr"/>
+          </a:p>
+        </p:txBody>
+      </p:sp>
+      <p:sp>
+        <p:nvSpPr>
+          <p:cNvPr id="19" name="Rectangle 18"/>
+          <p:cNvSpPr/>
+          <p:nvPr/>
+        </p:nvSpPr>
+        <p:spPr>
+          <a:xfrm>
+            <a:off x="9235440" y="1371600"/>
+            <a:ext cx="2560320" cy="73152"/>
+          </a:xfrm>
+          <a:prstGeom prst="rect">
+            <a:avLst/>
+          </a:prstGeom>
+          <a:solidFill>
+            <a:srgbClr val="EA4B71"/>
+          </a:solidFill>
+          <a:ln>
+            <a:noFill/>
+          </a:ln>
+        </p:spPr>
+        <p:style>
+          <a:lnRef idx="1">
+            <a:schemeClr val="accent1"/>
+          </a:lnRef>
+          <a:fillRef idx="3">
+            <a:schemeClr val="accent1"/>
+          </a:fillRef>
+          <a:effectRef idx="2">
+            <a:schemeClr val="accent1"/>
+          </a:effectRef>
+          <a:fontRef idx="minor">
+            <a:schemeClr val="lt1"/>
+          </a:fontRef>
+        </p:style>
+        <p:txBody>
+          <a:bodyPr rtlCol="0" anchor="ctr"/>
+          <a:lstStyle/>
+          <a:p>
+            <a:pPr algn="ctr"/>
+          </a:p>
+        </p:txBody>
+      </p:sp>
+      <p:sp>
+        <p:nvSpPr>
+          <p:cNvPr id="20" name="TextBox 19"/>
+          <p:cNvSpPr txBox="1"/>
+          <p:nvPr/>
+        </p:nvSpPr>
+        <p:spPr>
+          <a:xfrm>
+            <a:off x="9235440" y="1645920"/>
+            <a:ext cx="2560320" cy="457200"/>
+          </a:xfrm>
+          <a:prstGeom prst="rect">
+            <a:avLst/>
+          </a:prstGeom>
+          <a:noFill/>
+        </p:spPr>
+        <p:txBody>
+          <a:bodyPr wrap="square">
+            <a:spAutoFit/>
+          </a:bodyPr>
+          <a:lstStyle/>
+          <a:p>
+            <a:pPr algn="ctr">
+              <a:defRPr sz="2400" b="1">
                 <a:solidFill>
                   <a:srgbClr val="EA4B71"/>
                 </a:solidFill>
@@ -22494,11 +24841,83 @@
               </a:defRPr>
             </a:pPr>
             <a:r>
-              <a:t>에이전틱 AI 시대는 이미 시작되었고,</a:t>
+              <a:t>4주차</a:t>
+            </a:r>
+          </a:p>
+        </p:txBody>
+      </p:sp>
+      <p:sp>
+        <p:nvSpPr>
+          <p:cNvPr id="21" name="TextBox 20"/>
+          <p:cNvSpPr txBox="1"/>
+          <p:nvPr/>
+        </p:nvSpPr>
+        <p:spPr>
+          <a:xfrm>
+            <a:off x="9418320" y="2286000"/>
+            <a:ext cx="2194560" cy="1371600"/>
+          </a:xfrm>
+          <a:prstGeom prst="rect">
+            <a:avLst/>
+          </a:prstGeom>
+          <a:noFill/>
+        </p:spPr>
+        <p:txBody>
+          <a:bodyPr wrap="square">
+            <a:spAutoFit/>
+          </a:bodyPr>
+          <a:lstStyle/>
+          <a:p>
+            <a:pPr algn="ctr">
+              <a:defRPr sz="1500" b="0">
+                <a:solidFill>
+                  <a:srgbClr val="FFFFFF"/>
+                </a:solidFill>
+                <a:latin typeface="Apple SD Gothic Neo"/>
+              </a:defRPr>
+            </a:pPr>
+            <a:r>
+              <a:t>팀 리뷰</a:t>
             </a:r>
             <a:br/>
             <a:r>
-              <a:t>n8n은 그 시작을 가장 낮은 문턱에서 열어준다.</a:t>
+              <a:t>확대 적용 여부 결정</a:t>
+            </a:r>
+          </a:p>
+        </p:txBody>
+      </p:sp>
+      <p:sp>
+        <p:nvSpPr>
+          <p:cNvPr id="22" name="TextBox 21"/>
+          <p:cNvSpPr txBox="1"/>
+          <p:nvPr/>
+        </p:nvSpPr>
+        <p:spPr>
+          <a:xfrm>
+            <a:off x="9235440" y="4114800"/>
+            <a:ext cx="2560320" cy="457200"/>
+          </a:xfrm>
+          <a:prstGeom prst="rect">
+            <a:avLst/>
+          </a:prstGeom>
+          <a:noFill/>
+        </p:spPr>
+        <p:txBody>
+          <a:bodyPr wrap="square">
+            <a:spAutoFit/>
+          </a:bodyPr>
+          <a:lstStyle/>
+          <a:p>
+            <a:pPr algn="ctr">
+              <a:defRPr sz="1600" b="0">
+                <a:solidFill>
+                  <a:srgbClr val="A0A0B0"/>
+                </a:solidFill>
+                <a:latin typeface="Apple SD Gothic Neo"/>
+              </a:defRPr>
+            </a:pPr>
+            <a:r>
+              <a:t>Go / No-Go</a:t>
             </a:r>
           </a:p>
         </p:txBody>
@@ -24261,6 +26680,195 @@
         </p:nvSpPr>
         <p:spPr>
           <a:xfrm>
+            <a:off x="914400" y="1371600"/>
+            <a:ext cx="10058400" cy="914400"/>
+          </a:xfrm>
+          <a:prstGeom prst="rect">
+            <a:avLst/>
+          </a:prstGeom>
+          <a:noFill/>
+        </p:spPr>
+        <p:txBody>
+          <a:bodyPr wrap="square">
+            <a:spAutoFit/>
+          </a:bodyPr>
+          <a:lstStyle/>
+          <a:p>
+            <a:pPr algn="ctr">
+              <a:defRPr sz="3200" b="1">
+                <a:solidFill>
+                  <a:srgbClr val="FFFFFF"/>
+                </a:solidFill>
+                <a:latin typeface="Apple SD Gothic Neo"/>
+              </a:defRPr>
+            </a:pPr>
+            <a:r>
+              <a:t>"에이전틱 AI의 성패는</a:t>
+            </a:r>
+            <a:br/>
+            <a:r>
+              <a:t>모델이 아니라 오케스트레이션에 달려 있다"</a:t>
+            </a:r>
+          </a:p>
+        </p:txBody>
+      </p:sp>
+      <p:sp>
+        <p:nvSpPr>
+          <p:cNvPr id="3" name="Rectangle 2"/>
+          <p:cNvSpPr/>
+          <p:nvPr/>
+        </p:nvSpPr>
+        <p:spPr>
+          <a:xfrm>
+            <a:off x="3657600" y="3200400"/>
+            <a:ext cx="4572000" cy="25400"/>
+          </a:xfrm>
+          <a:prstGeom prst="rect">
+            <a:avLst/>
+          </a:prstGeom>
+          <a:solidFill>
+            <a:srgbClr val="00D2FF"/>
+          </a:solidFill>
+          <a:ln>
+            <a:noFill/>
+          </a:ln>
+        </p:spPr>
+        <p:style>
+          <a:lnRef idx="1">
+            <a:schemeClr val="accent1"/>
+          </a:lnRef>
+          <a:fillRef idx="3">
+            <a:schemeClr val="accent1"/>
+          </a:fillRef>
+          <a:effectRef idx="2">
+            <a:schemeClr val="accent1"/>
+          </a:effectRef>
+          <a:fontRef idx="minor">
+            <a:schemeClr val="lt1"/>
+          </a:fontRef>
+        </p:style>
+        <p:txBody>
+          <a:bodyPr rtlCol="0" anchor="ctr"/>
+          <a:lstStyle/>
+          <a:p>
+            <a:pPr algn="ctr"/>
+          </a:p>
+        </p:txBody>
+      </p:sp>
+      <p:sp>
+        <p:nvSpPr>
+          <p:cNvPr id="4" name="TextBox 3"/>
+          <p:cNvSpPr txBox="1"/>
+          <p:nvPr/>
+        </p:nvSpPr>
+        <p:spPr>
+          <a:xfrm>
+            <a:off x="914400" y="3657600"/>
+            <a:ext cx="10058400" cy="731520"/>
+          </a:xfrm>
+          <a:prstGeom prst="rect">
+            <a:avLst/>
+          </a:prstGeom>
+          <a:noFill/>
+        </p:spPr>
+        <p:txBody>
+          <a:bodyPr wrap="square">
+            <a:spAutoFit/>
+          </a:bodyPr>
+          <a:lstStyle/>
+          <a:p>
+            <a:pPr algn="ctr">
+              <a:defRPr sz="2200" b="0">
+                <a:solidFill>
+                  <a:srgbClr val="A0A0B0"/>
+                </a:solidFill>
+                <a:latin typeface="Apple SD Gothic Neo"/>
+              </a:defRPr>
+            </a:pPr>
+            <a:r>
+              <a:t>성공할지 실패할지는 아직 모른다.</a:t>
+            </a:r>
+            <a:br/>
+            <a:r>
+              <a:t>하지만 해보지 않으면 영원히 모른다.</a:t>
+            </a:r>
+          </a:p>
+        </p:txBody>
+      </p:sp>
+      <p:sp>
+        <p:nvSpPr>
+          <p:cNvPr id="5" name="TextBox 4"/>
+          <p:cNvSpPr txBox="1"/>
+          <p:nvPr/>
+        </p:nvSpPr>
+        <p:spPr>
+          <a:xfrm>
+            <a:off x="914400" y="5029200"/>
+            <a:ext cx="10058400" cy="457200"/>
+          </a:xfrm>
+          <a:prstGeom prst="rect">
+            <a:avLst/>
+          </a:prstGeom>
+          <a:noFill/>
+        </p:spPr>
+        <p:txBody>
+          <a:bodyPr wrap="square">
+            <a:spAutoFit/>
+          </a:bodyPr>
+          <a:lstStyle/>
+          <a:p>
+            <a:pPr algn="ctr">
+              <a:defRPr sz="2000" b="1">
+                <a:solidFill>
+                  <a:srgbClr val="EA4B71"/>
+                </a:solidFill>
+                <a:latin typeface="Apple SD Gothic Neo"/>
+              </a:defRPr>
+            </a:pPr>
+            <a:r>
+              <a:t>에이전틱 AI 시대는 이미 시작되었고,</a:t>
+            </a:r>
+            <a:br/>
+            <a:r>
+              <a:t>n8n은 그 시작을 가장 낮은 문턱에서 열어준다.</a:t>
+            </a:r>
+          </a:p>
+        </p:txBody>
+      </p:sp>
+    </p:spTree>
+  </p:cSld>
+  <p:clrMapOvr>
+    <a:masterClrMapping/>
+  </p:clrMapOvr>
+</p:sld>
+</file>
+
+<file path=ppt/slides/slide31.xml><?xml version="1.0" encoding="utf-8"?>
+<p:sld xmlns:a="http://schemas.openxmlformats.org/drawingml/2006/main" xmlns:p="http://schemas.openxmlformats.org/presentationml/2006/main" xmlns:r="http://schemas.openxmlformats.org/officeDocument/2006/relationships">
+  <p:cSld>
+    <p:bg>
+      <p:bgPr>
+        <a:solidFill>
+          <a:srgbClr val="1A1A2E"/>
+        </a:solidFill>
+        <a:effectLst/>
+      </p:bgPr>
+    </p:bg>
+    <p:spTree>
+      <p:nvGrpSpPr>
+        <p:cNvPr id="1" name=""/>
+        <p:cNvGrpSpPr/>
+        <p:nvPr/>
+      </p:nvGrpSpPr>
+      <p:grpSpPr/>
+      <p:sp>
+        <p:nvSpPr>
+          <p:cNvPr id="2" name="TextBox 1"/>
+          <p:cNvSpPr txBox="1"/>
+          <p:nvPr/>
+        </p:nvSpPr>
+        <p:spPr>
+          <a:xfrm>
             <a:off x="914400" y="2286000"/>
             <a:ext cx="10058400" cy="914400"/>
           </a:xfrm>
@@ -25724,13 +28332,73 @@
       </p:sp>
       <p:sp>
         <p:nvSpPr>
-          <p:cNvPr id="5" name="TextBox 4"/>
-          <p:cNvSpPr txBox="1"/>
-          <p:nvPr/>
-        </p:nvSpPr>
-        <p:spPr>
-          <a:xfrm>
-            <a:off x="822960" y="1280160"/>
+          <p:cNvPr id="5" name="Oval 4"/>
+          <p:cNvSpPr/>
+          <p:nvPr/>
+        </p:nvSpPr>
+        <p:spPr>
+          <a:xfrm>
+            <a:off x="731520" y="1325880"/>
+            <a:ext cx="640080" cy="640080"/>
+          </a:xfrm>
+          <a:prstGeom prst="ellipse">
+            <a:avLst/>
+          </a:prstGeom>
+          <a:solidFill>
+            <a:srgbClr val="000000"/>
+          </a:solidFill>
+          <a:ln>
+            <a:noFill/>
+          </a:ln>
+          <a:effectLst/>
+        </p:spPr>
+        <p:style>
+          <a:lnRef idx="1">
+            <a:schemeClr val="accent1"/>
+          </a:lnRef>
+          <a:fillRef idx="3">
+            <a:schemeClr val="accent1"/>
+          </a:fillRef>
+          <a:effectRef idx="2">
+            <a:schemeClr val="accent1"/>
+          </a:effectRef>
+          <a:fontRef idx="minor">
+            <a:schemeClr val="lt1"/>
+          </a:fontRef>
+        </p:style>
+        <p:txBody>
+          <a:bodyPr rtlCol="0" anchor="ctr" wrap="none"/>
+          <a:lstStyle/>
+          <a:p>
+            <a:pPr algn="ctr">
+              <a:spcBef>
+                <a:spcPts val="0"/>
+              </a:spcBef>
+              <a:spcAft>
+                <a:spcPts val="0"/>
+              </a:spcAft>
+              <a:defRPr sz="1400" b="1">
+                <a:solidFill>
+                  <a:srgbClr val="FFFFFF"/>
+                </a:solidFill>
+                <a:latin typeface="Apple SD Gothic Neo"/>
+              </a:defRPr>
+            </a:pPr>
+            <a:r>
+              <a:t>AI</a:t>
+            </a:r>
+          </a:p>
+        </p:txBody>
+      </p:sp>
+      <p:sp>
+        <p:nvSpPr>
+          <p:cNvPr id="6" name="TextBox 5"/>
+          <p:cNvSpPr txBox="1"/>
+          <p:nvPr/>
+        </p:nvSpPr>
+        <p:spPr>
+          <a:xfrm>
+            <a:off x="1554480" y="1280160"/>
             <a:ext cx="1828800" cy="457200"/>
           </a:xfrm>
           <a:prstGeom prst="rect">
@@ -25760,13 +28428,13 @@
       </p:sp>
       <p:sp>
         <p:nvSpPr>
-          <p:cNvPr id="6" name="TextBox 5"/>
-          <p:cNvSpPr txBox="1"/>
-          <p:nvPr/>
-        </p:nvSpPr>
-        <p:spPr>
-          <a:xfrm>
-            <a:off x="2926080" y="1280160"/>
+          <p:cNvPr id="7" name="TextBox 6"/>
+          <p:cNvSpPr txBox="1"/>
+          <p:nvPr/>
+        </p:nvSpPr>
+        <p:spPr>
+          <a:xfrm>
+            <a:off x="3474720" y="1280160"/>
             <a:ext cx="3200400" cy="457200"/>
           </a:xfrm>
           <a:prstGeom prst="rect">
@@ -25796,14 +28464,14 @@
       </p:sp>
       <p:sp>
         <p:nvSpPr>
-          <p:cNvPr id="7" name="TextBox 6"/>
-          <p:cNvSpPr txBox="1"/>
-          <p:nvPr/>
-        </p:nvSpPr>
-        <p:spPr>
-          <a:xfrm>
-            <a:off x="6400800" y="1280160"/>
-            <a:ext cx="5029200" cy="457200"/>
+          <p:cNvPr id="8" name="TextBox 7"/>
+          <p:cNvSpPr txBox="1"/>
+          <p:nvPr/>
+        </p:nvSpPr>
+        <p:spPr>
+          <a:xfrm>
+            <a:off x="6858000" y="1280160"/>
+            <a:ext cx="4572000" cy="457200"/>
           </a:xfrm>
           <a:prstGeom prst="rect">
             <a:avLst/>
@@ -25832,7 +28500,7 @@
       </p:sp>
       <p:sp>
         <p:nvSpPr>
-          <p:cNvPr id="8" name="Rounded Rectangle 7"/>
+          <p:cNvPr id="9" name="Rounded Rectangle 8"/>
           <p:cNvSpPr/>
           <p:nvPr/>
         </p:nvSpPr>
@@ -25876,7 +28544,7 @@
       </p:sp>
       <p:sp>
         <p:nvSpPr>
-          <p:cNvPr id="9" name="Rectangle 8"/>
+          <p:cNvPr id="10" name="Rectangle 9"/>
           <p:cNvSpPr/>
           <p:nvPr/>
         </p:nvSpPr>
@@ -25919,13 +28587,73 @@
       </p:sp>
       <p:sp>
         <p:nvSpPr>
-          <p:cNvPr id="10" name="TextBox 9"/>
-          <p:cNvSpPr txBox="1"/>
-          <p:nvPr/>
-        </p:nvSpPr>
-        <p:spPr>
-          <a:xfrm>
-            <a:off x="822960" y="2331720"/>
+          <p:cNvPr id="11" name="Oval 10"/>
+          <p:cNvSpPr/>
+          <p:nvPr/>
+        </p:nvSpPr>
+        <p:spPr>
+          <a:xfrm>
+            <a:off x="731520" y="2377440"/>
+            <a:ext cx="640080" cy="640080"/>
+          </a:xfrm>
+          <a:prstGeom prst="ellipse">
+            <a:avLst/>
+          </a:prstGeom>
+          <a:solidFill>
+            <a:srgbClr val="D4A574"/>
+          </a:solidFill>
+          <a:ln>
+            <a:noFill/>
+          </a:ln>
+          <a:effectLst/>
+        </p:spPr>
+        <p:style>
+          <a:lnRef idx="1">
+            <a:schemeClr val="accent1"/>
+          </a:lnRef>
+          <a:fillRef idx="3">
+            <a:schemeClr val="accent1"/>
+          </a:fillRef>
+          <a:effectRef idx="2">
+            <a:schemeClr val="accent1"/>
+          </a:effectRef>
+          <a:fontRef idx="minor">
+            <a:schemeClr val="lt1"/>
+          </a:fontRef>
+        </p:style>
+        <p:txBody>
+          <a:bodyPr rtlCol="0" anchor="ctr" wrap="none"/>
+          <a:lstStyle/>
+          <a:p>
+            <a:pPr algn="ctr">
+              <a:spcBef>
+                <a:spcPts val="0"/>
+              </a:spcBef>
+              <a:spcAft>
+                <a:spcPts val="0"/>
+              </a:spcAft>
+              <a:defRPr sz="1400" b="1">
+                <a:solidFill>
+                  <a:srgbClr val="FFFFFF"/>
+                </a:solidFill>
+                <a:latin typeface="Apple SD Gothic Neo"/>
+              </a:defRPr>
+            </a:pPr>
+            <a:r>
+              <a:t>A</a:t>
+            </a:r>
+          </a:p>
+        </p:txBody>
+      </p:sp>
+      <p:sp>
+        <p:nvSpPr>
+          <p:cNvPr id="12" name="TextBox 11"/>
+          <p:cNvSpPr txBox="1"/>
+          <p:nvPr/>
+        </p:nvSpPr>
+        <p:spPr>
+          <a:xfrm>
+            <a:off x="1554480" y="2331720"/>
             <a:ext cx="1828800" cy="457200"/>
           </a:xfrm>
           <a:prstGeom prst="rect">
@@ -25955,13 +28683,13 @@
       </p:sp>
       <p:sp>
         <p:nvSpPr>
-          <p:cNvPr id="11" name="TextBox 10"/>
-          <p:cNvSpPr txBox="1"/>
-          <p:nvPr/>
-        </p:nvSpPr>
-        <p:spPr>
-          <a:xfrm>
-            <a:off x="2926080" y="2331720"/>
+          <p:cNvPr id="13" name="TextBox 12"/>
+          <p:cNvSpPr txBox="1"/>
+          <p:nvPr/>
+        </p:nvSpPr>
+        <p:spPr>
+          <a:xfrm>
+            <a:off x="3474720" y="2331720"/>
             <a:ext cx="3200400" cy="457200"/>
           </a:xfrm>
           <a:prstGeom prst="rect">
@@ -25991,14 +28719,14 @@
       </p:sp>
       <p:sp>
         <p:nvSpPr>
-          <p:cNvPr id="12" name="TextBox 11"/>
-          <p:cNvSpPr txBox="1"/>
-          <p:nvPr/>
-        </p:nvSpPr>
-        <p:spPr>
-          <a:xfrm>
-            <a:off x="6400800" y="2331720"/>
-            <a:ext cx="5029200" cy="457200"/>
+          <p:cNvPr id="14" name="TextBox 13"/>
+          <p:cNvSpPr txBox="1"/>
+          <p:nvPr/>
+        </p:nvSpPr>
+        <p:spPr>
+          <a:xfrm>
+            <a:off x="6858000" y="2331720"/>
+            <a:ext cx="4572000" cy="457200"/>
           </a:xfrm>
           <a:prstGeom prst="rect">
             <a:avLst/>
@@ -26027,7 +28755,7 @@
       </p:sp>
       <p:sp>
         <p:nvSpPr>
-          <p:cNvPr id="13" name="Rounded Rectangle 12"/>
+          <p:cNvPr id="15" name="Rounded Rectangle 14"/>
           <p:cNvSpPr/>
           <p:nvPr/>
         </p:nvSpPr>
@@ -26071,7 +28799,7 @@
       </p:sp>
       <p:sp>
         <p:nvSpPr>
-          <p:cNvPr id="14" name="Rectangle 13"/>
+          <p:cNvPr id="16" name="Rectangle 15"/>
           <p:cNvSpPr/>
           <p:nvPr/>
         </p:nvSpPr>
@@ -26114,13 +28842,73 @@
       </p:sp>
       <p:sp>
         <p:nvSpPr>
-          <p:cNvPr id="15" name="TextBox 14"/>
-          <p:cNvSpPr txBox="1"/>
-          <p:nvPr/>
-        </p:nvSpPr>
-        <p:spPr>
-          <a:xfrm>
-            <a:off x="822960" y="3383279"/>
+          <p:cNvPr id="17" name="Oval 16"/>
+          <p:cNvSpPr/>
+          <p:nvPr/>
+        </p:nvSpPr>
+        <p:spPr>
+          <a:xfrm>
+            <a:off x="731520" y="3428999"/>
+            <a:ext cx="640080" cy="640080"/>
+          </a:xfrm>
+          <a:prstGeom prst="ellipse">
+            <a:avLst/>
+          </a:prstGeom>
+          <a:solidFill>
+            <a:srgbClr val="4285F4"/>
+          </a:solidFill>
+          <a:ln>
+            <a:noFill/>
+          </a:ln>
+          <a:effectLst/>
+        </p:spPr>
+        <p:style>
+          <a:lnRef idx="1">
+            <a:schemeClr val="accent1"/>
+          </a:lnRef>
+          <a:fillRef idx="3">
+            <a:schemeClr val="accent1"/>
+          </a:fillRef>
+          <a:effectRef idx="2">
+            <a:schemeClr val="accent1"/>
+          </a:effectRef>
+          <a:fontRef idx="minor">
+            <a:schemeClr val="lt1"/>
+          </a:fontRef>
+        </p:style>
+        <p:txBody>
+          <a:bodyPr rtlCol="0" anchor="ctr" wrap="none"/>
+          <a:lstStyle/>
+          <a:p>
+            <a:pPr algn="ctr">
+              <a:spcBef>
+                <a:spcPts val="0"/>
+              </a:spcBef>
+              <a:spcAft>
+                <a:spcPts val="0"/>
+              </a:spcAft>
+              <a:defRPr sz="1400" b="1">
+                <a:solidFill>
+                  <a:srgbClr val="FFFFFF"/>
+                </a:solidFill>
+                <a:latin typeface="Apple SD Gothic Neo"/>
+              </a:defRPr>
+            </a:pPr>
+            <a:r>
+              <a:t>G</a:t>
+            </a:r>
+          </a:p>
+        </p:txBody>
+      </p:sp>
+      <p:sp>
+        <p:nvSpPr>
+          <p:cNvPr id="18" name="TextBox 17"/>
+          <p:cNvSpPr txBox="1"/>
+          <p:nvPr/>
+        </p:nvSpPr>
+        <p:spPr>
+          <a:xfrm>
+            <a:off x="1554480" y="3383279"/>
             <a:ext cx="1828800" cy="457200"/>
           </a:xfrm>
           <a:prstGeom prst="rect">
@@ -26150,13 +28938,13 @@
       </p:sp>
       <p:sp>
         <p:nvSpPr>
-          <p:cNvPr id="16" name="TextBox 15"/>
-          <p:cNvSpPr txBox="1"/>
-          <p:nvPr/>
-        </p:nvSpPr>
-        <p:spPr>
-          <a:xfrm>
-            <a:off x="2926080" y="3383279"/>
+          <p:cNvPr id="19" name="TextBox 18"/>
+          <p:cNvSpPr txBox="1"/>
+          <p:nvPr/>
+        </p:nvSpPr>
+        <p:spPr>
+          <a:xfrm>
+            <a:off x="3474720" y="3383279"/>
             <a:ext cx="3200400" cy="457200"/>
           </a:xfrm>
           <a:prstGeom prst="rect">
@@ -26186,14 +28974,14 @@
       </p:sp>
       <p:sp>
         <p:nvSpPr>
-          <p:cNvPr id="17" name="TextBox 16"/>
-          <p:cNvSpPr txBox="1"/>
-          <p:nvPr/>
-        </p:nvSpPr>
-        <p:spPr>
-          <a:xfrm>
-            <a:off x="6400800" y="3383279"/>
-            <a:ext cx="5029200" cy="457200"/>
+          <p:cNvPr id="20" name="TextBox 19"/>
+          <p:cNvSpPr txBox="1"/>
+          <p:nvPr/>
+        </p:nvSpPr>
+        <p:spPr>
+          <a:xfrm>
+            <a:off x="6858000" y="3383279"/>
+            <a:ext cx="4572000" cy="457200"/>
           </a:xfrm>
           <a:prstGeom prst="rect">
             <a:avLst/>
@@ -26222,7 +29010,7 @@
       </p:sp>
       <p:sp>
         <p:nvSpPr>
-          <p:cNvPr id="18" name="Rounded Rectangle 17"/>
+          <p:cNvPr id="21" name="Rounded Rectangle 20"/>
           <p:cNvSpPr/>
           <p:nvPr/>
         </p:nvSpPr>
@@ -26266,7 +29054,7 @@
       </p:sp>
       <p:sp>
         <p:nvSpPr>
-          <p:cNvPr id="19" name="Rectangle 18"/>
+          <p:cNvPr id="22" name="Rectangle 21"/>
           <p:cNvSpPr/>
           <p:nvPr/>
         </p:nvSpPr>
@@ -26309,13 +29097,73 @@
       </p:sp>
       <p:sp>
         <p:nvSpPr>
-          <p:cNvPr id="20" name="TextBox 19"/>
-          <p:cNvSpPr txBox="1"/>
-          <p:nvPr/>
-        </p:nvSpPr>
-        <p:spPr>
-          <a:xfrm>
-            <a:off x="822960" y="4434840"/>
+          <p:cNvPr id="23" name="Oval 22"/>
+          <p:cNvSpPr/>
+          <p:nvPr/>
+        </p:nvSpPr>
+        <p:spPr>
+          <a:xfrm>
+            <a:off x="731520" y="4480560"/>
+            <a:ext cx="640080" cy="640080"/>
+          </a:xfrm>
+          <a:prstGeom prst="ellipse">
+            <a:avLst/>
+          </a:prstGeom>
+          <a:solidFill>
+            <a:srgbClr val="FF6600"/>
+          </a:solidFill>
+          <a:ln>
+            <a:noFill/>
+          </a:ln>
+          <a:effectLst/>
+        </p:spPr>
+        <p:style>
+          <a:lnRef idx="1">
+            <a:schemeClr val="accent1"/>
+          </a:lnRef>
+          <a:fillRef idx="3">
+            <a:schemeClr val="accent1"/>
+          </a:fillRef>
+          <a:effectRef idx="2">
+            <a:schemeClr val="accent1"/>
+          </a:effectRef>
+          <a:fontRef idx="minor">
+            <a:schemeClr val="lt1"/>
+          </a:fontRef>
+        </p:style>
+        <p:txBody>
+          <a:bodyPr rtlCol="0" anchor="ctr" wrap="none"/>
+          <a:lstStyle/>
+          <a:p>
+            <a:pPr algn="ctr">
+              <a:spcBef>
+                <a:spcPts val="0"/>
+              </a:spcBef>
+              <a:spcAft>
+                <a:spcPts val="0"/>
+              </a:spcAft>
+              <a:defRPr sz="1400" b="1">
+                <a:solidFill>
+                  <a:srgbClr val="FFFFFF"/>
+                </a:solidFill>
+                <a:latin typeface="Apple SD Gothic Neo"/>
+              </a:defRPr>
+            </a:pPr>
+            <a:r>
+              <a:t>OS</a:t>
+            </a:r>
+          </a:p>
+        </p:txBody>
+      </p:sp>
+      <p:sp>
+        <p:nvSpPr>
+          <p:cNvPr id="24" name="TextBox 23"/>
+          <p:cNvSpPr txBox="1"/>
+          <p:nvPr/>
+        </p:nvSpPr>
+        <p:spPr>
+          <a:xfrm>
+            <a:off x="1554480" y="4434840"/>
             <a:ext cx="1828800" cy="457200"/>
           </a:xfrm>
           <a:prstGeom prst="rect">
@@ -26345,13 +29193,13 @@
       </p:sp>
       <p:sp>
         <p:nvSpPr>
-          <p:cNvPr id="21" name="TextBox 20"/>
-          <p:cNvSpPr txBox="1"/>
-          <p:nvPr/>
-        </p:nvSpPr>
-        <p:spPr>
-          <a:xfrm>
-            <a:off x="2926080" y="4434840"/>
+          <p:cNvPr id="25" name="TextBox 24"/>
+          <p:cNvSpPr txBox="1"/>
+          <p:nvPr/>
+        </p:nvSpPr>
+        <p:spPr>
+          <a:xfrm>
+            <a:off x="3474720" y="4434840"/>
             <a:ext cx="3200400" cy="457200"/>
           </a:xfrm>
           <a:prstGeom prst="rect">
@@ -26381,14 +29229,14 @@
       </p:sp>
       <p:sp>
         <p:nvSpPr>
-          <p:cNvPr id="22" name="TextBox 21"/>
-          <p:cNvSpPr txBox="1"/>
-          <p:nvPr/>
-        </p:nvSpPr>
-        <p:spPr>
-          <a:xfrm>
-            <a:off x="6400800" y="4434840"/>
-            <a:ext cx="5029200" cy="457200"/>
+          <p:cNvPr id="26" name="TextBox 25"/>
+          <p:cNvSpPr txBox="1"/>
+          <p:nvPr/>
+        </p:nvSpPr>
+        <p:spPr>
+          <a:xfrm>
+            <a:off x="6858000" y="4434840"/>
+            <a:ext cx="4572000" cy="457200"/>
           </a:xfrm>
           <a:prstGeom prst="rect">
             <a:avLst/>
@@ -26417,7 +29265,7 @@
       </p:sp>
       <p:sp>
         <p:nvSpPr>
-          <p:cNvPr id="23" name="Rounded Rectangle 22"/>
+          <p:cNvPr id="27" name="Rounded Rectangle 26"/>
           <p:cNvSpPr/>
           <p:nvPr/>
         </p:nvSpPr>
@@ -26461,7 +29309,7 @@
       </p:sp>
       <p:sp>
         <p:nvSpPr>
-          <p:cNvPr id="24" name="Rectangle 23"/>
+          <p:cNvPr id="28" name="Rectangle 27"/>
           <p:cNvSpPr/>
           <p:nvPr/>
         </p:nvSpPr>
@@ -26504,13 +29352,73 @@
       </p:sp>
       <p:sp>
         <p:nvSpPr>
-          <p:cNvPr id="25" name="TextBox 24"/>
-          <p:cNvSpPr txBox="1"/>
-          <p:nvPr/>
-        </p:nvSpPr>
-        <p:spPr>
-          <a:xfrm>
-            <a:off x="822960" y="5486399"/>
+          <p:cNvPr id="29" name="Oval 28"/>
+          <p:cNvSpPr/>
+          <p:nvPr/>
+        </p:nvSpPr>
+        <p:spPr>
+          <a:xfrm>
+            <a:off x="731520" y="5532119"/>
+            <a:ext cx="640080" cy="640080"/>
+          </a:xfrm>
+          <a:prstGeom prst="ellipse">
+            <a:avLst/>
+          </a:prstGeom>
+          <a:solidFill>
+            <a:srgbClr val="8B5CF6"/>
+          </a:solidFill>
+          <a:ln>
+            <a:noFill/>
+          </a:ln>
+          <a:effectLst/>
+        </p:spPr>
+        <p:style>
+          <a:lnRef idx="1">
+            <a:schemeClr val="accent1"/>
+          </a:lnRef>
+          <a:fillRef idx="3">
+            <a:schemeClr val="accent1"/>
+          </a:fillRef>
+          <a:effectRef idx="2">
+            <a:schemeClr val="accent1"/>
+          </a:effectRef>
+          <a:fontRef idx="minor">
+            <a:schemeClr val="lt1"/>
+          </a:fontRef>
+        </p:style>
+        <p:txBody>
+          <a:bodyPr rtlCol="0" anchor="ctr" wrap="none"/>
+          <a:lstStyle/>
+          <a:p>
+            <a:pPr algn="ctr">
+              <a:spcBef>
+                <a:spcPts val="0"/>
+              </a:spcBef>
+              <a:spcAft>
+                <a:spcPts val="0"/>
+              </a:spcAft>
+              <a:defRPr sz="1400" b="1">
+                <a:solidFill>
+                  <a:srgbClr val="FFFFFF"/>
+                </a:solidFill>
+                <a:latin typeface="Apple SD Gothic Neo"/>
+              </a:defRPr>
+            </a:pPr>
+            <a:r>
+              <a:t>X</a:t>
+            </a:r>
+          </a:p>
+        </p:txBody>
+      </p:sp>
+      <p:sp>
+        <p:nvSpPr>
+          <p:cNvPr id="30" name="TextBox 29"/>
+          <p:cNvSpPr txBox="1"/>
+          <p:nvPr/>
+        </p:nvSpPr>
+        <p:spPr>
+          <a:xfrm>
+            <a:off x="1554480" y="5486399"/>
             <a:ext cx="1828800" cy="457200"/>
           </a:xfrm>
           <a:prstGeom prst="rect">
@@ -26540,13 +29448,13 @@
       </p:sp>
       <p:sp>
         <p:nvSpPr>
-          <p:cNvPr id="26" name="TextBox 25"/>
-          <p:cNvSpPr txBox="1"/>
-          <p:nvPr/>
-        </p:nvSpPr>
-        <p:spPr>
-          <a:xfrm>
-            <a:off x="2926080" y="5486399"/>
+          <p:cNvPr id="31" name="TextBox 30"/>
+          <p:cNvSpPr txBox="1"/>
+          <p:nvPr/>
+        </p:nvSpPr>
+        <p:spPr>
+          <a:xfrm>
+            <a:off x="3474720" y="5486399"/>
             <a:ext cx="3200400" cy="457200"/>
           </a:xfrm>
           <a:prstGeom prst="rect">
@@ -26576,14 +29484,14 @@
       </p:sp>
       <p:sp>
         <p:nvSpPr>
-          <p:cNvPr id="27" name="TextBox 26"/>
-          <p:cNvSpPr txBox="1"/>
-          <p:nvPr/>
-        </p:nvSpPr>
-        <p:spPr>
-          <a:xfrm>
-            <a:off x="6400800" y="5486399"/>
-            <a:ext cx="5029200" cy="457200"/>
+          <p:cNvPr id="32" name="TextBox 31"/>
+          <p:cNvSpPr txBox="1"/>
+          <p:nvPr/>
+        </p:nvSpPr>
+        <p:spPr>
+          <a:xfrm>
+            <a:off x="6858000" y="5486399"/>
+            <a:ext cx="4572000" cy="457200"/>
           </a:xfrm>
           <a:prstGeom prst="rect">
             <a:avLst/>
@@ -26612,7 +29520,7 @@
       </p:sp>
       <p:sp>
         <p:nvSpPr>
-          <p:cNvPr id="28" name="TextBox 27"/>
+          <p:cNvPr id="33" name="TextBox 32"/>
           <p:cNvSpPr txBox="1"/>
           <p:nvPr/>
         </p:nvSpPr>
